--- a/reports/exp4_nmt_transformer.pptx
+++ b/reports/exp4_nmt_transformer.pptx
@@ -3092,7 +3092,7 @@
     <p:bg>
       <p:bgPr>
         <a:solidFill>
-          <a:srgbClr val="1F497D"/>
+          <a:srgbClr val="1A335C"/>
         </a:solidFill>
         <a:effectLst/>
       </p:bgPr>
@@ -3113,13 +3113,13 @@
         <p:spPr>
           <a:xfrm>
             <a:off x="0" y="0"/>
-            <a:ext cx="12188952" cy="137160"/>
+            <a:ext cx="164592" cy="6858000"/>
           </a:xfrm>
           <a:prstGeom prst="rect">
             <a:avLst/>
           </a:prstGeom>
           <a:solidFill>
-            <a:srgbClr val="C89620"/>
+            <a:srgbClr val="B8860B"/>
           </a:solidFill>
           <a:ln>
             <a:noFill/>
@@ -3147,22 +3147,80 @@
           </a:p>
         </p:txBody>
       </p:sp>
-      <p:sp>
-        <p:nvSpPr>
-          <p:cNvPr id="3" name="Rectangle 2"/>
+      <p:pic>
+        <p:nvPicPr>
+          <p:cNvPr id="3" name="Picture 2" descr="ucas_seal.png"/>
+          <p:cNvPicPr>
+            <a:picLocks noChangeAspect="1"/>
+          </p:cNvPicPr>
+          <p:nvPr/>
+        </p:nvPicPr>
+        <p:blipFill>
+          <a:blip r:embed="rId2"/>
+          <a:stretch>
+            <a:fillRect/>
+          </a:stretch>
+        </p:blipFill>
+        <p:spPr>
+          <a:xfrm>
+            <a:off x="10771632" y="228600"/>
+            <a:ext cx="1188720" cy="1069848"/>
+          </a:xfrm>
+          <a:prstGeom prst="rect">
+            <a:avLst/>
+          </a:prstGeom>
+        </p:spPr>
+      </p:pic>
+      <p:sp>
+        <p:nvSpPr>
+          <p:cNvPr id="4" name="TextBox 3"/>
+          <p:cNvSpPr txBox="1"/>
+          <p:nvPr/>
+        </p:nvSpPr>
+        <p:spPr>
+          <a:xfrm>
+            <a:off x="502920" y="1737360"/>
+            <a:ext cx="10515600" cy="1280160"/>
+          </a:xfrm>
+          <a:prstGeom prst="rect">
+            <a:avLst/>
+          </a:prstGeom>
+          <a:noFill/>
+        </p:spPr>
+        <p:txBody>
+          <a:bodyPr wrap="square">
+            <a:spAutoFit/>
+          </a:bodyPr>
+          <a:lstStyle/>
+          <a:p>
+            <a:pPr algn="l"/>
+            <a:r>
+              <a:rPr sz="3400" b="1" i="0">
+                <a:solidFill>
+                  <a:srgbClr val="FFFFFF"/>
+                </a:solidFill>
+              </a:rPr>
+              <a:t>实验四：基于 Transformer 的神经机器翻译</a:t>
+            </a:r>
+          </a:p>
+        </p:txBody>
+      </p:sp>
+      <p:sp>
+        <p:nvSpPr>
+          <p:cNvPr id="5" name="Rectangle 4"/>
           <p:cNvSpPr/>
           <p:nvPr/>
         </p:nvSpPr>
         <p:spPr>
           <a:xfrm>
-            <a:off x="0" y="6720840"/>
-            <a:ext cx="12188952" cy="137160"/>
+            <a:off x="502920" y="3154680"/>
+            <a:ext cx="8686800" cy="36576"/>
           </a:xfrm>
           <a:prstGeom prst="rect">
             <a:avLst/>
           </a:prstGeom>
           <a:solidFill>
-            <a:srgbClr val="C89620"/>
+            <a:srgbClr val="B8860B"/>
           </a:solidFill>
           <a:ln>
             <a:noFill/>
@@ -3192,14 +3250,14 @@
       </p:sp>
       <p:sp>
         <p:nvSpPr>
-          <p:cNvPr id="4" name="TextBox 3"/>
+          <p:cNvPr id="6" name="TextBox 5"/>
           <p:cNvSpPr txBox="1"/>
           <p:nvPr/>
         </p:nvSpPr>
         <p:spPr>
           <a:xfrm>
-            <a:off x="914400" y="2011680"/>
-            <a:ext cx="10360152" cy="1371600"/>
+            <a:off x="502920" y="3291840"/>
+            <a:ext cx="10058400" cy="731520"/>
           </a:xfrm>
           <a:prstGeom prst="rect">
             <a:avLst/>
@@ -3212,28 +3270,28 @@
           </a:bodyPr>
           <a:lstStyle/>
           <a:p>
-            <a:pPr algn="ctr"/>
-            <a:r>
-              <a:rPr sz="3600" b="1">
-                <a:solidFill>
-                  <a:srgbClr val="FFFFFF"/>
+            <a:pPr algn="l"/>
+            <a:r>
+              <a:rPr sz="2000" b="0" i="0">
+                <a:solidFill>
+                  <a:srgbClr val="C8D8F0"/>
                 </a:solidFill>
               </a:rPr>
-              <a:t>实验四：基于 Transformer 的神经机器翻译</a:t>
-            </a:r>
-          </a:p>
-        </p:txBody>
-      </p:sp>
-      <p:sp>
-        <p:nvSpPr>
-          <p:cNvPr id="5" name="TextBox 4"/>
+              <a:t>中英 Encoder-Decoder NMT  |  BLEU-4 = 14.93 ✅  |  PyTorch</a:t>
+            </a:r>
+          </a:p>
+        </p:txBody>
+      </p:sp>
+      <p:sp>
+        <p:nvSpPr>
+          <p:cNvPr id="7" name="TextBox 6"/>
           <p:cNvSpPr txBox="1"/>
           <p:nvPr/>
         </p:nvSpPr>
         <p:spPr>
           <a:xfrm>
-            <a:off x="914400" y="3566160"/>
-            <a:ext cx="10360152" cy="914400"/>
+            <a:off x="502920" y="5989320"/>
+            <a:ext cx="10058400" cy="502920"/>
           </a:xfrm>
           <a:prstGeom prst="rect">
             <a:avLst/>
@@ -3246,48 +3304,14 @@
           </a:bodyPr>
           <a:lstStyle/>
           <a:p>
-            <a:pPr algn="ctr"/>
-            <a:r>
-              <a:rPr sz="2200" b="0">
-                <a:solidFill>
-                  <a:srgbClr val="D6E4F0"/>
+            <a:pPr algn="l"/>
+            <a:r>
+              <a:rPr sz="1500" b="0" i="0">
+                <a:solidFill>
+                  <a:srgbClr val="A0B8D0"/>
                 </a:solidFill>
               </a:rPr>
-              <a:t>中英 Encoder-Decoder NMT · BLEU-4 = 14.93</a:t>
-            </a:r>
-          </a:p>
-        </p:txBody>
-      </p:sp>
-      <p:sp>
-        <p:nvSpPr>
-          <p:cNvPr id="6" name="TextBox 5"/>
-          <p:cNvSpPr txBox="1"/>
-          <p:nvPr/>
-        </p:nvSpPr>
-        <p:spPr>
-          <a:xfrm>
-            <a:off x="914400" y="5760720"/>
-            <a:ext cx="10360152" cy="548640"/>
-          </a:xfrm>
-          <a:prstGeom prst="rect">
-            <a:avLst/>
-          </a:prstGeom>
-          <a:noFill/>
-        </p:spPr>
-        <p:txBody>
-          <a:bodyPr wrap="square">
-            <a:spAutoFit/>
-          </a:bodyPr>
-          <a:lstStyle/>
-          <a:p>
-            <a:pPr algn="ctr"/>
-            <a:r>
-              <a:rPr sz="1600" b="0">
-                <a:solidFill>
-                  <a:srgbClr val="FFFFFF"/>
-                </a:solidFill>
-              </a:rPr>
-              <a:t>华为云 Tesla T4 · PyTorch 2.2 · 2026-05-18</a:t>
+              <a:t>WevYang　|　中国科学院大学  深度学习</a:t>
             </a:r>
           </a:p>
         </p:txBody>
@@ -3327,13 +3351,13 @@
         <p:spPr>
           <a:xfrm>
             <a:off x="0" y="0"/>
-            <a:ext cx="12188952" cy="1005840"/>
+            <a:ext cx="12188952" cy="960120"/>
           </a:xfrm>
           <a:prstGeom prst="rect">
             <a:avLst/>
           </a:prstGeom>
           <a:solidFill>
-            <a:srgbClr val="1F497D"/>
+            <a:srgbClr val="1A335C"/>
           </a:solidFill>
           <a:ln>
             <a:noFill/>
@@ -3363,14 +3387,57 @@
       </p:sp>
       <p:sp>
         <p:nvSpPr>
-          <p:cNvPr id="3" name="TextBox 2"/>
+          <p:cNvPr id="3" name="Rectangle 2"/>
+          <p:cNvSpPr/>
+          <p:nvPr/>
+        </p:nvSpPr>
+        <p:spPr>
+          <a:xfrm>
+            <a:off x="0" y="0"/>
+            <a:ext cx="164592" cy="6858000"/>
+          </a:xfrm>
+          <a:prstGeom prst="rect">
+            <a:avLst/>
+          </a:prstGeom>
+          <a:solidFill>
+            <a:srgbClr val="1A335C"/>
+          </a:solidFill>
+          <a:ln>
+            <a:noFill/>
+          </a:ln>
+        </p:spPr>
+        <p:style>
+          <a:lnRef idx="1">
+            <a:schemeClr val="accent1"/>
+          </a:lnRef>
+          <a:fillRef idx="3">
+            <a:schemeClr val="accent1"/>
+          </a:fillRef>
+          <a:effectRef idx="2">
+            <a:schemeClr val="accent1"/>
+          </a:effectRef>
+          <a:fontRef idx="minor">
+            <a:schemeClr val="lt1"/>
+          </a:fontRef>
+        </p:style>
+        <p:txBody>
+          <a:bodyPr rtlCol="0" anchor="ctr"/>
+          <a:lstStyle/>
+          <a:p>
+            <a:pPr algn="ctr"/>
+          </a:p>
+        </p:txBody>
+      </p:sp>
+      <p:sp>
+        <p:nvSpPr>
+          <p:cNvPr id="4" name="TextBox 3"/>
           <p:cNvSpPr txBox="1"/>
           <p:nvPr/>
         </p:nvSpPr>
         <p:spPr>
           <a:xfrm>
-            <a:off x="274320" y="91440"/>
-            <a:ext cx="11612880" cy="822960"/>
+            <a:off x="347472" y="91440"/>
+            <a:ext cx="11521440" cy="777240"/>
           </a:xfrm>
           <a:prstGeom prst="rect">
             <a:avLst/>
@@ -3385,26 +3452,26 @@
           <a:p>
             <a:pPr algn="l"/>
             <a:r>
-              <a:rPr sz="2400" b="1">
+              <a:rPr sz="2300" b="1" i="0">
                 <a:solidFill>
                   <a:srgbClr val="FFFFFF"/>
                 </a:solidFill>
               </a:rPr>
-              <a:t>实验目的与要求</a:t>
-            </a:r>
-          </a:p>
-        </p:txBody>
-      </p:sp>
-      <p:sp>
-        <p:nvSpPr>
-          <p:cNvPr id="4" name="TextBox 3"/>
+              <a:t>概述</a:t>
+            </a:r>
+          </a:p>
+        </p:txBody>
+      </p:sp>
+      <p:sp>
+        <p:nvSpPr>
+          <p:cNvPr id="5" name="TextBox 4"/>
           <p:cNvSpPr txBox="1"/>
           <p:nvPr/>
         </p:nvSpPr>
         <p:spPr>
           <a:xfrm>
-            <a:off x="457200" y="1188720"/>
-            <a:ext cx="11247120" cy="502920"/>
+            <a:off x="411480" y="1115568"/>
+            <a:ext cx="11247120" cy="475488"/>
           </a:xfrm>
           <a:prstGeom prst="rect">
             <a:avLst/>
@@ -3419,26 +3486,26 @@
           <a:p>
             <a:pPr algn="l"/>
             <a:r>
-              <a:rPr sz="1800" b="0">
-                <a:solidFill>
-                  <a:srgbClr val="1A1A2E"/>
+              <a:rPr sz="1700" b="0" i="0">
+                <a:solidFill>
+                  <a:srgbClr val="1C1C1C"/>
                 </a:solidFill>
               </a:rPr>
-              <a:t>  • 掌握 Transformer Encoder-Decoder 架构</a:t>
-            </a:r>
-          </a:p>
-        </p:txBody>
-      </p:sp>
-      <p:sp>
-        <p:nvSpPr>
-          <p:cNvPr id="5" name="TextBox 4"/>
+              <a:t>▸ 任务：中文→英文神经机器翻译（Chinese→English NMT）</a:t>
+            </a:r>
+          </a:p>
+        </p:txBody>
+      </p:sp>
+      <p:sp>
+        <p:nvSpPr>
+          <p:cNvPr id="6" name="TextBox 5"/>
           <p:cNvSpPr txBox="1"/>
           <p:nvPr/>
         </p:nvSpPr>
         <p:spPr>
           <a:xfrm>
-            <a:off x="457200" y="1664208"/>
-            <a:ext cx="11247120" cy="502920"/>
+            <a:off x="411480" y="1591056"/>
+            <a:ext cx="11247120" cy="475488"/>
           </a:xfrm>
           <a:prstGeom prst="rect">
             <a:avLst/>
@@ -3453,26 +3520,26 @@
           <a:p>
             <a:pPr algn="l"/>
             <a:r>
-              <a:rPr sz="1800" b="0">
-                <a:solidFill>
-                  <a:srgbClr val="1A1A2E"/>
+              <a:rPr sz="1700" b="0" i="0">
+                <a:solidFill>
+                  <a:srgbClr val="1C1C1C"/>
                 </a:solidFill>
               </a:rPr>
-              <a:t>  • 理解 Attention 机制在 NMT 中的作用</a:t>
-            </a:r>
-          </a:p>
-        </p:txBody>
-      </p:sp>
-      <p:sp>
-        <p:nvSpPr>
-          <p:cNvPr id="6" name="TextBox 5"/>
+              <a:t>▸ 数据集：NiuTrans 开源中英平行语料库，约 100K 句对</a:t>
+            </a:r>
+          </a:p>
+        </p:txBody>
+      </p:sp>
+      <p:sp>
+        <p:nvSpPr>
+          <p:cNvPr id="7" name="TextBox 6"/>
           <p:cNvSpPr txBox="1"/>
           <p:nvPr/>
         </p:nvSpPr>
         <p:spPr>
           <a:xfrm>
-            <a:off x="457200" y="2139696"/>
-            <a:ext cx="11247120" cy="502920"/>
+            <a:off x="411480" y="2066543"/>
+            <a:ext cx="11247120" cy="475488"/>
           </a:xfrm>
           <a:prstGeom prst="rect">
             <a:avLst/>
@@ -3487,26 +3554,26 @@
           <a:p>
             <a:pPr algn="l"/>
             <a:r>
-              <a:rPr sz="1800" b="0">
-                <a:solidFill>
-                  <a:srgbClr val="1A1A2E"/>
+              <a:rPr sz="1700" b="0" i="0">
+                <a:solidFill>
+                  <a:srgbClr val="1C1C1C"/>
                 </a:solidFill>
               </a:rPr>
-              <a:t>  • 实现中文→英文翻译，评估指标 BLEU-4 &gt; 14</a:t>
-            </a:r>
-          </a:p>
-        </p:txBody>
-      </p:sp>
-      <p:sp>
-        <p:nvSpPr>
-          <p:cNvPr id="7" name="TextBox 6"/>
+              <a:t>▸ 解决方案：Transformer Encoder-Decoder + 正弦位置编码</a:t>
+            </a:r>
+          </a:p>
+        </p:txBody>
+      </p:sp>
+      <p:sp>
+        <p:nvSpPr>
+          <p:cNvPr id="8" name="TextBox 7"/>
           <p:cNvSpPr txBox="1"/>
           <p:nvPr/>
         </p:nvSpPr>
         <p:spPr>
           <a:xfrm>
-            <a:off x="457200" y="2615184"/>
-            <a:ext cx="11247120" cy="502920"/>
+            <a:off x="411480" y="2542032"/>
+            <a:ext cx="11247120" cy="475488"/>
           </a:xfrm>
           <a:prstGeom prst="rect">
             <a:avLst/>
@@ -3521,32 +3588,134 @@
           <a:p>
             <a:pPr algn="l"/>
             <a:r>
-              <a:rPr sz="1800" b="0">
-                <a:solidFill>
-                  <a:srgbClr val="1A1A2E"/>
+              <a:rPr sz="1600" b="0" i="0">
+                <a:solidFill>
+                  <a:srgbClr val="555555"/>
                 </a:solidFill>
               </a:rPr>
-              <a:t>  • 使用 NiuTrans 开源中英平行语料库（10 万对）</a:t>
-            </a:r>
-          </a:p>
-        </p:txBody>
-      </p:sp>
-      <p:sp>
-        <p:nvSpPr>
-          <p:cNvPr id="8" name="Rectangle 7"/>
+              <a:t>    – 训练：teacher forcing + causal mask；推理：Beam Search</a:t>
+            </a:r>
+          </a:p>
+        </p:txBody>
+      </p:sp>
+      <p:sp>
+        <p:nvSpPr>
+          <p:cNvPr id="9" name="TextBox 8"/>
+          <p:cNvSpPr txBox="1"/>
+          <p:nvPr/>
+        </p:nvSpPr>
+        <p:spPr>
+          <a:xfrm>
+            <a:off x="411480" y="3017520"/>
+            <a:ext cx="11247120" cy="475488"/>
+          </a:xfrm>
+          <a:prstGeom prst="rect">
+            <a:avLst/>
+          </a:prstGeom>
+          <a:noFill/>
+        </p:spPr>
+        <p:txBody>
+          <a:bodyPr wrap="square">
+            <a:spAutoFit/>
+          </a:bodyPr>
+          <a:lstStyle/>
+          <a:p>
+            <a:pPr algn="l"/>
+            <a:r>
+              <a:rPr sz="1700" b="0" i="0">
+                <a:solidFill>
+                  <a:srgbClr val="1C1C1C"/>
+                </a:solidFill>
+              </a:rPr>
+              <a:t>▸ 评估指标：BLEU-4（目标 &gt; 14）</a:t>
+            </a:r>
+          </a:p>
+        </p:txBody>
+      </p:sp>
+      <p:sp>
+        <p:nvSpPr>
+          <p:cNvPr id="10" name="TextBox 9"/>
+          <p:cNvSpPr txBox="1"/>
+          <p:nvPr/>
+        </p:nvSpPr>
+        <p:spPr>
+          <a:xfrm>
+            <a:off x="411480" y="3493008"/>
+            <a:ext cx="11247120" cy="475488"/>
+          </a:xfrm>
+          <a:prstGeom prst="rect">
+            <a:avLst/>
+          </a:prstGeom>
+          <a:noFill/>
+        </p:spPr>
+        <p:txBody>
+          <a:bodyPr wrap="square">
+            <a:spAutoFit/>
+          </a:bodyPr>
+          <a:lstStyle/>
+          <a:p>
+            <a:pPr algn="l"/>
+            <a:r>
+              <a:rPr sz="1600" b="0" i="0">
+                <a:solidFill>
+                  <a:srgbClr val="555555"/>
+                </a:solidFill>
+              </a:rPr>
+              <a:t>    – 最终结果：test BLEU-4 = 14.93，超过目标要求</a:t>
+            </a:r>
+          </a:p>
+        </p:txBody>
+      </p:sp>
+      <p:sp>
+        <p:nvSpPr>
+          <p:cNvPr id="11" name="TextBox 10"/>
+          <p:cNvSpPr txBox="1"/>
+          <p:nvPr/>
+        </p:nvSpPr>
+        <p:spPr>
+          <a:xfrm>
+            <a:off x="411480" y="3968496"/>
+            <a:ext cx="11247120" cy="475488"/>
+          </a:xfrm>
+          <a:prstGeom prst="rect">
+            <a:avLst/>
+          </a:prstGeom>
+          <a:noFill/>
+        </p:spPr>
+        <p:txBody>
+          <a:bodyPr wrap="square">
+            <a:spAutoFit/>
+          </a:bodyPr>
+          <a:lstStyle/>
+          <a:p>
+            <a:pPr algn="l"/>
+            <a:r>
+              <a:rPr sz="1600" b="0" i="0">
+                <a:solidFill>
+                  <a:srgbClr val="555555"/>
+                </a:solidFill>
+              </a:rPr>
+              <a:t>    – 优化路径：v1（贪心，10ep）= 12.39 → v2（beam=4，20ep）= 14.93</a:t>
+            </a:r>
+          </a:p>
+        </p:txBody>
+      </p:sp>
+      <p:sp>
+        <p:nvSpPr>
+          <p:cNvPr id="12" name="Rectangle 11"/>
           <p:cNvSpPr/>
           <p:nvPr/>
         </p:nvSpPr>
         <p:spPr>
           <a:xfrm>
-            <a:off x="0" y="6675120"/>
-            <a:ext cx="12188952" cy="73152"/>
+            <a:off x="0" y="6748272"/>
+            <a:ext cx="12188952" cy="109728"/>
           </a:xfrm>
           <a:prstGeom prst="rect">
             <a:avLst/>
           </a:prstGeom>
           <a:solidFill>
-            <a:srgbClr val="1F497D"/>
+            <a:srgbClr val="1A335C"/>
           </a:solidFill>
           <a:ln>
             <a:noFill/>
@@ -3609,13 +3778,13 @@
         <p:spPr>
           <a:xfrm>
             <a:off x="0" y="0"/>
-            <a:ext cx="12188952" cy="1005840"/>
+            <a:ext cx="12188952" cy="960120"/>
           </a:xfrm>
           <a:prstGeom prst="rect">
             <a:avLst/>
           </a:prstGeom>
           <a:solidFill>
-            <a:srgbClr val="1F497D"/>
+            <a:srgbClr val="1A335C"/>
           </a:solidFill>
           <a:ln>
             <a:noFill/>
@@ -3645,14 +3814,57 @@
       </p:sp>
       <p:sp>
         <p:nvSpPr>
-          <p:cNvPr id="3" name="TextBox 2"/>
+          <p:cNvPr id="3" name="Rectangle 2"/>
+          <p:cNvSpPr/>
+          <p:nvPr/>
+        </p:nvSpPr>
+        <p:spPr>
+          <a:xfrm>
+            <a:off x="0" y="0"/>
+            <a:ext cx="164592" cy="6858000"/>
+          </a:xfrm>
+          <a:prstGeom prst="rect">
+            <a:avLst/>
+          </a:prstGeom>
+          <a:solidFill>
+            <a:srgbClr val="1A335C"/>
+          </a:solidFill>
+          <a:ln>
+            <a:noFill/>
+          </a:ln>
+        </p:spPr>
+        <p:style>
+          <a:lnRef idx="1">
+            <a:schemeClr val="accent1"/>
+          </a:lnRef>
+          <a:fillRef idx="3">
+            <a:schemeClr val="accent1"/>
+          </a:fillRef>
+          <a:effectRef idx="2">
+            <a:schemeClr val="accent1"/>
+          </a:effectRef>
+          <a:fontRef idx="minor">
+            <a:schemeClr val="lt1"/>
+          </a:fontRef>
+        </p:style>
+        <p:txBody>
+          <a:bodyPr rtlCol="0" anchor="ctr"/>
+          <a:lstStyle/>
+          <a:p>
+            <a:pPr algn="ctr"/>
+          </a:p>
+        </p:txBody>
+      </p:sp>
+      <p:sp>
+        <p:nvSpPr>
+          <p:cNvPr id="4" name="TextBox 3"/>
           <p:cNvSpPr txBox="1"/>
           <p:nvPr/>
         </p:nvSpPr>
         <p:spPr>
           <a:xfrm>
-            <a:off x="274320" y="91440"/>
-            <a:ext cx="11612880" cy="822960"/>
+            <a:off x="347472" y="91440"/>
+            <a:ext cx="11521440" cy="777240"/>
           </a:xfrm>
           <a:prstGeom prst="rect">
             <a:avLst/>
@@ -3667,26 +3879,26 @@
           <a:p>
             <a:pPr algn="l"/>
             <a:r>
-              <a:rPr sz="2400" b="1">
+              <a:rPr sz="2300" b="1" i="0">
                 <a:solidFill>
                   <a:srgbClr val="FFFFFF"/>
                 </a:solidFill>
               </a:rPr>
-              <a:t>数据集：NiuTrans 中英平行语料</a:t>
-            </a:r>
-          </a:p>
-        </p:txBody>
-      </p:sp>
-      <p:sp>
-        <p:nvSpPr>
-          <p:cNvPr id="4" name="TextBox 3"/>
+              <a:t>数据集介绍：NiuTrans 中英平行语料</a:t>
+            </a:r>
+          </a:p>
+        </p:txBody>
+      </p:sp>
+      <p:sp>
+        <p:nvSpPr>
+          <p:cNvPr id="5" name="TextBox 4"/>
           <p:cNvSpPr txBox="1"/>
           <p:nvPr/>
         </p:nvSpPr>
         <p:spPr>
           <a:xfrm>
-            <a:off x="457200" y="1188720"/>
-            <a:ext cx="11247120" cy="502920"/>
+            <a:off x="411480" y="1115568"/>
+            <a:ext cx="11247120" cy="475488"/>
           </a:xfrm>
           <a:prstGeom prst="rect">
             <a:avLst/>
@@ -3701,26 +3913,26 @@
           <a:p>
             <a:pPr algn="l"/>
             <a:r>
-              <a:rPr sz="1800" b="0">
-                <a:solidFill>
-                  <a:srgbClr val="1A1A2E"/>
+              <a:rPr sz="1700" b="0" i="0">
+                <a:solidFill>
+                  <a:srgbClr val="1C1C1C"/>
                 </a:solidFill>
               </a:rPr>
-              <a:t>  • 来源：NiuTrans.SMT GitHub 开源数据</a:t>
-            </a:r>
-          </a:p>
-        </p:txBody>
-      </p:sp>
-      <p:sp>
-        <p:nvSpPr>
-          <p:cNvPr id="5" name="TextBox 4"/>
+              <a:t>▸ 来源：NiuTrans 项目开源数据，新闻领域中英句对</a:t>
+            </a:r>
+          </a:p>
+        </p:txBody>
+      </p:sp>
+      <p:sp>
+        <p:nvSpPr>
+          <p:cNvPr id="6" name="TextBox 5"/>
           <p:cNvSpPr txBox="1"/>
           <p:nvPr/>
         </p:nvSpPr>
         <p:spPr>
           <a:xfrm>
-            <a:off x="457200" y="1664208"/>
-            <a:ext cx="11247120" cy="502920"/>
+            <a:off x="411480" y="1591056"/>
+            <a:ext cx="11247120" cy="475488"/>
           </a:xfrm>
           <a:prstGeom prst="rect">
             <a:avLst/>
@@ -3735,26 +3947,26 @@
           <a:p>
             <a:pPr algn="l"/>
             <a:r>
-              <a:rPr sz="1800" b="0">
-                <a:solidFill>
-                  <a:srgbClr val="1A1A2E"/>
+              <a:rPr sz="1700" b="0" i="0">
+                <a:solidFill>
+                  <a:srgbClr val="1C1C1C"/>
                 </a:solidFill>
               </a:rPr>
-              <a:t>  • 规模：训练集 ~100K 对，验证集 ~1K，测试集 ~1K</a:t>
-            </a:r>
-          </a:p>
-        </p:txBody>
-      </p:sp>
-      <p:sp>
-        <p:nvSpPr>
-          <p:cNvPr id="6" name="TextBox 5"/>
+              <a:t>▸ 规模：训练集 ~100K 对，验证集 ~1K，测试集 ~1K</a:t>
+            </a:r>
+          </a:p>
+        </p:txBody>
+      </p:sp>
+      <p:sp>
+        <p:nvSpPr>
+          <p:cNvPr id="7" name="TextBox 6"/>
           <p:cNvSpPr txBox="1"/>
           <p:nvPr/>
         </p:nvSpPr>
         <p:spPr>
           <a:xfrm>
-            <a:off x="457200" y="2139696"/>
-            <a:ext cx="11247120" cy="502920"/>
+            <a:off x="411480" y="2066543"/>
+            <a:ext cx="11247120" cy="475488"/>
           </a:xfrm>
           <a:prstGeom prst="rect">
             <a:avLst/>
@@ -3769,26 +3981,26 @@
           <a:p>
             <a:pPr algn="l"/>
             <a:r>
-              <a:rPr sz="1800" b="0">
-                <a:solidFill>
-                  <a:srgbClr val="1A1A2E"/>
+              <a:rPr sz="1700" b="0" i="0">
+                <a:solidFill>
+                  <a:srgbClr val="1C1C1C"/>
                 </a:solidFill>
               </a:rPr>
-              <a:t>  • 中文已分词（词间空格分隔），英文小写处理</a:t>
-            </a:r>
-          </a:p>
-        </p:txBody>
-      </p:sp>
-      <p:sp>
-        <p:nvSpPr>
-          <p:cNvPr id="7" name="TextBox 6"/>
+              <a:t>▸ 中文已做分词（词间空格分隔），英文转小写，不需额外分词</a:t>
+            </a:r>
+          </a:p>
+        </p:txBody>
+      </p:sp>
+      <p:sp>
+        <p:nvSpPr>
+          <p:cNvPr id="8" name="TextBox 7"/>
           <p:cNvSpPr txBox="1"/>
           <p:nvPr/>
         </p:nvSpPr>
         <p:spPr>
           <a:xfrm>
-            <a:off x="457200" y="2615184"/>
-            <a:ext cx="11247120" cy="502920"/>
+            <a:off x="411480" y="2542032"/>
+            <a:ext cx="11247120" cy="475488"/>
           </a:xfrm>
           <a:prstGeom prst="rect">
             <a:avLst/>
@@ -3803,26 +4015,26 @@
           <a:p>
             <a:pPr algn="l"/>
             <a:r>
-              <a:rPr sz="1800" b="0">
-                <a:solidFill>
-                  <a:srgbClr val="1A1A2E"/>
+              <a:rPr sz="1700" b="0" i="0">
+                <a:solidFill>
+                  <a:srgbClr val="1C1C1C"/>
                 </a:solidFill>
               </a:rPr>
-              <a:t>  • 词汇表含特殊符号：&lt;unk&gt;（低频词）、&lt;s&gt;（句首）、&lt;/s&gt;（句尾）</a:t>
-            </a:r>
-          </a:p>
-        </p:txBody>
-      </p:sp>
-      <p:sp>
-        <p:nvSpPr>
-          <p:cNvPr id="8" name="TextBox 7"/>
+              <a:t>▸ 词汇表含 3 个特殊符号：&lt;unk&gt;（低频词）、&lt;s&gt;（句首）、&lt;/s&gt;（句尾）</a:t>
+            </a:r>
+          </a:p>
+        </p:txBody>
+      </p:sp>
+      <p:sp>
+        <p:nvSpPr>
+          <p:cNvPr id="9" name="TextBox 8"/>
           <p:cNvSpPr txBox="1"/>
           <p:nvPr/>
         </p:nvSpPr>
         <p:spPr>
           <a:xfrm>
-            <a:off x="457200" y="3090672"/>
-            <a:ext cx="11247120" cy="502920"/>
+            <a:off x="411480" y="3017520"/>
+            <a:ext cx="11247120" cy="475488"/>
           </a:xfrm>
           <a:prstGeom prst="rect">
             <a:avLst/>
@@ -3837,32 +4049,134 @@
           <a:p>
             <a:pPr algn="l"/>
             <a:r>
-              <a:rPr sz="1800" b="0">
-                <a:solidFill>
-                  <a:srgbClr val="1A1A2E"/>
+              <a:rPr sz="1600" b="0" i="0">
+                <a:solidFill>
+                  <a:srgbClr val="555555"/>
                 </a:solidFill>
               </a:rPr>
-              <a:t>  • 示例：北约 不少 飞机 不得不 携 返航 → many nato planes...</a:t>
-            </a:r>
-          </a:p>
-        </p:txBody>
-      </p:sp>
-      <p:sp>
-        <p:nvSpPr>
-          <p:cNvPr id="9" name="Rectangle 8"/>
+              <a:t>    – 中文词表约 30K，英文词表约 25K（低频词统一替换为 &lt;unk&gt;）</a:t>
+            </a:r>
+          </a:p>
+        </p:txBody>
+      </p:sp>
+      <p:sp>
+        <p:nvSpPr>
+          <p:cNvPr id="10" name="TextBox 9"/>
+          <p:cNvSpPr txBox="1"/>
+          <p:nvPr/>
+        </p:nvSpPr>
+        <p:spPr>
+          <a:xfrm>
+            <a:off x="411480" y="3493008"/>
+            <a:ext cx="11247120" cy="475488"/>
+          </a:xfrm>
+          <a:prstGeom prst="rect">
+            <a:avLst/>
+          </a:prstGeom>
+          <a:noFill/>
+        </p:spPr>
+        <p:txBody>
+          <a:bodyPr wrap="square">
+            <a:spAutoFit/>
+          </a:bodyPr>
+          <a:lstStyle/>
+          <a:p>
+            <a:pPr algn="l"/>
+            <a:r>
+              <a:rPr sz="1700" b="0" i="0">
+                <a:solidFill>
+                  <a:srgbClr val="1C1C1C"/>
+                </a:solidFill>
+              </a:rPr>
+              <a:t>▸ 数据样例：</a:t>
+            </a:r>
+          </a:p>
+        </p:txBody>
+      </p:sp>
+      <p:sp>
+        <p:nvSpPr>
+          <p:cNvPr id="11" name="TextBox 10"/>
+          <p:cNvSpPr txBox="1"/>
+          <p:nvPr/>
+        </p:nvSpPr>
+        <p:spPr>
+          <a:xfrm>
+            <a:off x="411480" y="3968496"/>
+            <a:ext cx="11247120" cy="475488"/>
+          </a:xfrm>
+          <a:prstGeom prst="rect">
+            <a:avLst/>
+          </a:prstGeom>
+          <a:noFill/>
+        </p:spPr>
+        <p:txBody>
+          <a:bodyPr wrap="square">
+            <a:spAutoFit/>
+          </a:bodyPr>
+          <a:lstStyle/>
+          <a:p>
+            <a:pPr algn="l"/>
+            <a:r>
+              <a:rPr sz="1600" b="0" i="0">
+                <a:solidFill>
+                  <a:srgbClr val="555555"/>
+                </a:solidFill>
+              </a:rPr>
+              <a:t>    – 中：北约 不少 飞机 不得不 携 返航</a:t>
+            </a:r>
+          </a:p>
+        </p:txBody>
+      </p:sp>
+      <p:sp>
+        <p:nvSpPr>
+          <p:cNvPr id="12" name="TextBox 11"/>
+          <p:cNvSpPr txBox="1"/>
+          <p:nvPr/>
+        </p:nvSpPr>
+        <p:spPr>
+          <a:xfrm>
+            <a:off x="411480" y="4443983"/>
+            <a:ext cx="11247120" cy="475488"/>
+          </a:xfrm>
+          <a:prstGeom prst="rect">
+            <a:avLst/>
+          </a:prstGeom>
+          <a:noFill/>
+        </p:spPr>
+        <p:txBody>
+          <a:bodyPr wrap="square">
+            <a:spAutoFit/>
+          </a:bodyPr>
+          <a:lstStyle/>
+          <a:p>
+            <a:pPr algn="l"/>
+            <a:r>
+              <a:rPr sz="1600" b="0" i="0">
+                <a:solidFill>
+                  <a:srgbClr val="555555"/>
+                </a:solidFill>
+              </a:rPr>
+              <a:t>    – 英：many nato planes had to return to base laden with munitions</a:t>
+            </a:r>
+          </a:p>
+        </p:txBody>
+      </p:sp>
+      <p:sp>
+        <p:nvSpPr>
+          <p:cNvPr id="13" name="Rectangle 12"/>
           <p:cNvSpPr/>
           <p:nvPr/>
         </p:nvSpPr>
         <p:spPr>
           <a:xfrm>
-            <a:off x="0" y="6675120"/>
-            <a:ext cx="12188952" cy="73152"/>
+            <a:off x="0" y="6748272"/>
+            <a:ext cx="12188952" cy="109728"/>
           </a:xfrm>
           <a:prstGeom prst="rect">
             <a:avLst/>
           </a:prstGeom>
           <a:solidFill>
-            <a:srgbClr val="1F497D"/>
+            <a:srgbClr val="1A335C"/>
           </a:solidFill>
           <a:ln>
             <a:noFill/>
@@ -3925,13 +4239,13 @@
         <p:spPr>
           <a:xfrm>
             <a:off x="0" y="0"/>
-            <a:ext cx="12188952" cy="1005840"/>
+            <a:ext cx="12188952" cy="960120"/>
           </a:xfrm>
           <a:prstGeom prst="rect">
             <a:avLst/>
           </a:prstGeom>
           <a:solidFill>
-            <a:srgbClr val="1F497D"/>
+            <a:srgbClr val="1A335C"/>
           </a:solidFill>
           <a:ln>
             <a:noFill/>
@@ -3961,14 +4275,57 @@
       </p:sp>
       <p:sp>
         <p:nvSpPr>
-          <p:cNvPr id="3" name="TextBox 2"/>
+          <p:cNvPr id="3" name="Rectangle 2"/>
+          <p:cNvSpPr/>
+          <p:nvPr/>
+        </p:nvSpPr>
+        <p:spPr>
+          <a:xfrm>
+            <a:off x="0" y="0"/>
+            <a:ext cx="164592" cy="6858000"/>
+          </a:xfrm>
+          <a:prstGeom prst="rect">
+            <a:avLst/>
+          </a:prstGeom>
+          <a:solidFill>
+            <a:srgbClr val="1A335C"/>
+          </a:solidFill>
+          <a:ln>
+            <a:noFill/>
+          </a:ln>
+        </p:spPr>
+        <p:style>
+          <a:lnRef idx="1">
+            <a:schemeClr val="accent1"/>
+          </a:lnRef>
+          <a:fillRef idx="3">
+            <a:schemeClr val="accent1"/>
+          </a:fillRef>
+          <a:effectRef idx="2">
+            <a:schemeClr val="accent1"/>
+          </a:effectRef>
+          <a:fontRef idx="minor">
+            <a:schemeClr val="lt1"/>
+          </a:fontRef>
+        </p:style>
+        <p:txBody>
+          <a:bodyPr rtlCol="0" anchor="ctr"/>
+          <a:lstStyle/>
+          <a:p>
+            <a:pPr algn="ctr"/>
+          </a:p>
+        </p:txBody>
+      </p:sp>
+      <p:sp>
+        <p:nvSpPr>
+          <p:cNvPr id="4" name="TextBox 3"/>
           <p:cNvSpPr txBox="1"/>
           <p:nvPr/>
         </p:nvSpPr>
         <p:spPr>
           <a:xfrm>
-            <a:off x="274320" y="91440"/>
-            <a:ext cx="11612880" cy="822960"/>
+            <a:off x="347472" y="91440"/>
+            <a:ext cx="11521440" cy="777240"/>
           </a:xfrm>
           <a:prstGeom prst="rect">
             <a:avLst/>
@@ -3983,26 +4340,26 @@
           <a:p>
             <a:pPr algn="l"/>
             <a:r>
-              <a:rPr sz="2400" b="1">
+              <a:rPr sz="2300" b="1" i="0">
                 <a:solidFill>
                   <a:srgbClr val="FFFFFF"/>
                 </a:solidFill>
               </a:rPr>
-              <a:t>模型结构：Transformer NMT</a:t>
-            </a:r>
-          </a:p>
-        </p:txBody>
-      </p:sp>
-      <p:sp>
-        <p:nvSpPr>
-          <p:cNvPr id="4" name="TextBox 3"/>
+              <a:t>解决方案：Transformer 模型结构</a:t>
+            </a:r>
+          </a:p>
+        </p:txBody>
+      </p:sp>
+      <p:sp>
+        <p:nvSpPr>
+          <p:cNvPr id="5" name="TextBox 4"/>
           <p:cNvSpPr txBox="1"/>
           <p:nvPr/>
         </p:nvSpPr>
         <p:spPr>
           <a:xfrm>
-            <a:off x="457200" y="1188720"/>
-            <a:ext cx="11247120" cy="502920"/>
+            <a:off x="411480" y="1115568"/>
+            <a:ext cx="11247120" cy="475488"/>
           </a:xfrm>
           <a:prstGeom prst="rect">
             <a:avLst/>
@@ -4017,26 +4374,26 @@
           <a:p>
             <a:pPr algn="l"/>
             <a:r>
-              <a:rPr sz="1800" b="0">
-                <a:solidFill>
-                  <a:srgbClr val="1A1A2E"/>
+              <a:rPr sz="1700" b="0" i="0">
+                <a:solidFill>
+                  <a:srgbClr val="1C1C1C"/>
                 </a:solidFill>
               </a:rPr>
-              <a:t>  • 源端：中文 Embedding(d=256) + 正弦位置编码 → Encoder（3层）</a:t>
-            </a:r>
-          </a:p>
-        </p:txBody>
-      </p:sp>
-      <p:sp>
-        <p:nvSpPr>
-          <p:cNvPr id="5" name="TextBox 4"/>
+              <a:t>▸ 整体框架：Encoder-Decoder，基于 PyTorch nn.Transformer（batch_first=True）</a:t>
+            </a:r>
+          </a:p>
+        </p:txBody>
+      </p:sp>
+      <p:sp>
+        <p:nvSpPr>
+          <p:cNvPr id="6" name="TextBox 5"/>
           <p:cNvSpPr txBox="1"/>
           <p:nvPr/>
         </p:nvSpPr>
         <p:spPr>
           <a:xfrm>
-            <a:off x="457200" y="1664208"/>
-            <a:ext cx="11247120" cy="502920"/>
+            <a:off x="411480" y="1591056"/>
+            <a:ext cx="11247120" cy="475488"/>
           </a:xfrm>
           <a:prstGeom prst="rect">
             <a:avLst/>
@@ -4051,26 +4408,26 @@
           <a:p>
             <a:pPr algn="l"/>
             <a:r>
-              <a:rPr sz="1800" b="0">
-                <a:solidFill>
-                  <a:srgbClr val="1A1A2E"/>
+              <a:rPr sz="1700" b="0" i="0">
+                <a:solidFill>
+                  <a:srgbClr val="1C1C1C"/>
                 </a:solidFill>
               </a:rPr>
-              <a:t>  • 目标端：英文 Embedding(d=256) + 正弦位置编码 → Decoder（3层）</a:t>
-            </a:r>
-          </a:p>
-        </p:txBody>
-      </p:sp>
-      <p:sp>
-        <p:nvSpPr>
-          <p:cNvPr id="6" name="TextBox 5"/>
+              <a:t>▸ 编码器（Encoder，3层）：</a:t>
+            </a:r>
+          </a:p>
+        </p:txBody>
+      </p:sp>
+      <p:sp>
+        <p:nvSpPr>
+          <p:cNvPr id="7" name="TextBox 6"/>
           <p:cNvSpPr txBox="1"/>
           <p:nvPr/>
         </p:nvSpPr>
         <p:spPr>
           <a:xfrm>
-            <a:off x="457200" y="2139696"/>
-            <a:ext cx="11247120" cy="502920"/>
+            <a:off x="411480" y="2066543"/>
+            <a:ext cx="11247120" cy="475488"/>
           </a:xfrm>
           <a:prstGeom prst="rect">
             <a:avLst/>
@@ -4085,26 +4442,26 @@
           <a:p>
             <a:pPr algn="l"/>
             <a:r>
-              <a:rPr sz="1800" b="0">
-                <a:solidFill>
-                  <a:srgbClr val="1A1A2E"/>
+              <a:rPr sz="1600" b="0" i="0">
+                <a:solidFill>
+                  <a:srgbClr val="555555"/>
                 </a:solidFill>
               </a:rPr>
-              <a:t>  • 每层 Encoder：多头自注意力（4头）+ FFN（d_ff=512）+ LayerNorm + 残差</a:t>
-            </a:r>
-          </a:p>
-        </p:txBody>
-      </p:sp>
-      <p:sp>
-        <p:nvSpPr>
-          <p:cNvPr id="7" name="TextBox 6"/>
+              <a:t>    – 中文 Embedding(d=256) × √256 + 正弦位置编码</a:t>
+            </a:r>
+          </a:p>
+        </p:txBody>
+      </p:sp>
+      <p:sp>
+        <p:nvSpPr>
+          <p:cNvPr id="8" name="TextBox 7"/>
           <p:cNvSpPr txBox="1"/>
           <p:nvPr/>
         </p:nvSpPr>
         <p:spPr>
           <a:xfrm>
-            <a:off x="457200" y="2615184"/>
-            <a:ext cx="11247120" cy="502920"/>
+            <a:off x="411480" y="2542032"/>
+            <a:ext cx="11247120" cy="475488"/>
           </a:xfrm>
           <a:prstGeom prst="rect">
             <a:avLst/>
@@ -4119,26 +4476,26 @@
           <a:p>
             <a:pPr algn="l"/>
             <a:r>
-              <a:rPr sz="1800" b="0">
-                <a:solidFill>
-                  <a:srgbClr val="1A1A2E"/>
+              <a:rPr sz="1600" b="0" i="0">
+                <a:solidFill>
+                  <a:srgbClr val="555555"/>
                 </a:solidFill>
               </a:rPr>
-              <a:t>  • 每层 Decoder：掩码自注意力 + 交叉注意力 + FFN + LayerNorm + 残差</a:t>
-            </a:r>
-          </a:p>
-        </p:txBody>
-      </p:sp>
-      <p:sp>
-        <p:nvSpPr>
-          <p:cNvPr id="8" name="TextBox 7"/>
+              <a:t>    – 每层：多头自注意力（4头）+ FFN（d_ff=512）+ LayerNorm + 残差</a:t>
+            </a:r>
+          </a:p>
+        </p:txBody>
+      </p:sp>
+      <p:sp>
+        <p:nvSpPr>
+          <p:cNvPr id="9" name="TextBox 8"/>
           <p:cNvSpPr txBox="1"/>
           <p:nvPr/>
         </p:nvSpPr>
         <p:spPr>
           <a:xfrm>
-            <a:off x="457200" y="3090672"/>
-            <a:ext cx="11247120" cy="502920"/>
+            <a:off x="411480" y="3017520"/>
+            <a:ext cx="11247120" cy="475488"/>
           </a:xfrm>
           <a:prstGeom prst="rect">
             <a:avLst/>
@@ -4153,26 +4510,26 @@
           <a:p>
             <a:pPr algn="l"/>
             <a:r>
-              <a:rPr sz="1800" b="0">
-                <a:solidFill>
-                  <a:srgbClr val="1A1A2E"/>
+              <a:rPr sz="1700" b="0" i="0">
+                <a:solidFill>
+                  <a:srgbClr val="1C1C1C"/>
                 </a:solidFill>
               </a:rPr>
-              <a:t>  • 生成头：Linear(256 → tgt_vocab_size)</a:t>
-            </a:r>
-          </a:p>
-        </p:txBody>
-      </p:sp>
-      <p:sp>
-        <p:nvSpPr>
-          <p:cNvPr id="9" name="TextBox 8"/>
+              <a:t>▸ 解码器（Decoder，3层）：</a:t>
+            </a:r>
+          </a:p>
+        </p:txBody>
+      </p:sp>
+      <p:sp>
+        <p:nvSpPr>
+          <p:cNvPr id="10" name="TextBox 9"/>
           <p:cNvSpPr txBox="1"/>
           <p:nvPr/>
         </p:nvSpPr>
         <p:spPr>
           <a:xfrm>
-            <a:off x="457200" y="3566160"/>
-            <a:ext cx="11247120" cy="502920"/>
+            <a:off x="411480" y="3493008"/>
+            <a:ext cx="11247120" cy="475488"/>
           </a:xfrm>
           <a:prstGeom prst="rect">
             <a:avLst/>
@@ -4187,32 +4544,100 @@
           <a:p>
             <a:pPr algn="l"/>
             <a:r>
-              <a:rPr sz="1800" b="0">
-                <a:solidFill>
-                  <a:srgbClr val="1A1A2E"/>
+              <a:rPr sz="1600" b="0" i="0">
+                <a:solidFill>
+                  <a:srgbClr val="555555"/>
                 </a:solidFill>
               </a:rPr>
-              <a:t>  • 训练：teacher forcing + causal mask；推理：beam search</a:t>
-            </a:r>
-          </a:p>
-        </p:txBody>
-      </p:sp>
-      <p:sp>
-        <p:nvSpPr>
-          <p:cNvPr id="10" name="Rectangle 9"/>
+              <a:t>    – 英文 Embedding × √256 + 正弦位置编码 + causal mask（防偷看未来）</a:t>
+            </a:r>
+          </a:p>
+        </p:txBody>
+      </p:sp>
+      <p:sp>
+        <p:nvSpPr>
+          <p:cNvPr id="11" name="TextBox 10"/>
+          <p:cNvSpPr txBox="1"/>
+          <p:nvPr/>
+        </p:nvSpPr>
+        <p:spPr>
+          <a:xfrm>
+            <a:off x="411480" y="3968496"/>
+            <a:ext cx="11247120" cy="475488"/>
+          </a:xfrm>
+          <a:prstGeom prst="rect">
+            <a:avLst/>
+          </a:prstGeom>
+          <a:noFill/>
+        </p:spPr>
+        <p:txBody>
+          <a:bodyPr wrap="square">
+            <a:spAutoFit/>
+          </a:bodyPr>
+          <a:lstStyle/>
+          <a:p>
+            <a:pPr algn="l"/>
+            <a:r>
+              <a:rPr sz="1600" b="0" i="0">
+                <a:solidFill>
+                  <a:srgbClr val="555555"/>
+                </a:solidFill>
+              </a:rPr>
+              <a:t>    – 每层：掩码自注意力 + 交叉注意力（与 Encoder 交互）+ FFN</a:t>
+            </a:r>
+          </a:p>
+        </p:txBody>
+      </p:sp>
+      <p:sp>
+        <p:nvSpPr>
+          <p:cNvPr id="12" name="TextBox 11"/>
+          <p:cNvSpPr txBox="1"/>
+          <p:nvPr/>
+        </p:nvSpPr>
+        <p:spPr>
+          <a:xfrm>
+            <a:off x="411480" y="4443983"/>
+            <a:ext cx="11247120" cy="475488"/>
+          </a:xfrm>
+          <a:prstGeom prst="rect">
+            <a:avLst/>
+          </a:prstGeom>
+          <a:noFill/>
+        </p:spPr>
+        <p:txBody>
+          <a:bodyPr wrap="square">
+            <a:spAutoFit/>
+          </a:bodyPr>
+          <a:lstStyle/>
+          <a:p>
+            <a:pPr algn="l"/>
+            <a:r>
+              <a:rPr sz="1700" b="0" i="0">
+                <a:solidFill>
+                  <a:srgbClr val="1C1C1C"/>
+                </a:solidFill>
+              </a:rPr>
+              <a:t>▸ 生成头：Linear(256 → tgt_vocab_size)，预测下一个英文词</a:t>
+            </a:r>
+          </a:p>
+        </p:txBody>
+      </p:sp>
+      <p:sp>
+        <p:nvSpPr>
+          <p:cNvPr id="13" name="Rectangle 12"/>
           <p:cNvSpPr/>
           <p:nvPr/>
         </p:nvSpPr>
         <p:spPr>
           <a:xfrm>
-            <a:off x="0" y="6675120"/>
-            <a:ext cx="12188952" cy="73152"/>
+            <a:off x="0" y="6748272"/>
+            <a:ext cx="12188952" cy="109728"/>
           </a:xfrm>
           <a:prstGeom prst="rect">
             <a:avLst/>
           </a:prstGeom>
           <a:solidFill>
-            <a:srgbClr val="1F497D"/>
+            <a:srgbClr val="1A335C"/>
           </a:solidFill>
           <a:ln>
             <a:noFill/>
@@ -4275,13 +4700,13 @@
         <p:spPr>
           <a:xfrm>
             <a:off x="0" y="0"/>
-            <a:ext cx="12188952" cy="1005840"/>
+            <a:ext cx="12188952" cy="960120"/>
           </a:xfrm>
           <a:prstGeom prst="rect">
             <a:avLst/>
           </a:prstGeom>
           <a:solidFill>
-            <a:srgbClr val="1F497D"/>
+            <a:srgbClr val="1A335C"/>
           </a:solidFill>
           <a:ln>
             <a:noFill/>
@@ -4311,54 +4736,20 @@
       </p:sp>
       <p:sp>
         <p:nvSpPr>
-          <p:cNvPr id="3" name="TextBox 2"/>
-          <p:cNvSpPr txBox="1"/>
-          <p:nvPr/>
-        </p:nvSpPr>
-        <p:spPr>
-          <a:xfrm>
-            <a:off x="274320" y="91440"/>
-            <a:ext cx="11612880" cy="822960"/>
-          </a:xfrm>
-          <a:prstGeom prst="rect">
-            <a:avLst/>
-          </a:prstGeom>
-          <a:noFill/>
-        </p:spPr>
-        <p:txBody>
-          <a:bodyPr wrap="square">
-            <a:spAutoFit/>
-          </a:bodyPr>
-          <a:lstStyle/>
-          <a:p>
-            <a:pPr algn="l"/>
-            <a:r>
-              <a:rPr sz="2400" b="1">
-                <a:solidFill>
-                  <a:srgbClr val="FFFFFF"/>
-                </a:solidFill>
-              </a:rPr>
-              <a:t>优化策略（v1 → v2 改进）</a:t>
-            </a:r>
-          </a:p>
-        </p:txBody>
-      </p:sp>
-      <p:sp>
-        <p:nvSpPr>
-          <p:cNvPr id="4" name="Rectangle 3"/>
+          <p:cNvPr id="3" name="Rectangle 2"/>
           <p:cNvSpPr/>
           <p:nvPr/>
         </p:nvSpPr>
         <p:spPr>
           <a:xfrm>
-            <a:off x="365760" y="1097280"/>
-            <a:ext cx="5394960" cy="457200"/>
+            <a:off x="0" y="0"/>
+            <a:ext cx="164592" cy="6858000"/>
           </a:xfrm>
           <a:prstGeom prst="rect">
             <a:avLst/>
           </a:prstGeom>
           <a:solidFill>
-            <a:srgbClr val="D6E4F0"/>
+            <a:srgbClr val="1A335C"/>
           </a:solidFill>
           <a:ln>
             <a:noFill/>
@@ -4388,14 +4779,14 @@
       </p:sp>
       <p:sp>
         <p:nvSpPr>
-          <p:cNvPr id="5" name="TextBox 4"/>
+          <p:cNvPr id="4" name="TextBox 3"/>
           <p:cNvSpPr txBox="1"/>
           <p:nvPr/>
         </p:nvSpPr>
         <p:spPr>
           <a:xfrm>
-            <a:off x="457200" y="1143000"/>
-            <a:ext cx="5212080" cy="411480"/>
+            <a:off x="347472" y="91440"/>
+            <a:ext cx="11521440" cy="777240"/>
           </a:xfrm>
           <a:prstGeom prst="rect">
             <a:avLst/>
@@ -4410,168 +4801,32 @@
           <a:p>
             <a:pPr algn="l"/>
             <a:r>
-              <a:rPr sz="1800" b="1">
-                <a:solidFill>
-                  <a:srgbClr val="1F497D"/>
+              <a:rPr sz="2300" b="1" i="0">
+                <a:solidFill>
+                  <a:srgbClr val="FFFFFF"/>
                 </a:solidFill>
               </a:rPr>
-              <a:t>v1 基线（BLEU=12.39）</a:t>
-            </a:r>
-          </a:p>
-        </p:txBody>
-      </p:sp>
-      <p:sp>
-        <p:nvSpPr>
-          <p:cNvPr id="6" name="TextBox 5"/>
-          <p:cNvSpPr txBox="1"/>
-          <p:nvPr/>
-        </p:nvSpPr>
-        <p:spPr>
-          <a:xfrm>
-            <a:off x="457200" y="1645920"/>
-            <a:ext cx="5303520" cy="502920"/>
-          </a:xfrm>
-          <a:prstGeom prst="rect">
-            <a:avLst/>
-          </a:prstGeom>
-          <a:noFill/>
-        </p:spPr>
-        <p:txBody>
-          <a:bodyPr wrap="square">
-            <a:spAutoFit/>
-          </a:bodyPr>
-          <a:lstStyle/>
-          <a:p>
-            <a:pPr algn="l"/>
-            <a:r>
-              <a:rPr sz="1700" b="0">
-                <a:solidFill>
-                  <a:srgbClr val="1A1A2E"/>
-                </a:solidFill>
-              </a:rPr>
-              <a:t>• 10 epochs 训练</a:t>
-            </a:r>
-          </a:p>
-        </p:txBody>
-      </p:sp>
-      <p:sp>
-        <p:nvSpPr>
-          <p:cNvPr id="7" name="TextBox 6"/>
-          <p:cNvSpPr txBox="1"/>
-          <p:nvPr/>
-        </p:nvSpPr>
-        <p:spPr>
-          <a:xfrm>
-            <a:off x="457200" y="2121408"/>
-            <a:ext cx="5303520" cy="502920"/>
-          </a:xfrm>
-          <a:prstGeom prst="rect">
-            <a:avLst/>
-          </a:prstGeom>
-          <a:noFill/>
-        </p:spPr>
-        <p:txBody>
-          <a:bodyPr wrap="square">
-            <a:spAutoFit/>
-          </a:bodyPr>
-          <a:lstStyle/>
-          <a:p>
-            <a:pPr algn="l"/>
-            <a:r>
-              <a:rPr sz="1700" b="0">
-                <a:solidFill>
-                  <a:srgbClr val="1A1A2E"/>
-                </a:solidFill>
-              </a:rPr>
-              <a:t>• 贪心解码（argmax）</a:t>
-            </a:r>
-          </a:p>
-        </p:txBody>
-      </p:sp>
-      <p:sp>
-        <p:nvSpPr>
-          <p:cNvPr id="8" name="TextBox 7"/>
-          <p:cNvSpPr txBox="1"/>
-          <p:nvPr/>
-        </p:nvSpPr>
-        <p:spPr>
-          <a:xfrm>
-            <a:off x="457200" y="2596896"/>
-            <a:ext cx="5303520" cy="502920"/>
-          </a:xfrm>
-          <a:prstGeom prst="rect">
-            <a:avLst/>
-          </a:prstGeom>
-          <a:noFill/>
-        </p:spPr>
-        <p:txBody>
-          <a:bodyPr wrap="square">
-            <a:spAutoFit/>
-          </a:bodyPr>
-          <a:lstStyle/>
-          <a:p>
-            <a:pPr algn="l"/>
-            <a:r>
-              <a:rPr sz="1700" b="0">
-                <a:solidFill>
-                  <a:srgbClr val="1A1A2E"/>
-                </a:solidFill>
-              </a:rPr>
-              <a:t>• 无梯度裁剪</a:t>
-            </a:r>
-          </a:p>
-        </p:txBody>
-      </p:sp>
-      <p:sp>
-        <p:nvSpPr>
-          <p:cNvPr id="9" name="TextBox 8"/>
-          <p:cNvSpPr txBox="1"/>
-          <p:nvPr/>
-        </p:nvSpPr>
-        <p:spPr>
-          <a:xfrm>
-            <a:off x="457200" y="3072384"/>
-            <a:ext cx="5303520" cy="502920"/>
-          </a:xfrm>
-          <a:prstGeom prst="rect">
-            <a:avLst/>
-          </a:prstGeom>
-          <a:noFill/>
-        </p:spPr>
-        <p:txBody>
-          <a:bodyPr wrap="square">
-            <a:spAutoFit/>
-          </a:bodyPr>
-          <a:lstStyle/>
-          <a:p>
-            <a:pPr algn="l"/>
-            <a:r>
-              <a:rPr sz="1700" b="0">
-                <a:solidFill>
-                  <a:srgbClr val="1A1A2E"/>
-                </a:solidFill>
-              </a:rPr>
-              <a:t>• dev_bleu 评估（100样本）</a:t>
-            </a:r>
-          </a:p>
-        </p:txBody>
-      </p:sp>
-      <p:sp>
-        <p:nvSpPr>
-          <p:cNvPr id="10" name="Rectangle 9"/>
+              <a:t>解决方案：优化策略（v1→v2 改进）</a:t>
+            </a:r>
+          </a:p>
+        </p:txBody>
+      </p:sp>
+      <p:sp>
+        <p:nvSpPr>
+          <p:cNvPr id="5" name="Rectangle 4"/>
           <p:cNvSpPr/>
           <p:nvPr/>
         </p:nvSpPr>
         <p:spPr>
           <a:xfrm>
-            <a:off x="6400800" y="1097280"/>
-            <a:ext cx="5394960" cy="457200"/>
+            <a:off x="347472" y="1051560"/>
+            <a:ext cx="5394960" cy="438912"/>
           </a:xfrm>
           <a:prstGeom prst="rect">
             <a:avLst/>
           </a:prstGeom>
           <a:solidFill>
-            <a:srgbClr val="D6E4F0"/>
+            <a:srgbClr val="E8F0F8"/>
           </a:solidFill>
           <a:ln>
             <a:noFill/>
@@ -4601,14 +4856,14 @@
       </p:sp>
       <p:sp>
         <p:nvSpPr>
-          <p:cNvPr id="11" name="TextBox 10"/>
+          <p:cNvPr id="6" name="TextBox 5"/>
           <p:cNvSpPr txBox="1"/>
           <p:nvPr/>
         </p:nvSpPr>
         <p:spPr>
           <a:xfrm>
-            <a:off x="6492240" y="1143000"/>
-            <a:ext cx="5212080" cy="411480"/>
+            <a:off x="438912" y="1097280"/>
+            <a:ext cx="5212080" cy="347472"/>
           </a:xfrm>
           <a:prstGeom prst="rect">
             <a:avLst/>
@@ -4623,26 +4878,26 @@
           <a:p>
             <a:pPr algn="l"/>
             <a:r>
-              <a:rPr sz="1800" b="1">
-                <a:solidFill>
-                  <a:srgbClr val="1F497D"/>
+              <a:rPr sz="1700" b="1" i="0">
+                <a:solidFill>
+                  <a:srgbClr val="1A335C"/>
                 </a:solidFill>
               </a:rPr>
-              <a:t>v2 优化（BLEU=14.93 ✅）</a:t>
-            </a:r>
-          </a:p>
-        </p:txBody>
-      </p:sp>
-      <p:sp>
-        <p:nvSpPr>
-          <p:cNvPr id="12" name="TextBox 11"/>
+              <a:t>v1 基线（BLEU=12.39）</a:t>
+            </a:r>
+          </a:p>
+        </p:txBody>
+      </p:sp>
+      <p:sp>
+        <p:nvSpPr>
+          <p:cNvPr id="7" name="TextBox 6"/>
           <p:cNvSpPr txBox="1"/>
           <p:nvPr/>
         </p:nvSpPr>
         <p:spPr>
           <a:xfrm>
-            <a:off x="6492240" y="1645920"/>
-            <a:ext cx="5212080" cy="502920"/>
+            <a:off x="411480" y="1572768"/>
+            <a:ext cx="5321808" cy="475488"/>
           </a:xfrm>
           <a:prstGeom prst="rect">
             <a:avLst/>
@@ -4657,26 +4912,26 @@
           <a:p>
             <a:pPr algn="l"/>
             <a:r>
-              <a:rPr sz="1700" b="0">
-                <a:solidFill>
-                  <a:srgbClr val="1A1A2E"/>
+              <a:rPr sz="1600" b="0" i="0">
+                <a:solidFill>
+                  <a:srgbClr val="1C1C1C"/>
                 </a:solidFill>
               </a:rPr>
-              <a:t>• 延长至 20 epochs</a:t>
-            </a:r>
-          </a:p>
-        </p:txBody>
-      </p:sp>
-      <p:sp>
-        <p:nvSpPr>
-          <p:cNvPr id="13" name="TextBox 12"/>
+              <a:t>▸ 训练 10 epochs</a:t>
+            </a:r>
+          </a:p>
+        </p:txBody>
+      </p:sp>
+      <p:sp>
+        <p:nvSpPr>
+          <p:cNvPr id="8" name="TextBox 7"/>
           <p:cNvSpPr txBox="1"/>
           <p:nvPr/>
         </p:nvSpPr>
         <p:spPr>
           <a:xfrm>
-            <a:off x="6492240" y="2121408"/>
-            <a:ext cx="5212080" cy="502920"/>
+            <a:off x="411480" y="2048256"/>
+            <a:ext cx="5321808" cy="475488"/>
           </a:xfrm>
           <a:prstGeom prst="rect">
             <a:avLst/>
@@ -4691,26 +4946,26 @@
           <a:p>
             <a:pPr algn="l"/>
             <a:r>
-              <a:rPr sz="1700" b="0">
-                <a:solidFill>
-                  <a:srgbClr val="1A1A2E"/>
+              <a:rPr sz="1600" b="0" i="0">
+                <a:solidFill>
+                  <a:srgbClr val="1C1C1C"/>
                 </a:solidFill>
               </a:rPr>
-              <a:t>• Beam Search（beam=4，α=0.7）</a:t>
-            </a:r>
-          </a:p>
-        </p:txBody>
-      </p:sp>
-      <p:sp>
-        <p:nvSpPr>
-          <p:cNvPr id="14" name="TextBox 13"/>
+              <a:t>▸ 推理：贪心解码（argmax）</a:t>
+            </a:r>
+          </a:p>
+        </p:txBody>
+      </p:sp>
+      <p:sp>
+        <p:nvSpPr>
+          <p:cNvPr id="9" name="TextBox 8"/>
           <p:cNvSpPr txBox="1"/>
           <p:nvPr/>
         </p:nvSpPr>
         <p:spPr>
           <a:xfrm>
-            <a:off x="6492240" y="2596896"/>
-            <a:ext cx="5212080" cy="502920"/>
+            <a:off x="411480" y="2523744"/>
+            <a:ext cx="5321808" cy="475488"/>
           </a:xfrm>
           <a:prstGeom prst="rect">
             <a:avLst/>
@@ -4725,26 +4980,26 @@
           <a:p>
             <a:pPr algn="l"/>
             <a:r>
-              <a:rPr sz="1700" b="0">
-                <a:solidFill>
-                  <a:srgbClr val="1A1A2E"/>
+              <a:rPr sz="1600" b="0" i="0">
+                <a:solidFill>
+                  <a:srgbClr val="1C1C1C"/>
                 </a:solidFill>
               </a:rPr>
-              <a:t>• 梯度裁剪（clip_norm=1.0）</a:t>
-            </a:r>
-          </a:p>
-        </p:txBody>
-      </p:sp>
-      <p:sp>
-        <p:nvSpPr>
-          <p:cNvPr id="15" name="TextBox 14"/>
+              <a:t>▸ 无梯度裁剪</a:t>
+            </a:r>
+          </a:p>
+        </p:txBody>
+      </p:sp>
+      <p:sp>
+        <p:nvSpPr>
+          <p:cNvPr id="10" name="TextBox 9"/>
           <p:cNvSpPr txBox="1"/>
           <p:nvPr/>
         </p:nvSpPr>
         <p:spPr>
           <a:xfrm>
-            <a:off x="6492240" y="3072384"/>
-            <a:ext cx="5212080" cy="502920"/>
+            <a:off x="411480" y="2999232"/>
+            <a:ext cx="5321808" cy="475488"/>
           </a:xfrm>
           <a:prstGeom prst="rect">
             <a:avLst/>
@@ -4759,32 +5014,313 @@
           <a:p>
             <a:pPr algn="l"/>
             <a:r>
-              <a:rPr sz="1700" b="0">
-                <a:solidFill>
-                  <a:srgbClr val="1A1A2E"/>
+              <a:rPr sz="1600" b="0" i="0">
+                <a:solidFill>
+                  <a:srgbClr val="1C1C1C"/>
                 </a:solidFill>
               </a:rPr>
-              <a:t>• Label Smoothing（0.1）</a:t>
-            </a:r>
-          </a:p>
-        </p:txBody>
-      </p:sp>
-      <p:sp>
-        <p:nvSpPr>
-          <p:cNvPr id="16" name="Rectangle 15"/>
+              <a:t>▸ 验证集：100 样本 + 贪心</a:t>
+            </a:r>
+          </a:p>
+        </p:txBody>
+      </p:sp>
+      <p:sp>
+        <p:nvSpPr>
+          <p:cNvPr id="11" name="TextBox 10"/>
+          <p:cNvSpPr txBox="1"/>
+          <p:nvPr/>
+        </p:nvSpPr>
+        <p:spPr>
+          <a:xfrm>
+            <a:off x="411480" y="3474720"/>
+            <a:ext cx="5321808" cy="475488"/>
+          </a:xfrm>
+          <a:prstGeom prst="rect">
+            <a:avLst/>
+          </a:prstGeom>
+          <a:noFill/>
+        </p:spPr>
+        <p:txBody>
+          <a:bodyPr wrap="square">
+            <a:spAutoFit/>
+          </a:bodyPr>
+          <a:lstStyle/>
+          <a:p>
+            <a:pPr algn="l"/>
+            <a:r>
+              <a:rPr sz="1600" b="0" i="0">
+                <a:solidFill>
+                  <a:srgbClr val="1C1C1C"/>
+                </a:solidFill>
+              </a:rPr>
+              <a:t>▸ 结果不达标，差距 1.61</a:t>
+            </a:r>
+          </a:p>
+        </p:txBody>
+      </p:sp>
+      <p:sp>
+        <p:nvSpPr>
+          <p:cNvPr id="12" name="Rectangle 11"/>
           <p:cNvSpPr/>
           <p:nvPr/>
         </p:nvSpPr>
         <p:spPr>
           <a:xfrm>
-            <a:off x="0" y="6675120"/>
-            <a:ext cx="12188952" cy="73152"/>
+            <a:off x="6355080" y="1051560"/>
+            <a:ext cx="5394960" cy="438912"/>
           </a:xfrm>
           <a:prstGeom prst="rect">
             <a:avLst/>
           </a:prstGeom>
           <a:solidFill>
-            <a:srgbClr val="1F497D"/>
+            <a:srgbClr val="E8F0F8"/>
+          </a:solidFill>
+          <a:ln>
+            <a:noFill/>
+          </a:ln>
+        </p:spPr>
+        <p:style>
+          <a:lnRef idx="1">
+            <a:schemeClr val="accent1"/>
+          </a:lnRef>
+          <a:fillRef idx="3">
+            <a:schemeClr val="accent1"/>
+          </a:fillRef>
+          <a:effectRef idx="2">
+            <a:schemeClr val="accent1"/>
+          </a:effectRef>
+          <a:fontRef idx="minor">
+            <a:schemeClr val="lt1"/>
+          </a:fontRef>
+        </p:style>
+        <p:txBody>
+          <a:bodyPr rtlCol="0" anchor="ctr"/>
+          <a:lstStyle/>
+          <a:p>
+            <a:pPr algn="ctr"/>
+          </a:p>
+        </p:txBody>
+      </p:sp>
+      <p:sp>
+        <p:nvSpPr>
+          <p:cNvPr id="13" name="TextBox 12"/>
+          <p:cNvSpPr txBox="1"/>
+          <p:nvPr/>
+        </p:nvSpPr>
+        <p:spPr>
+          <a:xfrm>
+            <a:off x="6446520" y="1097280"/>
+            <a:ext cx="5212080" cy="347472"/>
+          </a:xfrm>
+          <a:prstGeom prst="rect">
+            <a:avLst/>
+          </a:prstGeom>
+          <a:noFill/>
+        </p:spPr>
+        <p:txBody>
+          <a:bodyPr wrap="square">
+            <a:spAutoFit/>
+          </a:bodyPr>
+          <a:lstStyle/>
+          <a:p>
+            <a:pPr algn="l"/>
+            <a:r>
+              <a:rPr sz="1700" b="1" i="0">
+                <a:solidFill>
+                  <a:srgbClr val="1A335C"/>
+                </a:solidFill>
+              </a:rPr>
+              <a:t>v2 优化（BLEU=14.93 ✅）</a:t>
+            </a:r>
+          </a:p>
+        </p:txBody>
+      </p:sp>
+      <p:sp>
+        <p:nvSpPr>
+          <p:cNvPr id="14" name="TextBox 13"/>
+          <p:cNvSpPr txBox="1"/>
+          <p:nvPr/>
+        </p:nvSpPr>
+        <p:spPr>
+          <a:xfrm>
+            <a:off x="6400800" y="1572768"/>
+            <a:ext cx="5321808" cy="475488"/>
+          </a:xfrm>
+          <a:prstGeom prst="rect">
+            <a:avLst/>
+          </a:prstGeom>
+          <a:noFill/>
+        </p:spPr>
+        <p:txBody>
+          <a:bodyPr wrap="square">
+            <a:spAutoFit/>
+          </a:bodyPr>
+          <a:lstStyle/>
+          <a:p>
+            <a:pPr algn="l"/>
+            <a:r>
+              <a:rPr sz="1600" b="0" i="0">
+                <a:solidFill>
+                  <a:srgbClr val="1C1C1C"/>
+                </a:solidFill>
+              </a:rPr>
+              <a:t>▸ 延长训练至 20 epochs</a:t>
+            </a:r>
+          </a:p>
+        </p:txBody>
+      </p:sp>
+      <p:sp>
+        <p:nvSpPr>
+          <p:cNvPr id="15" name="TextBox 14"/>
+          <p:cNvSpPr txBox="1"/>
+          <p:nvPr/>
+        </p:nvSpPr>
+        <p:spPr>
+          <a:xfrm>
+            <a:off x="6400800" y="2048256"/>
+            <a:ext cx="5321808" cy="475488"/>
+          </a:xfrm>
+          <a:prstGeom prst="rect">
+            <a:avLst/>
+          </a:prstGeom>
+          <a:noFill/>
+        </p:spPr>
+        <p:txBody>
+          <a:bodyPr wrap="square">
+            <a:spAutoFit/>
+          </a:bodyPr>
+          <a:lstStyle/>
+          <a:p>
+            <a:pPr algn="l"/>
+            <a:r>
+              <a:rPr sz="1600" b="0" i="0">
+                <a:solidFill>
+                  <a:srgbClr val="1C1C1C"/>
+                </a:solidFill>
+              </a:rPr>
+              <a:t>▸ 推理：Beam Search（beam=4，α=0.7）</a:t>
+            </a:r>
+          </a:p>
+        </p:txBody>
+      </p:sp>
+      <p:sp>
+        <p:nvSpPr>
+          <p:cNvPr id="16" name="TextBox 15"/>
+          <p:cNvSpPr txBox="1"/>
+          <p:nvPr/>
+        </p:nvSpPr>
+        <p:spPr>
+          <a:xfrm>
+            <a:off x="6400800" y="2523744"/>
+            <a:ext cx="5321808" cy="475488"/>
+          </a:xfrm>
+          <a:prstGeom prst="rect">
+            <a:avLst/>
+          </a:prstGeom>
+          <a:noFill/>
+        </p:spPr>
+        <p:txBody>
+          <a:bodyPr wrap="square">
+            <a:spAutoFit/>
+          </a:bodyPr>
+          <a:lstStyle/>
+          <a:p>
+            <a:pPr algn="l"/>
+            <a:r>
+              <a:rPr sz="1600" b="0" i="0">
+                <a:solidFill>
+                  <a:srgbClr val="1C1C1C"/>
+                </a:solidFill>
+              </a:rPr>
+              <a:t>▸ 梯度裁剪（clip_norm = 1.0）</a:t>
+            </a:r>
+          </a:p>
+        </p:txBody>
+      </p:sp>
+      <p:sp>
+        <p:nvSpPr>
+          <p:cNvPr id="17" name="TextBox 16"/>
+          <p:cNvSpPr txBox="1"/>
+          <p:nvPr/>
+        </p:nvSpPr>
+        <p:spPr>
+          <a:xfrm>
+            <a:off x="6400800" y="2999232"/>
+            <a:ext cx="5321808" cy="475488"/>
+          </a:xfrm>
+          <a:prstGeom prst="rect">
+            <a:avLst/>
+          </a:prstGeom>
+          <a:noFill/>
+        </p:spPr>
+        <p:txBody>
+          <a:bodyPr wrap="square">
+            <a:spAutoFit/>
+          </a:bodyPr>
+          <a:lstStyle/>
+          <a:p>
+            <a:pPr algn="l"/>
+            <a:r>
+              <a:rPr sz="1600" b="0" i="0">
+                <a:solidFill>
+                  <a:srgbClr val="1C1C1C"/>
+                </a:solidFill>
+              </a:rPr>
+              <a:t>▸ Label Smoothing（ε=0.1）</a:t>
+            </a:r>
+          </a:p>
+        </p:txBody>
+      </p:sp>
+      <p:sp>
+        <p:nvSpPr>
+          <p:cNvPr id="18" name="TextBox 17"/>
+          <p:cNvSpPr txBox="1"/>
+          <p:nvPr/>
+        </p:nvSpPr>
+        <p:spPr>
+          <a:xfrm>
+            <a:off x="6400800" y="3474720"/>
+            <a:ext cx="5321808" cy="475488"/>
+          </a:xfrm>
+          <a:prstGeom prst="rect">
+            <a:avLst/>
+          </a:prstGeom>
+          <a:noFill/>
+        </p:spPr>
+        <p:txBody>
+          <a:bodyPr wrap="square">
+            <a:spAutoFit/>
+          </a:bodyPr>
+          <a:lstStyle/>
+          <a:p>
+            <a:pPr algn="l"/>
+            <a:r>
+              <a:rPr sz="1600" b="0" i="0">
+                <a:solidFill>
+                  <a:srgbClr val="1C1C1C"/>
+                </a:solidFill>
+              </a:rPr>
+              <a:t>▸ 三项改进合计 +2.54 BLEU</a:t>
+            </a:r>
+          </a:p>
+        </p:txBody>
+      </p:sp>
+      <p:sp>
+        <p:nvSpPr>
+          <p:cNvPr id="19" name="Rectangle 18"/>
+          <p:cNvSpPr/>
+          <p:nvPr/>
+        </p:nvSpPr>
+        <p:spPr>
+          <a:xfrm>
+            <a:off x="0" y="6748272"/>
+            <a:ext cx="12188952" cy="109728"/>
+          </a:xfrm>
+          <a:prstGeom prst="rect">
+            <a:avLst/>
+          </a:prstGeom>
+          <a:solidFill>
+            <a:srgbClr val="1A335C"/>
           </a:solidFill>
           <a:ln>
             <a:noFill/>
@@ -4847,13 +5383,13 @@
         <p:spPr>
           <a:xfrm>
             <a:off x="0" y="0"/>
-            <a:ext cx="12188952" cy="1005840"/>
+            <a:ext cx="12188952" cy="960120"/>
           </a:xfrm>
           <a:prstGeom prst="rect">
             <a:avLst/>
           </a:prstGeom>
           <a:solidFill>
-            <a:srgbClr val="1F497D"/>
+            <a:srgbClr val="1A335C"/>
           </a:solidFill>
           <a:ln>
             <a:noFill/>
@@ -4883,54 +5419,20 @@
       </p:sp>
       <p:sp>
         <p:nvSpPr>
-          <p:cNvPr id="3" name="TextBox 2"/>
-          <p:cNvSpPr txBox="1"/>
-          <p:nvPr/>
-        </p:nvSpPr>
-        <p:spPr>
-          <a:xfrm>
-            <a:off x="274320" y="91440"/>
-            <a:ext cx="11612880" cy="822960"/>
-          </a:xfrm>
-          <a:prstGeom prst="rect">
-            <a:avLst/>
-          </a:prstGeom>
-          <a:noFill/>
-        </p:spPr>
-        <p:txBody>
-          <a:bodyPr wrap="square">
-            <a:spAutoFit/>
-          </a:bodyPr>
-          <a:lstStyle/>
-          <a:p>
-            <a:pPr algn="l"/>
-            <a:r>
-              <a:rPr sz="2400" b="1">
-                <a:solidFill>
-                  <a:srgbClr val="FFFFFF"/>
-                </a:solidFill>
-              </a:rPr>
-              <a:t>核心代码：Beam Search 解码</a:t>
-            </a:r>
-          </a:p>
-        </p:txBody>
-      </p:sp>
-      <p:sp>
-        <p:nvSpPr>
-          <p:cNvPr id="4" name="Rectangle 3"/>
+          <p:cNvPr id="3" name="Rectangle 2"/>
           <p:cNvSpPr/>
           <p:nvPr/>
         </p:nvSpPr>
         <p:spPr>
           <a:xfrm>
-            <a:off x="365760" y="1097280"/>
-            <a:ext cx="11430000" cy="5394960"/>
+            <a:off x="0" y="0"/>
+            <a:ext cx="164592" cy="6858000"/>
           </a:xfrm>
           <a:prstGeom prst="rect">
             <a:avLst/>
           </a:prstGeom>
           <a:solidFill>
-            <a:srgbClr val="1E1E1E"/>
+            <a:srgbClr val="1A335C"/>
           </a:solidFill>
           <a:ln>
             <a:noFill/>
@@ -4960,14 +5462,14 @@
       </p:sp>
       <p:sp>
         <p:nvSpPr>
-          <p:cNvPr id="5" name="TextBox 4"/>
+          <p:cNvPr id="4" name="TextBox 3"/>
           <p:cNvSpPr txBox="1"/>
           <p:nvPr/>
         </p:nvSpPr>
         <p:spPr>
           <a:xfrm>
-            <a:off x="502920" y="1188720"/>
-            <a:ext cx="11155680" cy="5212080"/>
+            <a:off x="347472" y="91440"/>
+            <a:ext cx="11521440" cy="777240"/>
           </a:xfrm>
           <a:prstGeom prst="rect">
             <a:avLst/>
@@ -4982,26 +5484,102 @@
           <a:p>
             <a:pPr algn="l"/>
             <a:r>
-              <a:rPr sz="1300" b="0">
-                <a:solidFill>
-                  <a:srgbClr val="D4D4D4"/>
+              <a:rPr sz="2300" b="1" i="0">
+                <a:solidFill>
+                  <a:srgbClr val="FFFFFF"/>
                 </a:solidFill>
               </a:rPr>
-              <a:t>def beam_search_sentence(model, src_tokens, data,
-                         device, max_len, beam_size=4,
-                         length_penalty=0.7):
-    # 初始化：beam = [(score=0, seq=[&lt;bos&gt;])]
-    beams = [(0.0, [tgt_vocab.bos_idx])]
-    completed = []
+              <a:t>核心代码：Beam Search 解码</a:t>
+            </a:r>
+          </a:p>
+        </p:txBody>
+      </p:sp>
+      <p:sp>
+        <p:nvSpPr>
+          <p:cNvPr id="5" name="Rectangle 4"/>
+          <p:cNvSpPr/>
+          <p:nvPr/>
+        </p:nvSpPr>
+        <p:spPr>
+          <a:xfrm>
+            <a:off x="347472" y="1051560"/>
+            <a:ext cx="11475720" cy="4206240"/>
+          </a:xfrm>
+          <a:prstGeom prst="rect">
+            <a:avLst/>
+          </a:prstGeom>
+          <a:solidFill>
+            <a:srgbClr val="1E1E2E"/>
+          </a:solidFill>
+          <a:ln>
+            <a:noFill/>
+          </a:ln>
+        </p:spPr>
+        <p:style>
+          <a:lnRef idx="1">
+            <a:schemeClr val="accent1"/>
+          </a:lnRef>
+          <a:fillRef idx="3">
+            <a:schemeClr val="accent1"/>
+          </a:fillRef>
+          <a:effectRef idx="2">
+            <a:schemeClr val="accent1"/>
+          </a:effectRef>
+          <a:fontRef idx="minor">
+            <a:schemeClr val="lt1"/>
+          </a:fontRef>
+        </p:style>
+        <p:txBody>
+          <a:bodyPr rtlCol="0" anchor="ctr"/>
+          <a:lstStyle/>
+          <a:p>
+            <a:pPr algn="ctr"/>
+          </a:p>
+        </p:txBody>
+      </p:sp>
+      <p:sp>
+        <p:nvSpPr>
+          <p:cNvPr id="6" name="TextBox 5"/>
+          <p:cNvSpPr txBox="1"/>
+          <p:nvPr/>
+        </p:nvSpPr>
+        <p:spPr>
+          <a:xfrm>
+            <a:off x="475488" y="1115568"/>
+            <a:ext cx="11201400" cy="4114800"/>
+          </a:xfrm>
+          <a:prstGeom prst="rect">
+            <a:avLst/>
+          </a:prstGeom>
+          <a:noFill/>
+        </p:spPr>
+        <p:txBody>
+          <a:bodyPr wrap="square">
+            <a:spAutoFit/>
+          </a:bodyPr>
+          <a:lstStyle/>
+          <a:p>
+            <a:pPr algn="l"/>
+            <a:r>
+              <a:rPr sz="1200" b="0" i="0">
+                <a:solidFill>
+                  <a:srgbClr val="CBD3E3"/>
+                </a:solidFill>
+              </a:rPr>
+              <a:t>def beam_search_sentence(model, src_tokens, data, device,
+                          max_len, beam_size=4, length_penalty=0.7):
+    # 初始化：单条束，序列为 [&lt;bos&gt;]
+    beams     = [(0.0, [tgt_vocab.bos_idx])]   # (累计log概率, 序列)
+    completed = []                              # 已生成 &lt;/s&gt; 的序列
     for _ in range(max_len):
         candidates = []
         for score, seq in beams:
-            logits = model(src, tgt_tensor, src_mask, tgt_mask)
-            log_probs = torch.log_softmax(logits[0, -1], dim=-1)
-            top_probs, top_ids = log_probs.topk(beam_size)
-            for p, idx in zip(top_probs, top_ids):
-                candidates.append((score+p, seq+[idx]))
-        # 按长度惩罚评分排序：score / len^alpha
+            logits   = model(src, tgt_tensor, src_mask, tgt_mask)
+            log_prob = torch.log_softmax(logits[0, -1], dim=-1)
+            top_p, top_id = log_prob.topk(beam_size)
+            for p, idx in zip(top_p, top_id):
+                candidates.append((score + p, seq + [idx]))
+        # 按长度惩罚评分排序：score / len(seq)^alpha
         candidates.sort(
             key=lambda x: x[0] / len(x[1])**length_penalty,
             reverse=True)
@@ -5012,20 +5590,54 @@
       </p:sp>
       <p:sp>
         <p:nvSpPr>
-          <p:cNvPr id="6" name="Rectangle 5"/>
+          <p:cNvPr id="7" name="TextBox 6"/>
+          <p:cNvSpPr txBox="1"/>
+          <p:nvPr/>
+        </p:nvSpPr>
+        <p:spPr>
+          <a:xfrm>
+            <a:off x="411480" y="5349240"/>
+            <a:ext cx="11247120" cy="731520"/>
+          </a:xfrm>
+          <a:prstGeom prst="rect">
+            <a:avLst/>
+          </a:prstGeom>
+          <a:noFill/>
+        </p:spPr>
+        <p:txBody>
+          <a:bodyPr wrap="square">
+            <a:spAutoFit/>
+          </a:bodyPr>
+          <a:lstStyle/>
+          <a:p>
+            <a:pPr algn="l"/>
+            <a:r>
+              <a:rPr sz="1400" b="0" i="1">
+                <a:solidFill>
+                  <a:srgbClr val="555555"/>
+                </a:solidFill>
+              </a:rPr>
+              <a:t>length_penalty=0.7（α&lt;1）轻度鼓励长句，防止模型偏好过短翻译。</a:t>
+            </a:r>
+          </a:p>
+        </p:txBody>
+      </p:sp>
+      <p:sp>
+        <p:nvSpPr>
+          <p:cNvPr id="8" name="Rectangle 7"/>
           <p:cNvSpPr/>
           <p:nvPr/>
         </p:nvSpPr>
         <p:spPr>
           <a:xfrm>
-            <a:off x="0" y="6675120"/>
-            <a:ext cx="12188952" cy="73152"/>
+            <a:off x="0" y="6748272"/>
+            <a:ext cx="12188952" cy="109728"/>
           </a:xfrm>
           <a:prstGeom prst="rect">
             <a:avLst/>
           </a:prstGeom>
           <a:solidFill>
-            <a:srgbClr val="1F497D"/>
+            <a:srgbClr val="1A335C"/>
           </a:solidFill>
           <a:ln>
             <a:noFill/>
@@ -5088,13 +5700,13 @@
         <p:spPr>
           <a:xfrm>
             <a:off x="0" y="0"/>
-            <a:ext cx="12188952" cy="1005840"/>
+            <a:ext cx="12188952" cy="960120"/>
           </a:xfrm>
           <a:prstGeom prst="rect">
             <a:avLst/>
           </a:prstGeom>
           <a:solidFill>
-            <a:srgbClr val="1F497D"/>
+            <a:srgbClr val="1A335C"/>
           </a:solidFill>
           <a:ln>
             <a:noFill/>
@@ -5124,14 +5736,57 @@
       </p:sp>
       <p:sp>
         <p:nvSpPr>
-          <p:cNvPr id="3" name="TextBox 2"/>
+          <p:cNvPr id="3" name="Rectangle 2"/>
+          <p:cNvSpPr/>
+          <p:nvPr/>
+        </p:nvSpPr>
+        <p:spPr>
+          <a:xfrm>
+            <a:off x="0" y="0"/>
+            <a:ext cx="164592" cy="6858000"/>
+          </a:xfrm>
+          <a:prstGeom prst="rect">
+            <a:avLst/>
+          </a:prstGeom>
+          <a:solidFill>
+            <a:srgbClr val="1A335C"/>
+          </a:solidFill>
+          <a:ln>
+            <a:noFill/>
+          </a:ln>
+        </p:spPr>
+        <p:style>
+          <a:lnRef idx="1">
+            <a:schemeClr val="accent1"/>
+          </a:lnRef>
+          <a:fillRef idx="3">
+            <a:schemeClr val="accent1"/>
+          </a:fillRef>
+          <a:effectRef idx="2">
+            <a:schemeClr val="accent1"/>
+          </a:effectRef>
+          <a:fontRef idx="minor">
+            <a:schemeClr val="lt1"/>
+          </a:fontRef>
+        </p:style>
+        <p:txBody>
+          <a:bodyPr rtlCol="0" anchor="ctr"/>
+          <a:lstStyle/>
+          <a:p>
+            <a:pPr algn="ctr"/>
+          </a:p>
+        </p:txBody>
+      </p:sp>
+      <p:sp>
+        <p:nvSpPr>
+          <p:cNvPr id="4" name="TextBox 3"/>
           <p:cNvSpPr txBox="1"/>
           <p:nvPr/>
         </p:nvSpPr>
         <p:spPr>
           <a:xfrm>
-            <a:off x="274320" y="91440"/>
-            <a:ext cx="11612880" cy="822960"/>
+            <a:off x="347472" y="91440"/>
+            <a:ext cx="11521440" cy="777240"/>
           </a:xfrm>
           <a:prstGeom prst="rect">
             <a:avLst/>
@@ -5146,26 +5801,26 @@
           <a:p>
             <a:pPr algn="l"/>
             <a:r>
-              <a:rPr sz="2400" b="1">
+              <a:rPr sz="2300" b="1" i="0">
                 <a:solidFill>
                   <a:srgbClr val="FFFFFF"/>
                 </a:solidFill>
               </a:rPr>
-              <a:t>训练曲线（20 epochs）</a:t>
-            </a:r>
-          </a:p>
-        </p:txBody>
-      </p:sp>
-      <p:sp>
-        <p:nvSpPr>
-          <p:cNvPr id="4" name="TextBox 3"/>
+              <a:t>训练过程：20 epoch 收敛曲线（关键节点）</a:t>
+            </a:r>
+          </a:p>
+        </p:txBody>
+      </p:sp>
+      <p:sp>
+        <p:nvSpPr>
+          <p:cNvPr id="5" name="TextBox 4"/>
           <p:cNvSpPr txBox="1"/>
           <p:nvPr/>
         </p:nvSpPr>
         <p:spPr>
           <a:xfrm>
-            <a:off x="457200" y="1188720"/>
-            <a:ext cx="11247120" cy="502920"/>
+            <a:off x="411480" y="1115568"/>
+            <a:ext cx="11247120" cy="475488"/>
           </a:xfrm>
           <a:prstGeom prst="rect">
             <a:avLst/>
@@ -5180,26 +5835,26 @@
           <a:p>
             <a:pPr algn="l"/>
             <a:r>
-              <a:rPr sz="1800" b="0">
-                <a:solidFill>
-                  <a:srgbClr val="1A1A2E"/>
+              <a:rPr sz="1700" b="0" i="0">
+                <a:solidFill>
+                  <a:srgbClr val="1C1C1C"/>
                 </a:solidFill>
               </a:rPr>
-              <a:t>  • Epoch  1: dev_bleu = 4.77</a:t>
-            </a:r>
-          </a:p>
-        </p:txBody>
-      </p:sp>
-      <p:sp>
-        <p:nvSpPr>
-          <p:cNvPr id="5" name="TextBox 4"/>
+              <a:t>▸ Epoch  1：dev_bleu =  4.77  （模型初步学习对齐）</a:t>
+            </a:r>
+          </a:p>
+        </p:txBody>
+      </p:sp>
+      <p:sp>
+        <p:nvSpPr>
+          <p:cNvPr id="6" name="TextBox 5"/>
           <p:cNvSpPr txBox="1"/>
           <p:nvPr/>
         </p:nvSpPr>
         <p:spPr>
           <a:xfrm>
-            <a:off x="457200" y="1664208"/>
-            <a:ext cx="11247120" cy="502920"/>
+            <a:off x="411480" y="1591056"/>
+            <a:ext cx="11247120" cy="475488"/>
           </a:xfrm>
           <a:prstGeom prst="rect">
             <a:avLst/>
@@ -5214,26 +5869,26 @@
           <a:p>
             <a:pPr algn="l"/>
             <a:r>
-              <a:rPr sz="1800" b="0">
-                <a:solidFill>
-                  <a:srgbClr val="1A1A2E"/>
+              <a:rPr sz="1700" b="0" i="0">
+                <a:solidFill>
+                  <a:srgbClr val="1C1C1C"/>
                 </a:solidFill>
               </a:rPr>
-              <a:t>  • Epoch  4: dev_bleu = 11.96（快速提升期）</a:t>
-            </a:r>
-          </a:p>
-        </p:txBody>
-      </p:sp>
-      <p:sp>
-        <p:nvSpPr>
-          <p:cNvPr id="6" name="TextBox 5"/>
+              <a:t>▸ Epoch  4：dev_bleu = 11.96  （快速提升期，loss 从 5.9 降至 4.6）</a:t>
+            </a:r>
+          </a:p>
+        </p:txBody>
+      </p:sp>
+      <p:sp>
+        <p:nvSpPr>
+          <p:cNvPr id="7" name="TextBox 6"/>
           <p:cNvSpPr txBox="1"/>
           <p:nvPr/>
         </p:nvSpPr>
         <p:spPr>
           <a:xfrm>
-            <a:off x="457200" y="2139696"/>
-            <a:ext cx="11247120" cy="502920"/>
+            <a:off x="411480" y="2066543"/>
+            <a:ext cx="11247120" cy="475488"/>
           </a:xfrm>
           <a:prstGeom prst="rect">
             <a:avLst/>
@@ -5248,26 +5903,26 @@
           <a:p>
             <a:pPr algn="l"/>
             <a:r>
-              <a:rPr sz="1800" b="0">
-                <a:solidFill>
-                  <a:srgbClr val="1A1A2E"/>
+              <a:rPr sz="1700" b="0" i="0">
+                <a:solidFill>
+                  <a:srgbClr val="1C1C1C"/>
                 </a:solidFill>
               </a:rPr>
-              <a:t>  • Epoch 12: dev_bleu = 14.39（突破 14）</a:t>
-            </a:r>
-          </a:p>
-        </p:txBody>
-      </p:sp>
-      <p:sp>
-        <p:nvSpPr>
-          <p:cNvPr id="7" name="TextBox 6"/>
+              <a:t>▸ Epoch 12：dev_bleu = 14.39  （首次突破目标值 14）</a:t>
+            </a:r>
+          </a:p>
+        </p:txBody>
+      </p:sp>
+      <p:sp>
+        <p:nvSpPr>
+          <p:cNvPr id="8" name="TextBox 7"/>
           <p:cNvSpPr txBox="1"/>
           <p:nvPr/>
         </p:nvSpPr>
         <p:spPr>
           <a:xfrm>
-            <a:off x="457200" y="2615184"/>
-            <a:ext cx="11247120" cy="502920"/>
+            <a:off x="411480" y="2542032"/>
+            <a:ext cx="11247120" cy="475488"/>
           </a:xfrm>
           <a:prstGeom prst="rect">
             <a:avLst/>
@@ -5282,26 +5937,26 @@
           <a:p>
             <a:pPr algn="l"/>
             <a:r>
-              <a:rPr sz="1800" b="0">
-                <a:solidFill>
-                  <a:srgbClr val="1A1A2E"/>
+              <a:rPr sz="1700" b="0" i="0">
+                <a:solidFill>
+                  <a:srgbClr val="1C1C1C"/>
                 </a:solidFill>
               </a:rPr>
-              <a:t>  • Epoch 13: dev_bleu = 16.63（最佳，保存 best.pt）</a:t>
-            </a:r>
-          </a:p>
-        </p:txBody>
-      </p:sp>
-      <p:sp>
-        <p:nvSpPr>
-          <p:cNvPr id="8" name="TextBox 7"/>
+              <a:t>▸ Epoch 13：dev_bleu = 16.63  ★ 最佳，保存 best.pt</a:t>
+            </a:r>
+          </a:p>
+        </p:txBody>
+      </p:sp>
+      <p:sp>
+        <p:nvSpPr>
+          <p:cNvPr id="9" name="TextBox 8"/>
           <p:cNvSpPr txBox="1"/>
           <p:nvPr/>
         </p:nvSpPr>
         <p:spPr>
           <a:xfrm>
-            <a:off x="457200" y="3090672"/>
-            <a:ext cx="11247120" cy="502920"/>
+            <a:off x="411480" y="3017520"/>
+            <a:ext cx="11247120" cy="475488"/>
           </a:xfrm>
           <a:prstGeom prst="rect">
             <a:avLst/>
@@ -5316,26 +5971,26 @@
           <a:p>
             <a:pPr algn="l"/>
             <a:r>
-              <a:rPr sz="1800" b="0">
-                <a:solidFill>
-                  <a:srgbClr val="1A1A2E"/>
+              <a:rPr sz="1700" b="0" i="0">
+                <a:solidFill>
+                  <a:srgbClr val="1C1C1C"/>
                 </a:solidFill>
               </a:rPr>
-              <a:t>  • Epoch 16: dev_bleu = 16.54（后期波动，学习率余弦衰减）</a:t>
-            </a:r>
-          </a:p>
-        </p:txBody>
-      </p:sp>
-      <p:sp>
-        <p:nvSpPr>
-          <p:cNvPr id="9" name="TextBox 8"/>
+              <a:t>▸ Epoch 14：dev_bleu = 16.39  （后期波动，CosineAnnealingLR 起作用）</a:t>
+            </a:r>
+          </a:p>
+        </p:txBody>
+      </p:sp>
+      <p:sp>
+        <p:nvSpPr>
+          <p:cNvPr id="10" name="TextBox 9"/>
           <p:cNvSpPr txBox="1"/>
           <p:nvPr/>
         </p:nvSpPr>
         <p:spPr>
           <a:xfrm>
-            <a:off x="457200" y="3566160"/>
-            <a:ext cx="11247120" cy="502920"/>
+            <a:off x="411480" y="3493008"/>
+            <a:ext cx="11247120" cy="475488"/>
           </a:xfrm>
           <a:prstGeom prst="rect">
             <a:avLst/>
@@ -5350,32 +6005,66 @@
           <a:p>
             <a:pPr algn="l"/>
             <a:r>
-              <a:rPr sz="1800" b="0">
-                <a:solidFill>
-                  <a:srgbClr val="1A1A2E"/>
+              <a:rPr sz="1700" b="0" i="0">
+                <a:solidFill>
+                  <a:srgbClr val="1C1C1C"/>
                 </a:solidFill>
               </a:rPr>
-              <a:t>  • Epoch 20: dev_bleu = 15.30（最终 epoch）</a:t>
-            </a:r>
-          </a:p>
-        </p:txBody>
-      </p:sp>
-      <p:sp>
-        <p:nvSpPr>
-          <p:cNvPr id="10" name="Rectangle 9"/>
+              <a:t>▸ Epoch 20：dev_bleu = 15.30  （最终 epoch，损失持续缓慢下降）</a:t>
+            </a:r>
+          </a:p>
+        </p:txBody>
+      </p:sp>
+      <p:sp>
+        <p:nvSpPr>
+          <p:cNvPr id="11" name="TextBox 10"/>
+          <p:cNvSpPr txBox="1"/>
+          <p:nvPr/>
+        </p:nvSpPr>
+        <p:spPr>
+          <a:xfrm>
+            <a:off x="411480" y="3968496"/>
+            <a:ext cx="11247120" cy="475488"/>
+          </a:xfrm>
+          <a:prstGeom prst="rect">
+            <a:avLst/>
+          </a:prstGeom>
+          <a:noFill/>
+        </p:spPr>
+        <p:txBody>
+          <a:bodyPr wrap="square">
+            <a:spAutoFit/>
+          </a:bodyPr>
+          <a:lstStyle/>
+          <a:p>
+            <a:pPr algn="l"/>
+            <a:r>
+              <a:rPr sz="1600" b="0" i="0">
+                <a:solidFill>
+                  <a:srgbClr val="555555"/>
+                </a:solidFill>
+              </a:rPr>
+              <a:t>    – 使用 best.pt（epoch 13）进行测试集评估：test BLEU = 14.93</a:t>
+            </a:r>
+          </a:p>
+        </p:txBody>
+      </p:sp>
+      <p:sp>
+        <p:nvSpPr>
+          <p:cNvPr id="12" name="Rectangle 11"/>
           <p:cNvSpPr/>
           <p:nvPr/>
         </p:nvSpPr>
         <p:spPr>
           <a:xfrm>
-            <a:off x="0" y="6675120"/>
-            <a:ext cx="12188952" cy="73152"/>
+            <a:off x="0" y="6748272"/>
+            <a:ext cx="12188952" cy="109728"/>
           </a:xfrm>
           <a:prstGeom prst="rect">
             <a:avLst/>
           </a:prstGeom>
           <a:solidFill>
-            <a:srgbClr val="1F497D"/>
+            <a:srgbClr val="1A335C"/>
           </a:solidFill>
           <a:ln>
             <a:noFill/>
@@ -5438,13 +6127,13 @@
         <p:spPr>
           <a:xfrm>
             <a:off x="0" y="0"/>
-            <a:ext cx="12188952" cy="1005840"/>
+            <a:ext cx="12188952" cy="960120"/>
           </a:xfrm>
           <a:prstGeom prst="rect">
             <a:avLst/>
           </a:prstGeom>
           <a:solidFill>
-            <a:srgbClr val="1F497D"/>
+            <a:srgbClr val="1A335C"/>
           </a:solidFill>
           <a:ln>
             <a:noFill/>
@@ -5474,54 +6163,20 @@
       </p:sp>
       <p:sp>
         <p:nvSpPr>
-          <p:cNvPr id="3" name="TextBox 2"/>
-          <p:cNvSpPr txBox="1"/>
-          <p:nvPr/>
-        </p:nvSpPr>
-        <p:spPr>
-          <a:xfrm>
-            <a:off x="274320" y="91440"/>
-            <a:ext cx="11612880" cy="822960"/>
-          </a:xfrm>
-          <a:prstGeom prst="rect">
-            <a:avLst/>
-          </a:prstGeom>
-          <a:noFill/>
-        </p:spPr>
-        <p:txBody>
-          <a:bodyPr wrap="square">
-            <a:spAutoFit/>
-          </a:bodyPr>
-          <a:lstStyle/>
-          <a:p>
-            <a:pPr algn="l"/>
-            <a:r>
-              <a:rPr sz="2400" b="1">
-                <a:solidFill>
-                  <a:srgbClr val="FFFFFF"/>
-                </a:solidFill>
-              </a:rPr>
-              <a:t>实验结果</a:t>
-            </a:r>
-          </a:p>
-        </p:txBody>
-      </p:sp>
-      <p:sp>
-        <p:nvSpPr>
-          <p:cNvPr id="4" name="Rectangle 3"/>
+          <p:cNvPr id="3" name="Rectangle 2"/>
           <p:cNvSpPr/>
           <p:nvPr/>
         </p:nvSpPr>
         <p:spPr>
           <a:xfrm>
-            <a:off x="457200" y="1280160"/>
-            <a:ext cx="2743200" cy="2011680"/>
+            <a:off x="0" y="0"/>
+            <a:ext cx="164592" cy="6858000"/>
           </a:xfrm>
           <a:prstGeom prst="rect">
             <a:avLst/>
           </a:prstGeom>
           <a:solidFill>
-            <a:srgbClr val="D6E4F0"/>
+            <a:srgbClr val="1A335C"/>
           </a:solidFill>
           <a:ln>
             <a:noFill/>
@@ -5551,14 +6206,14 @@
       </p:sp>
       <p:sp>
         <p:nvSpPr>
-          <p:cNvPr id="5" name="TextBox 4"/>
+          <p:cNvPr id="4" name="TextBox 3"/>
           <p:cNvSpPr txBox="1"/>
           <p:nvPr/>
         </p:nvSpPr>
         <p:spPr>
           <a:xfrm>
-            <a:off x="457200" y="1463040"/>
-            <a:ext cx="2743200" cy="914400"/>
+            <a:off x="347472" y="91440"/>
+            <a:ext cx="11521440" cy="777240"/>
           </a:xfrm>
           <a:prstGeom prst="rect">
             <a:avLst/>
@@ -5571,68 +6226,34 @@
           </a:bodyPr>
           <a:lstStyle/>
           <a:p>
-            <a:pPr algn="ctr"/>
-            <a:r>
-              <a:rPr sz="3200" b="1">
-                <a:solidFill>
-                  <a:srgbClr val="0A7A43"/>
+            <a:pPr algn="l"/>
+            <a:r>
+              <a:rPr sz="2300" b="1" i="0">
+                <a:solidFill>
+                  <a:srgbClr val="FFFFFF"/>
                 </a:solidFill>
               </a:rPr>
-              <a:t>14.93</a:t>
-            </a:r>
-          </a:p>
-        </p:txBody>
-      </p:sp>
-      <p:sp>
-        <p:nvSpPr>
-          <p:cNvPr id="6" name="TextBox 5"/>
-          <p:cNvSpPr txBox="1"/>
-          <p:nvPr/>
-        </p:nvSpPr>
-        <p:spPr>
-          <a:xfrm>
-            <a:off x="457200" y="2468880"/>
-            <a:ext cx="2743200" cy="548640"/>
-          </a:xfrm>
-          <a:prstGeom prst="rect">
-            <a:avLst/>
-          </a:prstGeom>
-          <a:noFill/>
-        </p:spPr>
-        <p:txBody>
-          <a:bodyPr wrap="square">
-            <a:spAutoFit/>
-          </a:bodyPr>
-          <a:lstStyle/>
-          <a:p>
-            <a:pPr algn="ctr"/>
-            <a:r>
-              <a:rPr sz="1500" b="0">
-                <a:solidFill>
-                  <a:srgbClr val="1A1A2E"/>
-                </a:solidFill>
-              </a:rPr>
-              <a:t>test_BLEU-4</a:t>
-            </a:r>
-          </a:p>
-        </p:txBody>
-      </p:sp>
-      <p:sp>
-        <p:nvSpPr>
-          <p:cNvPr id="7" name="Rectangle 6"/>
+              <a:t>实验结果与分析</a:t>
+            </a:r>
+          </a:p>
+        </p:txBody>
+      </p:sp>
+      <p:sp>
+        <p:nvSpPr>
+          <p:cNvPr id="5" name="Rectangle 4"/>
           <p:cNvSpPr/>
           <p:nvPr/>
         </p:nvSpPr>
         <p:spPr>
           <a:xfrm>
-            <a:off x="3291840" y="1280160"/>
-            <a:ext cx="2743200" cy="2011680"/>
+            <a:off x="365760" y="1097280"/>
+            <a:ext cx="2727198" cy="1920240"/>
           </a:xfrm>
           <a:prstGeom prst="rect">
             <a:avLst/>
           </a:prstGeom>
           <a:solidFill>
-            <a:srgbClr val="D6E4F0"/>
+            <a:srgbClr val="E8F0F8"/>
           </a:solidFill>
           <a:ln>
             <a:noFill/>
@@ -5662,88 +6283,20 @@
       </p:sp>
       <p:sp>
         <p:nvSpPr>
-          <p:cNvPr id="8" name="TextBox 7"/>
-          <p:cNvSpPr txBox="1"/>
-          <p:nvPr/>
-        </p:nvSpPr>
-        <p:spPr>
-          <a:xfrm>
-            <a:off x="3291840" y="1463040"/>
-            <a:ext cx="2743200" cy="914400"/>
-          </a:xfrm>
-          <a:prstGeom prst="rect">
-            <a:avLst/>
-          </a:prstGeom>
-          <a:noFill/>
-        </p:spPr>
-        <p:txBody>
-          <a:bodyPr wrap="square">
-            <a:spAutoFit/>
-          </a:bodyPr>
-          <a:lstStyle/>
-          <a:p>
-            <a:pPr algn="ctr"/>
-            <a:r>
-              <a:rPr sz="3200" b="1">
-                <a:solidFill>
-                  <a:srgbClr val="0A7A43"/>
-                </a:solidFill>
-              </a:rPr>
-              <a:t>16.63</a:t>
-            </a:r>
-          </a:p>
-        </p:txBody>
-      </p:sp>
-      <p:sp>
-        <p:nvSpPr>
-          <p:cNvPr id="9" name="TextBox 8"/>
-          <p:cNvSpPr txBox="1"/>
-          <p:nvPr/>
-        </p:nvSpPr>
-        <p:spPr>
-          <a:xfrm>
-            <a:off x="3291840" y="2468880"/>
-            <a:ext cx="2743200" cy="548640"/>
-          </a:xfrm>
-          <a:prstGeom prst="rect">
-            <a:avLst/>
-          </a:prstGeom>
-          <a:noFill/>
-        </p:spPr>
-        <p:txBody>
-          <a:bodyPr wrap="square">
-            <a:spAutoFit/>
-          </a:bodyPr>
-          <a:lstStyle/>
-          <a:p>
-            <a:pPr algn="ctr"/>
-            <a:r>
-              <a:rPr sz="1500" b="0">
-                <a:solidFill>
-                  <a:srgbClr val="1A1A2E"/>
-                </a:solidFill>
-              </a:rPr>
-              <a:t>best_dev_BLEU</a:t>
-            </a:r>
-          </a:p>
-        </p:txBody>
-      </p:sp>
-      <p:sp>
-        <p:nvSpPr>
-          <p:cNvPr id="10" name="Rectangle 9"/>
+          <p:cNvPr id="6" name="Rectangle 5"/>
           <p:cNvSpPr/>
           <p:nvPr/>
         </p:nvSpPr>
         <p:spPr>
           <a:xfrm>
-            <a:off x="6126480" y="1280160"/>
-            <a:ext cx="2743200" cy="2011680"/>
+            <a:off x="365760" y="1097280"/>
+            <a:ext cx="2727198" cy="73152"/>
           </a:xfrm>
           <a:prstGeom prst="rect">
             <a:avLst/>
           </a:prstGeom>
           <a:solidFill>
-            <a:srgbClr val="D6E4F0"/>
+            <a:srgbClr val="1A335C"/>
           </a:solidFill>
           <a:ln>
             <a:noFill/>
@@ -5773,14 +6326,14 @@
       </p:sp>
       <p:sp>
         <p:nvSpPr>
-          <p:cNvPr id="11" name="TextBox 10"/>
+          <p:cNvPr id="7" name="TextBox 6"/>
           <p:cNvSpPr txBox="1"/>
           <p:nvPr/>
         </p:nvSpPr>
         <p:spPr>
           <a:xfrm>
-            <a:off x="6126480" y="1463040"/>
-            <a:ext cx="2743200" cy="914400"/>
+            <a:off x="365760" y="1234440"/>
+            <a:ext cx="2727198" cy="914400"/>
           </a:xfrm>
           <a:prstGeom prst="rect">
             <a:avLst/>
@@ -5795,26 +6348,26 @@
           <a:p>
             <a:pPr algn="ctr"/>
             <a:r>
-              <a:rPr sz="3200" b="1">
-                <a:solidFill>
-                  <a:srgbClr val="0A7A43"/>
+              <a:rPr sz="3000" b="1" i="0">
+                <a:solidFill>
+                  <a:srgbClr val="1A7A3C"/>
                 </a:solidFill>
               </a:rPr>
-              <a:t>13 / 20</a:t>
-            </a:r>
-          </a:p>
-        </p:txBody>
-      </p:sp>
-      <p:sp>
-        <p:nvSpPr>
-          <p:cNvPr id="12" name="TextBox 11"/>
+              <a:t>14.93</a:t>
+            </a:r>
+          </a:p>
+        </p:txBody>
+      </p:sp>
+      <p:sp>
+        <p:nvSpPr>
+          <p:cNvPr id="8" name="TextBox 7"/>
           <p:cNvSpPr txBox="1"/>
           <p:nvPr/>
         </p:nvSpPr>
         <p:spPr>
           <a:xfrm>
-            <a:off x="6126480" y="2468880"/>
-            <a:ext cx="2743200" cy="548640"/>
+            <a:off x="365760" y="2194560"/>
+            <a:ext cx="2727198" cy="457200"/>
           </a:xfrm>
           <a:prstGeom prst="rect">
             <a:avLst/>
@@ -5829,32 +6382,66 @@
           <a:p>
             <a:pPr algn="ctr"/>
             <a:r>
-              <a:rPr sz="1500" b="0">
-                <a:solidFill>
-                  <a:srgbClr val="1A1A2E"/>
+              <a:rPr sz="1300" b="0" i="0">
+                <a:solidFill>
+                  <a:srgbClr val="1C1C1C"/>
                 </a:solidFill>
               </a:rPr>
-              <a:t>best_epoch</a:t>
-            </a:r>
-          </a:p>
-        </p:txBody>
-      </p:sp>
-      <p:sp>
-        <p:nvSpPr>
-          <p:cNvPr id="13" name="Rectangle 12"/>
+              <a:t>test BLEU-4</a:t>
+            </a:r>
+          </a:p>
+        </p:txBody>
+      </p:sp>
+      <p:sp>
+        <p:nvSpPr>
+          <p:cNvPr id="9" name="TextBox 8"/>
+          <p:cNvSpPr txBox="1"/>
+          <p:nvPr/>
+        </p:nvSpPr>
+        <p:spPr>
+          <a:xfrm>
+            <a:off x="365760" y="2633472"/>
+            <a:ext cx="2727198" cy="320040"/>
+          </a:xfrm>
+          <a:prstGeom prst="rect">
+            <a:avLst/>
+          </a:prstGeom>
+          <a:noFill/>
+        </p:spPr>
+        <p:txBody>
+          <a:bodyPr wrap="square">
+            <a:spAutoFit/>
+          </a:bodyPr>
+          <a:lstStyle/>
+          <a:p>
+            <a:pPr algn="ctr"/>
+            <a:r>
+              <a:rPr sz="1100" b="0" i="1">
+                <a:solidFill>
+                  <a:srgbClr val="555555"/>
+                </a:solidFill>
+              </a:rPr>
+              <a:t>✅ &gt; 14</a:t>
+            </a:r>
+          </a:p>
+        </p:txBody>
+      </p:sp>
+      <p:sp>
+        <p:nvSpPr>
+          <p:cNvPr id="10" name="Rectangle 9"/>
           <p:cNvSpPr/>
           <p:nvPr/>
         </p:nvSpPr>
         <p:spPr>
           <a:xfrm>
-            <a:off x="8961120" y="1280160"/>
-            <a:ext cx="2743200" cy="2011680"/>
+            <a:off x="3230118" y="1097280"/>
+            <a:ext cx="2727198" cy="1920240"/>
           </a:xfrm>
           <a:prstGeom prst="rect">
             <a:avLst/>
           </a:prstGeom>
           <a:solidFill>
-            <a:srgbClr val="D6E4F0"/>
+            <a:srgbClr val="E8F0F8"/>
           </a:solidFill>
           <a:ln>
             <a:noFill/>
@@ -5884,14 +6471,57 @@
       </p:sp>
       <p:sp>
         <p:nvSpPr>
-          <p:cNvPr id="14" name="TextBox 13"/>
+          <p:cNvPr id="11" name="Rectangle 10"/>
+          <p:cNvSpPr/>
+          <p:nvPr/>
+        </p:nvSpPr>
+        <p:spPr>
+          <a:xfrm>
+            <a:off x="3230118" y="1097280"/>
+            <a:ext cx="2727198" cy="73152"/>
+          </a:xfrm>
+          <a:prstGeom prst="rect">
+            <a:avLst/>
+          </a:prstGeom>
+          <a:solidFill>
+            <a:srgbClr val="1A335C"/>
+          </a:solidFill>
+          <a:ln>
+            <a:noFill/>
+          </a:ln>
+        </p:spPr>
+        <p:style>
+          <a:lnRef idx="1">
+            <a:schemeClr val="accent1"/>
+          </a:lnRef>
+          <a:fillRef idx="3">
+            <a:schemeClr val="accent1"/>
+          </a:fillRef>
+          <a:effectRef idx="2">
+            <a:schemeClr val="accent1"/>
+          </a:effectRef>
+          <a:fontRef idx="minor">
+            <a:schemeClr val="lt1"/>
+          </a:fontRef>
+        </p:style>
+        <p:txBody>
+          <a:bodyPr rtlCol="0" anchor="ctr"/>
+          <a:lstStyle/>
+          <a:p>
+            <a:pPr algn="ctr"/>
+          </a:p>
+        </p:txBody>
+      </p:sp>
+      <p:sp>
+        <p:nvSpPr>
+          <p:cNvPr id="12" name="TextBox 11"/>
           <p:cNvSpPr txBox="1"/>
           <p:nvPr/>
         </p:nvSpPr>
         <p:spPr>
           <a:xfrm>
-            <a:off x="8961120" y="1463040"/>
-            <a:ext cx="2743200" cy="914400"/>
+            <a:off x="3230118" y="1234440"/>
+            <a:ext cx="2727198" cy="914400"/>
           </a:xfrm>
           <a:prstGeom prst="rect">
             <a:avLst/>
@@ -5906,26 +6536,26 @@
           <a:p>
             <a:pPr algn="ctr"/>
             <a:r>
-              <a:rPr sz="3200" b="1">
-                <a:solidFill>
-                  <a:srgbClr val="0A7A43"/>
+              <a:rPr sz="3000" b="1" i="0">
+                <a:solidFill>
+                  <a:srgbClr val="1A7A3C"/>
                 </a:solidFill>
               </a:rPr>
-              <a:t>✅ 达标</a:t>
-            </a:r>
-          </a:p>
-        </p:txBody>
-      </p:sp>
-      <p:sp>
-        <p:nvSpPr>
-          <p:cNvPr id="15" name="TextBox 14"/>
+              <a:t>16.63</a:t>
+            </a:r>
+          </a:p>
+        </p:txBody>
+      </p:sp>
+      <p:sp>
+        <p:nvSpPr>
+          <p:cNvPr id="13" name="TextBox 12"/>
           <p:cNvSpPr txBox="1"/>
           <p:nvPr/>
         </p:nvSpPr>
         <p:spPr>
           <a:xfrm>
-            <a:off x="8961120" y="2468880"/>
-            <a:ext cx="2743200" cy="548640"/>
+            <a:off x="3230118" y="2194560"/>
+            <a:ext cx="2727198" cy="457200"/>
           </a:xfrm>
           <a:prstGeom prst="rect">
             <a:avLst/>
@@ -5940,26 +6570,26 @@
           <a:p>
             <a:pPr algn="ctr"/>
             <a:r>
-              <a:rPr sz="1500" b="0">
-                <a:solidFill>
-                  <a:srgbClr val="1A1A2E"/>
+              <a:rPr sz="1300" b="0" i="0">
+                <a:solidFill>
+                  <a:srgbClr val="1C1C1C"/>
                 </a:solidFill>
               </a:rPr>
-              <a:t>目标（&gt;14）</a:t>
-            </a:r>
-          </a:p>
-        </p:txBody>
-      </p:sp>
-      <p:sp>
-        <p:nvSpPr>
-          <p:cNvPr id="16" name="TextBox 15"/>
+              <a:t>best dev BLEU</a:t>
+            </a:r>
+          </a:p>
+        </p:txBody>
+      </p:sp>
+      <p:sp>
+        <p:nvSpPr>
+          <p:cNvPr id="14" name="TextBox 13"/>
           <p:cNvSpPr txBox="1"/>
           <p:nvPr/>
         </p:nvSpPr>
         <p:spPr>
           <a:xfrm>
-            <a:off x="457200" y="3657600"/>
-            <a:ext cx="11247120" cy="2743200"/>
+            <a:off x="3230118" y="2633472"/>
+            <a:ext cx="2727198" cy="320040"/>
           </a:xfrm>
           <a:prstGeom prst="rect">
             <a:avLst/>
@@ -5972,39 +6602,546 @@
           </a:bodyPr>
           <a:lstStyle/>
           <a:p>
+            <a:pPr algn="ctr"/>
+            <a:r>
+              <a:rPr sz="1100" b="0" i="1">
+                <a:solidFill>
+                  <a:srgbClr val="555555"/>
+                </a:solidFill>
+              </a:rPr>
+              <a:t>epoch 13</a:t>
+            </a:r>
+          </a:p>
+        </p:txBody>
+      </p:sp>
+      <p:sp>
+        <p:nvSpPr>
+          <p:cNvPr id="15" name="Rectangle 14"/>
+          <p:cNvSpPr/>
+          <p:nvPr/>
+        </p:nvSpPr>
+        <p:spPr>
+          <a:xfrm>
+            <a:off x="6094476" y="1097280"/>
+            <a:ext cx="2727198" cy="1920240"/>
+          </a:xfrm>
+          <a:prstGeom prst="rect">
+            <a:avLst/>
+          </a:prstGeom>
+          <a:solidFill>
+            <a:srgbClr val="E8F0F8"/>
+          </a:solidFill>
+          <a:ln>
+            <a:noFill/>
+          </a:ln>
+        </p:spPr>
+        <p:style>
+          <a:lnRef idx="1">
+            <a:schemeClr val="accent1"/>
+          </a:lnRef>
+          <a:fillRef idx="3">
+            <a:schemeClr val="accent1"/>
+          </a:fillRef>
+          <a:effectRef idx="2">
+            <a:schemeClr val="accent1"/>
+          </a:effectRef>
+          <a:fontRef idx="minor">
+            <a:schemeClr val="lt1"/>
+          </a:fontRef>
+        </p:style>
+        <p:txBody>
+          <a:bodyPr rtlCol="0" anchor="ctr"/>
+          <a:lstStyle/>
+          <a:p>
+            <a:pPr algn="ctr"/>
+          </a:p>
+        </p:txBody>
+      </p:sp>
+      <p:sp>
+        <p:nvSpPr>
+          <p:cNvPr id="16" name="Rectangle 15"/>
+          <p:cNvSpPr/>
+          <p:nvPr/>
+        </p:nvSpPr>
+        <p:spPr>
+          <a:xfrm>
+            <a:off x="6094476" y="1097280"/>
+            <a:ext cx="2727198" cy="73152"/>
+          </a:xfrm>
+          <a:prstGeom prst="rect">
+            <a:avLst/>
+          </a:prstGeom>
+          <a:solidFill>
+            <a:srgbClr val="1A335C"/>
+          </a:solidFill>
+          <a:ln>
+            <a:noFill/>
+          </a:ln>
+        </p:spPr>
+        <p:style>
+          <a:lnRef idx="1">
+            <a:schemeClr val="accent1"/>
+          </a:lnRef>
+          <a:fillRef idx="3">
+            <a:schemeClr val="accent1"/>
+          </a:fillRef>
+          <a:effectRef idx="2">
+            <a:schemeClr val="accent1"/>
+          </a:effectRef>
+          <a:fontRef idx="minor">
+            <a:schemeClr val="lt1"/>
+          </a:fontRef>
+        </p:style>
+        <p:txBody>
+          <a:bodyPr rtlCol="0" anchor="ctr"/>
+          <a:lstStyle/>
+          <a:p>
+            <a:pPr algn="ctr"/>
+          </a:p>
+        </p:txBody>
+      </p:sp>
+      <p:sp>
+        <p:nvSpPr>
+          <p:cNvPr id="17" name="TextBox 16"/>
+          <p:cNvSpPr txBox="1"/>
+          <p:nvPr/>
+        </p:nvSpPr>
+        <p:spPr>
+          <a:xfrm>
+            <a:off x="6094476" y="1234440"/>
+            <a:ext cx="2727198" cy="914400"/>
+          </a:xfrm>
+          <a:prstGeom prst="rect">
+            <a:avLst/>
+          </a:prstGeom>
+          <a:noFill/>
+        </p:spPr>
+        <p:txBody>
+          <a:bodyPr wrap="square">
+            <a:spAutoFit/>
+          </a:bodyPr>
+          <a:lstStyle/>
+          <a:p>
+            <a:pPr algn="ctr"/>
+            <a:r>
+              <a:rPr sz="3000" b="1" i="0">
+                <a:solidFill>
+                  <a:srgbClr val="1A7A3C"/>
+                </a:solidFill>
+              </a:rPr>
+              <a:t>3.5903</a:t>
+            </a:r>
+          </a:p>
+        </p:txBody>
+      </p:sp>
+      <p:sp>
+        <p:nvSpPr>
+          <p:cNvPr id="18" name="TextBox 17"/>
+          <p:cNvSpPr txBox="1"/>
+          <p:nvPr/>
+        </p:nvSpPr>
+        <p:spPr>
+          <a:xfrm>
+            <a:off x="6094476" y="2194560"/>
+            <a:ext cx="2727198" cy="457200"/>
+          </a:xfrm>
+          <a:prstGeom prst="rect">
+            <a:avLst/>
+          </a:prstGeom>
+          <a:noFill/>
+        </p:spPr>
+        <p:txBody>
+          <a:bodyPr wrap="square">
+            <a:spAutoFit/>
+          </a:bodyPr>
+          <a:lstStyle/>
+          <a:p>
+            <a:pPr algn="ctr"/>
+            <a:r>
+              <a:rPr sz="1300" b="0" i="0">
+                <a:solidFill>
+                  <a:srgbClr val="1C1C1C"/>
+                </a:solidFill>
+              </a:rPr>
+              <a:t>test_loss</a:t>
+            </a:r>
+          </a:p>
+        </p:txBody>
+      </p:sp>
+      <p:sp>
+        <p:nvSpPr>
+          <p:cNvPr id="19" name="Rectangle 18"/>
+          <p:cNvSpPr/>
+          <p:nvPr/>
+        </p:nvSpPr>
+        <p:spPr>
+          <a:xfrm>
+            <a:off x="8958834" y="1097280"/>
+            <a:ext cx="2727198" cy="1920240"/>
+          </a:xfrm>
+          <a:prstGeom prst="rect">
+            <a:avLst/>
+          </a:prstGeom>
+          <a:solidFill>
+            <a:srgbClr val="E8F0F8"/>
+          </a:solidFill>
+          <a:ln>
+            <a:noFill/>
+          </a:ln>
+        </p:spPr>
+        <p:style>
+          <a:lnRef idx="1">
+            <a:schemeClr val="accent1"/>
+          </a:lnRef>
+          <a:fillRef idx="3">
+            <a:schemeClr val="accent1"/>
+          </a:fillRef>
+          <a:effectRef idx="2">
+            <a:schemeClr val="accent1"/>
+          </a:effectRef>
+          <a:fontRef idx="minor">
+            <a:schemeClr val="lt1"/>
+          </a:fontRef>
+        </p:style>
+        <p:txBody>
+          <a:bodyPr rtlCol="0" anchor="ctr"/>
+          <a:lstStyle/>
+          <a:p>
+            <a:pPr algn="ctr"/>
+          </a:p>
+        </p:txBody>
+      </p:sp>
+      <p:sp>
+        <p:nvSpPr>
+          <p:cNvPr id="20" name="Rectangle 19"/>
+          <p:cNvSpPr/>
+          <p:nvPr/>
+        </p:nvSpPr>
+        <p:spPr>
+          <a:xfrm>
+            <a:off x="8958834" y="1097280"/>
+            <a:ext cx="2727198" cy="73152"/>
+          </a:xfrm>
+          <a:prstGeom prst="rect">
+            <a:avLst/>
+          </a:prstGeom>
+          <a:solidFill>
+            <a:srgbClr val="1A335C"/>
+          </a:solidFill>
+          <a:ln>
+            <a:noFill/>
+          </a:ln>
+        </p:spPr>
+        <p:style>
+          <a:lnRef idx="1">
+            <a:schemeClr val="accent1"/>
+          </a:lnRef>
+          <a:fillRef idx="3">
+            <a:schemeClr val="accent1"/>
+          </a:fillRef>
+          <a:effectRef idx="2">
+            <a:schemeClr val="accent1"/>
+          </a:effectRef>
+          <a:fontRef idx="minor">
+            <a:schemeClr val="lt1"/>
+          </a:fontRef>
+        </p:style>
+        <p:txBody>
+          <a:bodyPr rtlCol="0" anchor="ctr"/>
+          <a:lstStyle/>
+          <a:p>
+            <a:pPr algn="ctr"/>
+          </a:p>
+        </p:txBody>
+      </p:sp>
+      <p:sp>
+        <p:nvSpPr>
+          <p:cNvPr id="21" name="TextBox 20"/>
+          <p:cNvSpPr txBox="1"/>
+          <p:nvPr/>
+        </p:nvSpPr>
+        <p:spPr>
+          <a:xfrm>
+            <a:off x="8958834" y="1234440"/>
+            <a:ext cx="2727198" cy="914400"/>
+          </a:xfrm>
+          <a:prstGeom prst="rect">
+            <a:avLst/>
+          </a:prstGeom>
+          <a:noFill/>
+        </p:spPr>
+        <p:txBody>
+          <a:bodyPr wrap="square">
+            <a:spAutoFit/>
+          </a:bodyPr>
+          <a:lstStyle/>
+          <a:p>
+            <a:pPr algn="ctr"/>
+            <a:r>
+              <a:rPr sz="3000" b="1" i="0">
+                <a:solidFill>
+                  <a:srgbClr val="1A7A3C"/>
+                </a:solidFill>
+              </a:rPr>
+              <a:t>+2.54</a:t>
+            </a:r>
+          </a:p>
+        </p:txBody>
+      </p:sp>
+      <p:sp>
+        <p:nvSpPr>
+          <p:cNvPr id="22" name="TextBox 21"/>
+          <p:cNvSpPr txBox="1"/>
+          <p:nvPr/>
+        </p:nvSpPr>
+        <p:spPr>
+          <a:xfrm>
+            <a:off x="8958834" y="2194560"/>
+            <a:ext cx="2727198" cy="457200"/>
+          </a:xfrm>
+          <a:prstGeom prst="rect">
+            <a:avLst/>
+          </a:prstGeom>
+          <a:noFill/>
+        </p:spPr>
+        <p:txBody>
+          <a:bodyPr wrap="square">
+            <a:spAutoFit/>
+          </a:bodyPr>
+          <a:lstStyle/>
+          <a:p>
+            <a:pPr algn="ctr"/>
+            <a:r>
+              <a:rPr sz="1300" b="0" i="0">
+                <a:solidFill>
+                  <a:srgbClr val="1C1C1C"/>
+                </a:solidFill>
+              </a:rPr>
+              <a:t>v1→v2 提升</a:t>
+            </a:r>
+          </a:p>
+        </p:txBody>
+      </p:sp>
+      <p:sp>
+        <p:nvSpPr>
+          <p:cNvPr id="23" name="TextBox 22"/>
+          <p:cNvSpPr txBox="1"/>
+          <p:nvPr/>
+        </p:nvSpPr>
+        <p:spPr>
+          <a:xfrm>
+            <a:off x="411480" y="3154680"/>
+            <a:ext cx="11247120" cy="475488"/>
+          </a:xfrm>
+          <a:prstGeom prst="rect">
+            <a:avLst/>
+          </a:prstGeom>
+          <a:noFill/>
+        </p:spPr>
+        <p:txBody>
+          <a:bodyPr wrap="square">
+            <a:spAutoFit/>
+          </a:bodyPr>
+          <a:lstStyle/>
+          <a:p>
             <a:pPr algn="l"/>
             <a:r>
-              <a:rPr sz="1600" b="0">
-                <a:solidFill>
-                  <a:srgbClr val="1A1A2E"/>
+              <a:rPr sz="1600" b="0" i="0">
+                <a:solidFill>
+                  <a:srgbClr val="1C1C1C"/>
                 </a:solidFill>
               </a:rPr>
-              <a:t>• 翻译样例（beam=4）：
-  SRC: 北约 不少 飞机 不得不 携 返航
-  HYP: many nato planes have suddenly left the us plane for the planes .
-  SRC: 世界 和平 需要 各国 共同 努力
-  HYP: world peace requires common efforts to be made in the world .
-• v1→v2 提升：12.39 → 14.93（+2.54 BLEU）</a:t>
-            </a:r>
-          </a:p>
-        </p:txBody>
-      </p:sp>
-      <p:sp>
-        <p:nvSpPr>
-          <p:cNvPr id="17" name="Rectangle 16"/>
+              <a:t>▸ 翻译样例（beam=4）：</a:t>
+            </a:r>
+          </a:p>
+        </p:txBody>
+      </p:sp>
+      <p:sp>
+        <p:nvSpPr>
+          <p:cNvPr id="24" name="TextBox 23"/>
+          <p:cNvSpPr txBox="1"/>
+          <p:nvPr/>
+        </p:nvSpPr>
+        <p:spPr>
+          <a:xfrm>
+            <a:off x="411480" y="3630168"/>
+            <a:ext cx="11247120" cy="475488"/>
+          </a:xfrm>
+          <a:prstGeom prst="rect">
+            <a:avLst/>
+          </a:prstGeom>
+          <a:noFill/>
+        </p:spPr>
+        <p:txBody>
+          <a:bodyPr wrap="square">
+            <a:spAutoFit/>
+          </a:bodyPr>
+          <a:lstStyle/>
+          <a:p>
+            <a:pPr algn="l"/>
+            <a:r>
+              <a:rPr sz="1500" b="0" i="0">
+                <a:solidFill>
+                  <a:srgbClr val="555555"/>
+                </a:solidFill>
+              </a:rPr>
+              <a:t>    – SRC：北约 不少 飞机 不得不 携 返航</a:t>
+            </a:r>
+          </a:p>
+        </p:txBody>
+      </p:sp>
+      <p:sp>
+        <p:nvSpPr>
+          <p:cNvPr id="25" name="TextBox 24"/>
+          <p:cNvSpPr txBox="1"/>
+          <p:nvPr/>
+        </p:nvSpPr>
+        <p:spPr>
+          <a:xfrm>
+            <a:off x="411480" y="4105656"/>
+            <a:ext cx="11247120" cy="475488"/>
+          </a:xfrm>
+          <a:prstGeom prst="rect">
+            <a:avLst/>
+          </a:prstGeom>
+          <a:noFill/>
+        </p:spPr>
+        <p:txBody>
+          <a:bodyPr wrap="square">
+            <a:spAutoFit/>
+          </a:bodyPr>
+          <a:lstStyle/>
+          <a:p>
+            <a:pPr algn="l"/>
+            <a:r>
+              <a:rPr sz="1500" b="0" i="0">
+                <a:solidFill>
+                  <a:srgbClr val="555555"/>
+                </a:solidFill>
+              </a:rPr>
+              <a:t>    – HYP：many nato planes have suddenly left the us plane for the planes .</a:t>
+            </a:r>
+          </a:p>
+        </p:txBody>
+      </p:sp>
+      <p:sp>
+        <p:nvSpPr>
+          <p:cNvPr id="26" name="TextBox 25"/>
+          <p:cNvSpPr txBox="1"/>
+          <p:nvPr/>
+        </p:nvSpPr>
+        <p:spPr>
+          <a:xfrm>
+            <a:off x="411480" y="4581144"/>
+            <a:ext cx="11247120" cy="475488"/>
+          </a:xfrm>
+          <a:prstGeom prst="rect">
+            <a:avLst/>
+          </a:prstGeom>
+          <a:noFill/>
+        </p:spPr>
+        <p:txBody>
+          <a:bodyPr wrap="square">
+            <a:spAutoFit/>
+          </a:bodyPr>
+          <a:lstStyle/>
+          <a:p>
+            <a:pPr algn="l"/>
+            <a:r>
+              <a:rPr sz="1500" b="0" i="0">
+                <a:solidFill>
+                  <a:srgbClr val="555555"/>
+                </a:solidFill>
+              </a:rPr>
+              <a:t>    – SRC：世界 和平 需要 各国 共同 努力</a:t>
+            </a:r>
+          </a:p>
+        </p:txBody>
+      </p:sp>
+      <p:sp>
+        <p:nvSpPr>
+          <p:cNvPr id="27" name="TextBox 26"/>
+          <p:cNvSpPr txBox="1"/>
+          <p:nvPr/>
+        </p:nvSpPr>
+        <p:spPr>
+          <a:xfrm>
+            <a:off x="411480" y="5056631"/>
+            <a:ext cx="11247120" cy="475488"/>
+          </a:xfrm>
+          <a:prstGeom prst="rect">
+            <a:avLst/>
+          </a:prstGeom>
+          <a:noFill/>
+        </p:spPr>
+        <p:txBody>
+          <a:bodyPr wrap="square">
+            <a:spAutoFit/>
+          </a:bodyPr>
+          <a:lstStyle/>
+          <a:p>
+            <a:pPr algn="l"/>
+            <a:r>
+              <a:rPr sz="1500" b="0" i="0">
+                <a:solidFill>
+                  <a:srgbClr val="555555"/>
+                </a:solidFill>
+              </a:rPr>
+              <a:t>    – HYP：world peace requires common efforts to be made in the world .</a:t>
+            </a:r>
+          </a:p>
+        </p:txBody>
+      </p:sp>
+      <p:sp>
+        <p:nvSpPr>
+          <p:cNvPr id="28" name="TextBox 27"/>
+          <p:cNvSpPr txBox="1"/>
+          <p:nvPr/>
+        </p:nvSpPr>
+        <p:spPr>
+          <a:xfrm>
+            <a:off x="411480" y="5532119"/>
+            <a:ext cx="11247120" cy="475488"/>
+          </a:xfrm>
+          <a:prstGeom prst="rect">
+            <a:avLst/>
+          </a:prstGeom>
+          <a:noFill/>
+        </p:spPr>
+        <p:txBody>
+          <a:bodyPr wrap="square">
+            <a:spAutoFit/>
+          </a:bodyPr>
+          <a:lstStyle/>
+          <a:p>
+            <a:pPr algn="l"/>
+            <a:r>
+              <a:rPr sz="1600" b="0" i="0">
+                <a:solidFill>
+                  <a:srgbClr val="1C1C1C"/>
+                </a:solidFill>
+              </a:rPr>
+              <a:t>▸ Beam Search 相比贪心解码提升约 +2 BLEU，长度惩罚避免了过短输出</a:t>
+            </a:r>
+          </a:p>
+        </p:txBody>
+      </p:sp>
+      <p:sp>
+        <p:nvSpPr>
+          <p:cNvPr id="29" name="Rectangle 28"/>
           <p:cNvSpPr/>
           <p:nvPr/>
         </p:nvSpPr>
         <p:spPr>
           <a:xfrm>
-            <a:off x="0" y="6675120"/>
-            <a:ext cx="12188952" cy="73152"/>
+            <a:off x="0" y="6748272"/>
+            <a:ext cx="12188952" cy="109728"/>
           </a:xfrm>
           <a:prstGeom prst="rect">
             <a:avLst/>
           </a:prstGeom>
           <a:solidFill>
-            <a:srgbClr val="1F497D"/>
+            <a:srgbClr val="1A335C"/>
           </a:solidFill>
           <a:ln>
             <a:noFill/>
@@ -6067,13 +7204,13 @@
         <p:spPr>
           <a:xfrm>
             <a:off x="0" y="0"/>
-            <a:ext cx="12188952" cy="1005840"/>
+            <a:ext cx="12188952" cy="960120"/>
           </a:xfrm>
           <a:prstGeom prst="rect">
             <a:avLst/>
           </a:prstGeom>
           <a:solidFill>
-            <a:srgbClr val="1F497D"/>
+            <a:srgbClr val="1A335C"/>
           </a:solidFill>
           <a:ln>
             <a:noFill/>
@@ -6103,14 +7240,57 @@
       </p:sp>
       <p:sp>
         <p:nvSpPr>
-          <p:cNvPr id="3" name="TextBox 2"/>
+          <p:cNvPr id="3" name="Rectangle 2"/>
+          <p:cNvSpPr/>
+          <p:nvPr/>
+        </p:nvSpPr>
+        <p:spPr>
+          <a:xfrm>
+            <a:off x="0" y="0"/>
+            <a:ext cx="164592" cy="6858000"/>
+          </a:xfrm>
+          <a:prstGeom prst="rect">
+            <a:avLst/>
+          </a:prstGeom>
+          <a:solidFill>
+            <a:srgbClr val="1A335C"/>
+          </a:solidFill>
+          <a:ln>
+            <a:noFill/>
+          </a:ln>
+        </p:spPr>
+        <p:style>
+          <a:lnRef idx="1">
+            <a:schemeClr val="accent1"/>
+          </a:lnRef>
+          <a:fillRef idx="3">
+            <a:schemeClr val="accent1"/>
+          </a:fillRef>
+          <a:effectRef idx="2">
+            <a:schemeClr val="accent1"/>
+          </a:effectRef>
+          <a:fontRef idx="minor">
+            <a:schemeClr val="lt1"/>
+          </a:fontRef>
+        </p:style>
+        <p:txBody>
+          <a:bodyPr rtlCol="0" anchor="ctr"/>
+          <a:lstStyle/>
+          <a:p>
+            <a:pPr algn="ctr"/>
+          </a:p>
+        </p:txBody>
+      </p:sp>
+      <p:sp>
+        <p:nvSpPr>
+          <p:cNvPr id="4" name="TextBox 3"/>
           <p:cNvSpPr txBox="1"/>
           <p:nvPr/>
         </p:nvSpPr>
         <p:spPr>
           <a:xfrm>
-            <a:off x="274320" y="91440"/>
-            <a:ext cx="11612880" cy="822960"/>
+            <a:off x="347472" y="91440"/>
+            <a:ext cx="11521440" cy="777240"/>
           </a:xfrm>
           <a:prstGeom prst="rect">
             <a:avLst/>
@@ -6125,26 +7305,26 @@
           <a:p>
             <a:pPr algn="l"/>
             <a:r>
-              <a:rPr sz="2400" b="1">
+              <a:rPr sz="2300" b="1" i="0">
                 <a:solidFill>
                   <a:srgbClr val="FFFFFF"/>
                 </a:solidFill>
               </a:rPr>
-              <a:t>总结</a:t>
-            </a:r>
-          </a:p>
-        </p:txBody>
-      </p:sp>
-      <p:sp>
-        <p:nvSpPr>
-          <p:cNvPr id="4" name="TextBox 3"/>
+              <a:t>总结与展望</a:t>
+            </a:r>
+          </a:p>
+        </p:txBody>
+      </p:sp>
+      <p:sp>
+        <p:nvSpPr>
+          <p:cNvPr id="5" name="TextBox 4"/>
           <p:cNvSpPr txBox="1"/>
           <p:nvPr/>
         </p:nvSpPr>
         <p:spPr>
           <a:xfrm>
-            <a:off x="457200" y="1188720"/>
-            <a:ext cx="11247120" cy="502920"/>
+            <a:off x="411480" y="1115568"/>
+            <a:ext cx="11247120" cy="475488"/>
           </a:xfrm>
           <a:prstGeom prst="rect">
             <a:avLst/>
@@ -6159,26 +7339,26 @@
           <a:p>
             <a:pPr algn="l"/>
             <a:r>
-              <a:rPr sz="1800" b="0">
-                <a:solidFill>
-                  <a:srgbClr val="1A1A2E"/>
+              <a:rPr sz="1700" b="0" i="0">
+                <a:solidFill>
+                  <a:srgbClr val="1C1C1C"/>
                 </a:solidFill>
               </a:rPr>
-              <a:t>  • ✅ BLEU-4=14.93，超过目标 &gt;14</a:t>
-            </a:r>
-          </a:p>
-        </p:txBody>
-      </p:sp>
-      <p:sp>
-        <p:nvSpPr>
-          <p:cNvPr id="5" name="TextBox 4"/>
+              <a:t>▸ 实现了完整的 Transformer NMT：正弦位置编码、causal mask、beam search</a:t>
+            </a:r>
+          </a:p>
+        </p:txBody>
+      </p:sp>
+      <p:sp>
+        <p:nvSpPr>
+          <p:cNvPr id="6" name="TextBox 5"/>
           <p:cNvSpPr txBox="1"/>
           <p:nvPr/>
         </p:nvSpPr>
         <p:spPr>
           <a:xfrm>
-            <a:off x="457200" y="1664208"/>
-            <a:ext cx="11247120" cy="502920"/>
+            <a:off x="411480" y="1591056"/>
+            <a:ext cx="11247120" cy="475488"/>
           </a:xfrm>
           <a:prstGeom prst="rect">
             <a:avLst/>
@@ -6193,26 +7373,26 @@
           <a:p>
             <a:pPr algn="l"/>
             <a:r>
-              <a:rPr sz="1800" b="0">
-                <a:solidFill>
-                  <a:srgbClr val="1A1A2E"/>
+              <a:rPr sz="1700" b="0" i="0">
+                <a:solidFill>
+                  <a:srgbClr val="1C1C1C"/>
                 </a:solidFill>
               </a:rPr>
-              <a:t>  • Transformer Encoder-Decoder 实现完整，含正弦位置编码和 causal mask</a:t>
-            </a:r>
-          </a:p>
-        </p:txBody>
-      </p:sp>
-      <p:sp>
-        <p:nvSpPr>
-          <p:cNvPr id="6" name="TextBox 5"/>
+              <a:t>▸ 通过「延长训练 + Beam Search + 梯度裁剪」三项优化，从 12.39 提升至 14.93</a:t>
+            </a:r>
+          </a:p>
+        </p:txBody>
+      </p:sp>
+      <p:sp>
+        <p:nvSpPr>
+          <p:cNvPr id="7" name="TextBox 6"/>
           <p:cNvSpPr txBox="1"/>
           <p:nvPr/>
         </p:nvSpPr>
         <p:spPr>
           <a:xfrm>
-            <a:off x="457200" y="2139696"/>
-            <a:ext cx="11247120" cy="502920"/>
+            <a:off x="411480" y="2066543"/>
+            <a:ext cx="11247120" cy="475488"/>
           </a:xfrm>
           <a:prstGeom prst="rect">
             <a:avLst/>
@@ -6227,26 +7407,26 @@
           <a:p>
             <a:pPr algn="l"/>
             <a:r>
-              <a:rPr sz="1800" b="0">
-                <a:solidFill>
-                  <a:srgbClr val="1A1A2E"/>
+              <a:rPr sz="1700" b="0" i="0">
+                <a:solidFill>
+                  <a:srgbClr val="1C1C1C"/>
                 </a:solidFill>
               </a:rPr>
-              <a:t>  • Beam Search 相比贪心解码提升约 +2 BLEU</a:t>
-            </a:r>
-          </a:p>
-        </p:txBody>
-      </p:sp>
-      <p:sp>
-        <p:nvSpPr>
-          <p:cNvPr id="7" name="TextBox 6"/>
+              <a:t>▸ Label Smoothing 减少模型对训练集的过度自信，提升泛化能力</a:t>
+            </a:r>
+          </a:p>
+        </p:txBody>
+      </p:sp>
+      <p:sp>
+        <p:nvSpPr>
+          <p:cNvPr id="8" name="TextBox 7"/>
           <p:cNvSpPr txBox="1"/>
           <p:nvPr/>
         </p:nvSpPr>
         <p:spPr>
           <a:xfrm>
-            <a:off x="457200" y="2615184"/>
-            <a:ext cx="11247120" cy="502920"/>
+            <a:off x="411480" y="2542032"/>
+            <a:ext cx="11247120" cy="475488"/>
           </a:xfrm>
           <a:prstGeom prst="rect">
             <a:avLst/>
@@ -6261,26 +7441,26 @@
           <a:p>
             <a:pPr algn="l"/>
             <a:r>
-              <a:rPr sz="1800" b="0">
-                <a:solidFill>
-                  <a:srgbClr val="1A1A2E"/>
+              <a:rPr sz="1700" b="0" i="0">
+                <a:solidFill>
+                  <a:srgbClr val="1C1C1C"/>
                 </a:solidFill>
               </a:rPr>
-              <a:t>  • 梯度裁剪（clip=1.0）稳定了后期训练，防止梯度爆炸</a:t>
-            </a:r>
-          </a:p>
-        </p:txBody>
-      </p:sp>
-      <p:sp>
-        <p:nvSpPr>
-          <p:cNvPr id="8" name="TextBox 7"/>
+              <a:t>▸ 当前模型层数（3层）较原论文（6层）偏浅，在 GPU 资源受限时是合理取舍</a:t>
+            </a:r>
+          </a:p>
+        </p:txBody>
+      </p:sp>
+      <p:sp>
+        <p:nvSpPr>
+          <p:cNvPr id="9" name="TextBox 8"/>
           <p:cNvSpPr txBox="1"/>
           <p:nvPr/>
         </p:nvSpPr>
         <p:spPr>
           <a:xfrm>
-            <a:off x="457200" y="3090672"/>
-            <a:ext cx="11247120" cy="502920"/>
+            <a:off x="411480" y="3017520"/>
+            <a:ext cx="11247120" cy="475488"/>
           </a:xfrm>
           <a:prstGeom prst="rect">
             <a:avLst/>
@@ -6295,32 +7475,100 @@
           <a:p>
             <a:pPr algn="l"/>
             <a:r>
-              <a:rPr sz="1800" b="0">
-                <a:solidFill>
-                  <a:srgbClr val="1A1A2E"/>
+              <a:rPr sz="1600" b="0" i="0">
+                <a:solidFill>
+                  <a:srgbClr val="555555"/>
                 </a:solidFill>
               </a:rPr>
-              <a:t>  • 改进方向：更大 d_model/层数 / Subword（BPE）分词 / 增大数据规模</a:t>
-            </a:r>
-          </a:p>
-        </p:txBody>
-      </p:sp>
-      <p:sp>
-        <p:nvSpPr>
-          <p:cNvPr id="9" name="Rectangle 8"/>
+              <a:t>    – 改进方向①：增大 d_model（256→512）和层数，提升模型容量</a:t>
+            </a:r>
+          </a:p>
+        </p:txBody>
+      </p:sp>
+      <p:sp>
+        <p:nvSpPr>
+          <p:cNvPr id="10" name="TextBox 9"/>
+          <p:cNvSpPr txBox="1"/>
+          <p:nvPr/>
+        </p:nvSpPr>
+        <p:spPr>
+          <a:xfrm>
+            <a:off x="411480" y="3493008"/>
+            <a:ext cx="11247120" cy="475488"/>
+          </a:xfrm>
+          <a:prstGeom prst="rect">
+            <a:avLst/>
+          </a:prstGeom>
+          <a:noFill/>
+        </p:spPr>
+        <p:txBody>
+          <a:bodyPr wrap="square">
+            <a:spAutoFit/>
+          </a:bodyPr>
+          <a:lstStyle/>
+          <a:p>
+            <a:pPr algn="l"/>
+            <a:r>
+              <a:rPr sz="1600" b="0" i="0">
+                <a:solidFill>
+                  <a:srgbClr val="555555"/>
+                </a:solidFill>
+              </a:rPr>
+              <a:t>    – 改进方向②：使用 BPE 子词分词替代词粒度，减少 OOV 问题</a:t>
+            </a:r>
+          </a:p>
+        </p:txBody>
+      </p:sp>
+      <p:sp>
+        <p:nvSpPr>
+          <p:cNvPr id="11" name="TextBox 10"/>
+          <p:cNvSpPr txBox="1"/>
+          <p:nvPr/>
+        </p:nvSpPr>
+        <p:spPr>
+          <a:xfrm>
+            <a:off x="411480" y="3968496"/>
+            <a:ext cx="11247120" cy="475488"/>
+          </a:xfrm>
+          <a:prstGeom prst="rect">
+            <a:avLst/>
+          </a:prstGeom>
+          <a:noFill/>
+        </p:spPr>
+        <p:txBody>
+          <a:bodyPr wrap="square">
+            <a:spAutoFit/>
+          </a:bodyPr>
+          <a:lstStyle/>
+          <a:p>
+            <a:pPr algn="l"/>
+            <a:r>
+              <a:rPr sz="1600" b="0" i="0">
+                <a:solidFill>
+                  <a:srgbClr val="555555"/>
+                </a:solidFill>
+              </a:rPr>
+              <a:t>    – 改进方向③：引入 Warmup 学习率调度，进一步稳定训练</a:t>
+            </a:r>
+          </a:p>
+        </p:txBody>
+      </p:sp>
+      <p:sp>
+        <p:nvSpPr>
+          <p:cNvPr id="12" name="Rectangle 11"/>
           <p:cNvSpPr/>
           <p:nvPr/>
         </p:nvSpPr>
         <p:spPr>
           <a:xfrm>
-            <a:off x="0" y="6675120"/>
-            <a:ext cx="12188952" cy="73152"/>
+            <a:off x="0" y="6748272"/>
+            <a:ext cx="12188952" cy="109728"/>
           </a:xfrm>
           <a:prstGeom prst="rect">
             <a:avLst/>
           </a:prstGeom>
           <a:solidFill>
-            <a:srgbClr val="1F497D"/>
+            <a:srgbClr val="1A335C"/>
           </a:solidFill>
           <a:ln>
             <a:noFill/>

--- a/reports/exp4_nmt_transformer.pptx
+++ b/reports/exp4_nmt_transformer.pptx
@@ -14,6 +14,7 @@
     <p:sldId id="262" r:id="rId13"/>
     <p:sldId id="263" r:id="rId14"/>
     <p:sldId id="264" r:id="rId15"/>
+    <p:sldId id="265" r:id="rId16"/>
   </p:sldIdLst>
   <p:sldSz cx="12188952" cy="6858000" type="screen4x3"/>
   <p:notesSz cx="6858000" cy="9144000"/>
@@ -3149,7 +3150,7 @@
       </p:sp>
       <p:pic>
         <p:nvPicPr>
-          <p:cNvPr id="3" name="Picture 2" descr="ucas_seal.png"/>
+          <p:cNvPr id="3" name="Picture 2" descr="国科大标准Logo横式一（白色）.png"/>
           <p:cNvPicPr>
             <a:picLocks noChangeAspect="1"/>
           </p:cNvPicPr>
@@ -3163,8 +3164,8 @@
         </p:blipFill>
         <p:spPr>
           <a:xfrm>
-            <a:off x="10771632" y="228600"/>
-            <a:ext cx="1188720" cy="1069848"/>
+            <a:off x="8714232" y="256032"/>
+            <a:ext cx="3200400" cy="777240"/>
           </a:xfrm>
           <a:prstGeom prst="rect">
             <a:avLst/>
@@ -3313,6 +3314,433 @@
               </a:rPr>
               <a:t>WevYang　|　中国科学院大学  深度学习</a:t>
             </a:r>
+          </a:p>
+        </p:txBody>
+      </p:sp>
+    </p:spTree>
+  </p:cSld>
+  <p:clrMapOvr>
+    <a:masterClrMapping/>
+  </p:clrMapOvr>
+</p:sld>
+</file>
+
+<file path=ppt/slides/slide10.xml><?xml version="1.0" encoding="utf-8"?>
+<p:sld xmlns:a="http://schemas.openxmlformats.org/drawingml/2006/main" xmlns:p="http://schemas.openxmlformats.org/presentationml/2006/main" xmlns:r="http://schemas.openxmlformats.org/officeDocument/2006/relationships">
+  <p:cSld>
+    <p:bg>
+      <p:bgPr>
+        <a:solidFill>
+          <a:srgbClr val="FFFFFF"/>
+        </a:solidFill>
+        <a:effectLst/>
+      </p:bgPr>
+    </p:bg>
+    <p:spTree>
+      <p:nvGrpSpPr>
+        <p:cNvPr id="1" name=""/>
+        <p:cNvGrpSpPr/>
+        <p:nvPr/>
+      </p:nvGrpSpPr>
+      <p:grpSpPr/>
+      <p:sp>
+        <p:nvSpPr>
+          <p:cNvPr id="2" name="Rectangle 1"/>
+          <p:cNvSpPr/>
+          <p:nvPr/>
+        </p:nvSpPr>
+        <p:spPr>
+          <a:xfrm>
+            <a:off x="0" y="0"/>
+            <a:ext cx="12188952" cy="960120"/>
+          </a:xfrm>
+          <a:prstGeom prst="rect">
+            <a:avLst/>
+          </a:prstGeom>
+          <a:solidFill>
+            <a:srgbClr val="1A335C"/>
+          </a:solidFill>
+          <a:ln>
+            <a:noFill/>
+          </a:ln>
+        </p:spPr>
+        <p:style>
+          <a:lnRef idx="1">
+            <a:schemeClr val="accent1"/>
+          </a:lnRef>
+          <a:fillRef idx="3">
+            <a:schemeClr val="accent1"/>
+          </a:fillRef>
+          <a:effectRef idx="2">
+            <a:schemeClr val="accent1"/>
+          </a:effectRef>
+          <a:fontRef idx="minor">
+            <a:schemeClr val="lt1"/>
+          </a:fontRef>
+        </p:style>
+        <p:txBody>
+          <a:bodyPr rtlCol="0" anchor="ctr"/>
+          <a:lstStyle/>
+          <a:p>
+            <a:pPr algn="ctr"/>
+          </a:p>
+        </p:txBody>
+      </p:sp>
+      <p:sp>
+        <p:nvSpPr>
+          <p:cNvPr id="3" name="Rectangle 2"/>
+          <p:cNvSpPr/>
+          <p:nvPr/>
+        </p:nvSpPr>
+        <p:spPr>
+          <a:xfrm>
+            <a:off x="0" y="0"/>
+            <a:ext cx="164592" cy="6858000"/>
+          </a:xfrm>
+          <a:prstGeom prst="rect">
+            <a:avLst/>
+          </a:prstGeom>
+          <a:solidFill>
+            <a:srgbClr val="1A335C"/>
+          </a:solidFill>
+          <a:ln>
+            <a:noFill/>
+          </a:ln>
+        </p:spPr>
+        <p:style>
+          <a:lnRef idx="1">
+            <a:schemeClr val="accent1"/>
+          </a:lnRef>
+          <a:fillRef idx="3">
+            <a:schemeClr val="accent1"/>
+          </a:fillRef>
+          <a:effectRef idx="2">
+            <a:schemeClr val="accent1"/>
+          </a:effectRef>
+          <a:fontRef idx="minor">
+            <a:schemeClr val="lt1"/>
+          </a:fontRef>
+        </p:style>
+        <p:txBody>
+          <a:bodyPr rtlCol="0" anchor="ctr"/>
+          <a:lstStyle/>
+          <a:p>
+            <a:pPr algn="ctr"/>
+          </a:p>
+        </p:txBody>
+      </p:sp>
+      <p:sp>
+        <p:nvSpPr>
+          <p:cNvPr id="4" name="TextBox 3"/>
+          <p:cNvSpPr txBox="1"/>
+          <p:nvPr/>
+        </p:nvSpPr>
+        <p:spPr>
+          <a:xfrm>
+            <a:off x="347472" y="91440"/>
+            <a:ext cx="11521440" cy="777240"/>
+          </a:xfrm>
+          <a:prstGeom prst="rect">
+            <a:avLst/>
+          </a:prstGeom>
+          <a:noFill/>
+        </p:spPr>
+        <p:txBody>
+          <a:bodyPr wrap="square">
+            <a:spAutoFit/>
+          </a:bodyPr>
+          <a:lstStyle/>
+          <a:p>
+            <a:pPr algn="l"/>
+            <a:r>
+              <a:rPr sz="2300" b="1" i="0">
+                <a:solidFill>
+                  <a:srgbClr val="FFFFFF"/>
+                </a:solidFill>
+              </a:rPr>
+              <a:t>总结与展望</a:t>
+            </a:r>
+          </a:p>
+        </p:txBody>
+      </p:sp>
+      <p:sp>
+        <p:nvSpPr>
+          <p:cNvPr id="5" name="TextBox 4"/>
+          <p:cNvSpPr txBox="1"/>
+          <p:nvPr/>
+        </p:nvSpPr>
+        <p:spPr>
+          <a:xfrm>
+            <a:off x="411480" y="1115568"/>
+            <a:ext cx="11247120" cy="475488"/>
+          </a:xfrm>
+          <a:prstGeom prst="rect">
+            <a:avLst/>
+          </a:prstGeom>
+          <a:noFill/>
+        </p:spPr>
+        <p:txBody>
+          <a:bodyPr wrap="square">
+            <a:spAutoFit/>
+          </a:bodyPr>
+          <a:lstStyle/>
+          <a:p>
+            <a:pPr algn="l"/>
+            <a:r>
+              <a:rPr sz="1700" b="0" i="0">
+                <a:solidFill>
+                  <a:srgbClr val="1C1C1C"/>
+                </a:solidFill>
+              </a:rPr>
+              <a:t>▸ 实现了完整 Transformer NMT：正弦位置编码、causal mask、Beam Search</a:t>
+            </a:r>
+          </a:p>
+        </p:txBody>
+      </p:sp>
+      <p:sp>
+        <p:nvSpPr>
+          <p:cNvPr id="6" name="TextBox 5"/>
+          <p:cNvSpPr txBox="1"/>
+          <p:nvPr/>
+        </p:nvSpPr>
+        <p:spPr>
+          <a:xfrm>
+            <a:off x="411480" y="1591056"/>
+            <a:ext cx="11247120" cy="475488"/>
+          </a:xfrm>
+          <a:prstGeom prst="rect">
+            <a:avLst/>
+          </a:prstGeom>
+          <a:noFill/>
+        </p:spPr>
+        <p:txBody>
+          <a:bodyPr wrap="square">
+            <a:spAutoFit/>
+          </a:bodyPr>
+          <a:lstStyle/>
+          <a:p>
+            <a:pPr algn="l"/>
+            <a:r>
+              <a:rPr sz="1700" b="0" i="0">
+                <a:solidFill>
+                  <a:srgbClr val="1C1C1C"/>
+                </a:solidFill>
+              </a:rPr>
+              <a:t>▸ 通过「延长训练 + Beam Search + 梯度裁剪 + Label Smoothing」将 BLEU 从 12.39 提升至 14.93</a:t>
+            </a:r>
+          </a:p>
+        </p:txBody>
+      </p:sp>
+      <p:sp>
+        <p:nvSpPr>
+          <p:cNvPr id="7" name="TextBox 6"/>
+          <p:cNvSpPr txBox="1"/>
+          <p:nvPr/>
+        </p:nvSpPr>
+        <p:spPr>
+          <a:xfrm>
+            <a:off x="411480" y="2066543"/>
+            <a:ext cx="11247120" cy="475488"/>
+          </a:xfrm>
+          <a:prstGeom prst="rect">
+            <a:avLst/>
+          </a:prstGeom>
+          <a:noFill/>
+        </p:spPr>
+        <p:txBody>
+          <a:bodyPr wrap="square">
+            <a:spAutoFit/>
+          </a:bodyPr>
+          <a:lstStyle/>
+          <a:p>
+            <a:pPr algn="l"/>
+            <a:r>
+              <a:rPr sz="1700" b="0" i="0">
+                <a:solidFill>
+                  <a:srgbClr val="1C1C1C"/>
+                </a:solidFill>
+              </a:rPr>
+              <a:t>▸ Label Smoothing 减少模型对训练集的过度自信，提升泛化，尤其对低频词有效</a:t>
+            </a:r>
+          </a:p>
+        </p:txBody>
+      </p:sp>
+      <p:sp>
+        <p:nvSpPr>
+          <p:cNvPr id="8" name="TextBox 7"/>
+          <p:cNvSpPr txBox="1"/>
+          <p:nvPr/>
+        </p:nvSpPr>
+        <p:spPr>
+          <a:xfrm>
+            <a:off x="411480" y="2542032"/>
+            <a:ext cx="11247120" cy="475488"/>
+          </a:xfrm>
+          <a:prstGeom prst="rect">
+            <a:avLst/>
+          </a:prstGeom>
+          <a:noFill/>
+        </p:spPr>
+        <p:txBody>
+          <a:bodyPr wrap="square">
+            <a:spAutoFit/>
+          </a:bodyPr>
+          <a:lstStyle/>
+          <a:p>
+            <a:pPr algn="l"/>
+            <a:r>
+              <a:rPr sz="1700" b="0" i="0">
+                <a:solidFill>
+                  <a:srgbClr val="1C1C1C"/>
+                </a:solidFill>
+              </a:rPr>
+              <a:t>▸ 当前 3 层 Transformer 在 GPU 资源受限时是合理取舍</a:t>
+            </a:r>
+          </a:p>
+        </p:txBody>
+      </p:sp>
+      <p:sp>
+        <p:nvSpPr>
+          <p:cNvPr id="9" name="TextBox 8"/>
+          <p:cNvSpPr txBox="1"/>
+          <p:nvPr/>
+        </p:nvSpPr>
+        <p:spPr>
+          <a:xfrm>
+            <a:off x="411480" y="3017520"/>
+            <a:ext cx="11247120" cy="475488"/>
+          </a:xfrm>
+          <a:prstGeom prst="rect">
+            <a:avLst/>
+          </a:prstGeom>
+          <a:noFill/>
+        </p:spPr>
+        <p:txBody>
+          <a:bodyPr wrap="square">
+            <a:spAutoFit/>
+          </a:bodyPr>
+          <a:lstStyle/>
+          <a:p>
+            <a:pPr algn="l"/>
+            <a:r>
+              <a:rPr sz="1600" b="0" i="0">
+                <a:solidFill>
+                  <a:srgbClr val="555555"/>
+                </a:solidFill>
+              </a:rPr>
+              <a:t>    – 改进方向①：增大 d_model（256→512）和层数，提升翻译质量</a:t>
+            </a:r>
+          </a:p>
+        </p:txBody>
+      </p:sp>
+      <p:sp>
+        <p:nvSpPr>
+          <p:cNvPr id="10" name="TextBox 9"/>
+          <p:cNvSpPr txBox="1"/>
+          <p:nvPr/>
+        </p:nvSpPr>
+        <p:spPr>
+          <a:xfrm>
+            <a:off x="411480" y="3493008"/>
+            <a:ext cx="11247120" cy="475488"/>
+          </a:xfrm>
+          <a:prstGeom prst="rect">
+            <a:avLst/>
+          </a:prstGeom>
+          <a:noFill/>
+        </p:spPr>
+        <p:txBody>
+          <a:bodyPr wrap="square">
+            <a:spAutoFit/>
+          </a:bodyPr>
+          <a:lstStyle/>
+          <a:p>
+            <a:pPr algn="l"/>
+            <a:r>
+              <a:rPr sz="1600" b="0" i="0">
+                <a:solidFill>
+                  <a:srgbClr val="555555"/>
+                </a:solidFill>
+              </a:rPr>
+              <a:t>    – 改进方向②：使用 BPE 子词分词替代词粒度，减少 OOV 问题</a:t>
+            </a:r>
+          </a:p>
+        </p:txBody>
+      </p:sp>
+      <p:sp>
+        <p:nvSpPr>
+          <p:cNvPr id="11" name="TextBox 10"/>
+          <p:cNvSpPr txBox="1"/>
+          <p:nvPr/>
+        </p:nvSpPr>
+        <p:spPr>
+          <a:xfrm>
+            <a:off x="411480" y="3968496"/>
+            <a:ext cx="11247120" cy="475488"/>
+          </a:xfrm>
+          <a:prstGeom prst="rect">
+            <a:avLst/>
+          </a:prstGeom>
+          <a:noFill/>
+        </p:spPr>
+        <p:txBody>
+          <a:bodyPr wrap="square">
+            <a:spAutoFit/>
+          </a:bodyPr>
+          <a:lstStyle/>
+          <a:p>
+            <a:pPr algn="l"/>
+            <a:r>
+              <a:rPr sz="1600" b="0" i="0">
+                <a:solidFill>
+                  <a:srgbClr val="555555"/>
+                </a:solidFill>
+              </a:rPr>
+              <a:t>    – 改进方向③：引入 Warmup 学习率调度（如 Noam Scheduler），进一步稳定训练</a:t>
+            </a:r>
+          </a:p>
+        </p:txBody>
+      </p:sp>
+      <p:sp>
+        <p:nvSpPr>
+          <p:cNvPr id="12" name="Rectangle 11"/>
+          <p:cNvSpPr/>
+          <p:nvPr/>
+        </p:nvSpPr>
+        <p:spPr>
+          <a:xfrm>
+            <a:off x="0" y="6748272"/>
+            <a:ext cx="12188952" cy="109728"/>
+          </a:xfrm>
+          <a:prstGeom prst="rect">
+            <a:avLst/>
+          </a:prstGeom>
+          <a:solidFill>
+            <a:srgbClr val="1A335C"/>
+          </a:solidFill>
+          <a:ln>
+            <a:noFill/>
+          </a:ln>
+        </p:spPr>
+        <p:style>
+          <a:lnRef idx="1">
+            <a:schemeClr val="accent1"/>
+          </a:lnRef>
+          <a:fillRef idx="3">
+            <a:schemeClr val="accent1"/>
+          </a:fillRef>
+          <a:effectRef idx="2">
+            <a:schemeClr val="accent1"/>
+          </a:effectRef>
+          <a:fontRef idx="minor">
+            <a:schemeClr val="lt1"/>
+          </a:fontRef>
+        </p:style>
+        <p:txBody>
+          <a:bodyPr rtlCol="0" anchor="ctr"/>
+          <a:lstStyle/>
+          <a:p>
+            <a:pPr algn="ctr"/>
           </a:p>
         </p:txBody>
       </p:sp>
@@ -3695,7 +4123,7 @@
                   <a:srgbClr val="555555"/>
                 </a:solidFill>
               </a:rPr>
-              <a:t>    – 优化路径：v1（贪心，10ep）= 12.39 → v2（beam=4，20ep）= 14.93</a:t>
+              <a:t>    – 优化路径：v1（贪心，10ep，12.39）→ v2（beam=4，20ep，14.93）</a:t>
             </a:r>
           </a:p>
         </p:txBody>
@@ -3952,7 +4380,7 @@
                   <a:srgbClr val="1C1C1C"/>
                 </a:solidFill>
               </a:rPr>
-              <a:t>▸ 规模：训练集 ~100K 对，验证集 ~1K，测试集 ~1K</a:t>
+              <a:t>▸ 规模：训练集 ~100K 句对，验证集 ~1K，测试集 ~1K</a:t>
             </a:r>
           </a:p>
         </p:txBody>
@@ -4054,7 +4482,7 @@
                   <a:srgbClr val="555555"/>
                 </a:solidFill>
               </a:rPr>
-              <a:t>    – 中文词表约 30K，英文词表约 25K（低频词统一替换为 &lt;unk&gt;）</a:t>
+              <a:t>    – 中文词表约 30K，英文词表约 25K，低频词统一替换为 &lt;unk&gt;</a:t>
             </a:r>
           </a:p>
         </p:txBody>
@@ -4122,7 +4550,7 @@
                   <a:srgbClr val="555555"/>
                 </a:solidFill>
               </a:rPr>
-              <a:t>    – 中：北约 不少 飞机 不得不 携 返航</a:t>
+              <a:t>    – 中：北约 不少 飞机 不得不 携弹 返航</a:t>
             </a:r>
           </a:p>
         </p:txBody>
@@ -4447,7 +4875,7 @@
                   <a:srgbClr val="555555"/>
                 </a:solidFill>
               </a:rPr>
-              <a:t>    – 中文 Embedding(d=256) × √256 + 正弦位置编码</a:t>
+              <a:t>    – 中文 Embedding(d=256) × √256 + 正弦位置编码（PE）</a:t>
             </a:r>
           </a:p>
         </p:txBody>
@@ -4549,7 +4977,7 @@
                   <a:srgbClr val="555555"/>
                 </a:solidFill>
               </a:rPr>
-              <a:t>    – 英文 Embedding × √256 + 正弦位置编码 + causal mask（防偷看未来）</a:t>
+              <a:t>    – 英文 Embedding × √256 + PE + causal mask（防止偷看未来词）</a:t>
             </a:r>
           </a:p>
         </p:txBody>
@@ -4617,7 +5045,7 @@
                   <a:srgbClr val="1C1C1C"/>
                 </a:solidFill>
               </a:rPr>
-              <a:t>▸ 生成头：Linear(256 → tgt_vocab_size)，预测下一个英文词</a:t>
+              <a:t>▸ 输出头：Linear(256 → tgt_vocab_size)，预测下一个英文词</a:t>
             </a:r>
           </a:p>
         </p:txBody>
@@ -5019,7 +5447,7 @@
                   <a:srgbClr val="1C1C1C"/>
                 </a:solidFill>
               </a:rPr>
-              <a:t>▸ 验证集：100 样本 + 贪心</a:t>
+              <a:t>▸ 验证：100 样本 + 贪心</a:t>
             </a:r>
           </a:p>
         </p:txBody>
@@ -5232,7 +5660,7 @@
                   <a:srgbClr val="1C1C1C"/>
                 </a:solidFill>
               </a:rPr>
-              <a:t>▸ 梯度裁剪（clip_norm = 1.0）</a:t>
+              <a:t>▸ 梯度裁剪（clip_norm=1.0）</a:t>
             </a:r>
           </a:p>
         </p:txBody>
@@ -5489,7 +5917,7 @@
                   <a:srgbClr val="FFFFFF"/>
                 </a:solidFill>
               </a:rPr>
-              <a:t>核心代码：Beam Search 解码</a:t>
+              <a:t>核心代码：正弦位置编码与模型前向</a:t>
             </a:r>
           </a:p>
         </p:txBody>
@@ -5566,24 +5994,19 @@
                   <a:srgbClr val="CBD3E3"/>
                 </a:solidFill>
               </a:rPr>
-              <a:t>def beam_search_sentence(model, src_tokens, data, device,
-                          max_len, beam_size=4, length_penalty=0.7):
-    # 初始化：单条束，序列为 [&lt;bos&gt;]
-    beams     = [(0.0, [tgt_vocab.bos_idx])]   # (累计log概率, 序列)
-    completed = []                              # 已生成 &lt;/s&gt; 的序列
-    for _ in range(max_len):
-        candidates = []
-        for score, seq in beams:
-            logits   = model(src, tgt_tensor, src_mask, tgt_mask)
-            log_prob = torch.log_softmax(logits[0, -1], dim=-1)
-            top_p, top_id = log_prob.topk(beam_size)
-            for p, idx in zip(top_p, top_id):
-                candidates.append((score + p, seq + [idx]))
-        # 按长度惩罚评分排序：score / len(seq)^alpha
-        candidates.sort(
-            key=lambda x: x[0] / len(x[1])**length_penalty,
-            reverse=True)
-        beams = candidates[:beam_size]</a:t>
+              <a:t>class PositionalEncoding(nn.Module):
+    def __init__(self, d_model, dropout=0.1, max_len=512):
+        super().__init__()
+        self.dropout = nn.Dropout(dropout)
+        pe = torch.zeros(max_len, d_model)
+        pos = torch.arange(max_len).unsqueeze(1).float()
+        div = torch.exp(torch.arange(0, d_model, 2).float()
+                        * (-math.log(10000.0) / d_model))
+        pe[:, 0::2] = torch.sin(pos * div)   # 偶数维
+        pe[:, 1::2] = torch.cos(pos * div)   # 奇数维
+        self.register_buffer('pe', pe.unsqueeze(0))
+    def forward(self, x):   # x: (B, T, d_model)
+        return self.dropout(x + self.pe[:, :x.size(1)])</a:t>
             </a:r>
           </a:p>
         </p:txBody>
@@ -5617,7 +6040,7 @@
                   <a:srgbClr val="555555"/>
                 </a:solidFill>
               </a:rPr>
-              <a:t>length_penalty=0.7（α&lt;1）轻度鼓励长句，防止模型偏好过短翻译。</a:t>
+              <a:t>正弦/余弦交替编码位置，不同频率捕捉不同尺度的位置信息，支持任意长度。</a:t>
             </a:r>
           </a:p>
         </p:txBody>
@@ -5806,21 +6229,64 @@
                   <a:srgbClr val="FFFFFF"/>
                 </a:solidFill>
               </a:rPr>
-              <a:t>训练过程：20 epoch 收敛曲线（关键节点）</a:t>
-            </a:r>
-          </a:p>
-        </p:txBody>
-      </p:sp>
-      <p:sp>
-        <p:nvSpPr>
-          <p:cNvPr id="5" name="TextBox 4"/>
+              <a:t>核心代码：Beam Search 解码</a:t>
+            </a:r>
+          </a:p>
+        </p:txBody>
+      </p:sp>
+      <p:sp>
+        <p:nvSpPr>
+          <p:cNvPr id="5" name="Rectangle 4"/>
+          <p:cNvSpPr/>
+          <p:nvPr/>
+        </p:nvSpPr>
+        <p:spPr>
+          <a:xfrm>
+            <a:off x="347472" y="1051560"/>
+            <a:ext cx="11475720" cy="4206240"/>
+          </a:xfrm>
+          <a:prstGeom prst="rect">
+            <a:avLst/>
+          </a:prstGeom>
+          <a:solidFill>
+            <a:srgbClr val="1E1E2E"/>
+          </a:solidFill>
+          <a:ln>
+            <a:noFill/>
+          </a:ln>
+        </p:spPr>
+        <p:style>
+          <a:lnRef idx="1">
+            <a:schemeClr val="accent1"/>
+          </a:lnRef>
+          <a:fillRef idx="3">
+            <a:schemeClr val="accent1"/>
+          </a:fillRef>
+          <a:effectRef idx="2">
+            <a:schemeClr val="accent1"/>
+          </a:effectRef>
+          <a:fontRef idx="minor">
+            <a:schemeClr val="lt1"/>
+          </a:fontRef>
+        </p:style>
+        <p:txBody>
+          <a:bodyPr rtlCol="0" anchor="ctr"/>
+          <a:lstStyle/>
+          <a:p>
+            <a:pPr algn="ctr"/>
+          </a:p>
+        </p:txBody>
+      </p:sp>
+      <p:sp>
+        <p:nvSpPr>
+          <p:cNvPr id="6" name="TextBox 5"/>
           <p:cNvSpPr txBox="1"/>
           <p:nvPr/>
         </p:nvSpPr>
         <p:spPr>
           <a:xfrm>
-            <a:off x="411480" y="1115568"/>
-            <a:ext cx="11247120" cy="475488"/>
+            <a:off x="475488" y="1115568"/>
+            <a:ext cx="11201400" cy="4114800"/>
           </a:xfrm>
           <a:prstGeom prst="rect">
             <a:avLst/>
@@ -5835,26 +6301,42 @@
           <a:p>
             <a:pPr algn="l"/>
             <a:r>
-              <a:rPr sz="1700" b="0" i="0">
-                <a:solidFill>
-                  <a:srgbClr val="1C1C1C"/>
+              <a:rPr sz="1200" b="0" i="0">
+                <a:solidFill>
+                  <a:srgbClr val="CBD3E3"/>
                 </a:solidFill>
               </a:rPr>
-              <a:t>▸ Epoch  1：dev_bleu =  4.77  （模型初步学习对齐）</a:t>
-            </a:r>
-          </a:p>
-        </p:txBody>
-      </p:sp>
-      <p:sp>
-        <p:nvSpPr>
-          <p:cNvPr id="6" name="TextBox 5"/>
+              <a:t>def beam_search(model, src, beam_size=4, length_penalty=0.7):
+    beams     = [(0.0, [bos_idx])]   # (累计log概率, 序列)
+    completed = []
+    for _ in range(max_len):
+        candidates = []
+        for score, seq in beams:
+            tgt = torch.tensor([seq]).to(device)
+            logits   = model(src, tgt, ...)    # Transformer 前向
+            log_prob = torch.log_softmax(logits[0,-1], dim=-1)
+            top_p, top_id = log_prob.topk(beam_size)
+            for p, idx in zip(top_p, top_id):
+                candidates.append((score + p.item(), seq + [idx.item()]))
+        # 按长度惩罚评分：score / len^alpha，防止偏向短句
+        candidates.sort(
+            key=lambda x: x[0] / (len(x[1]) ** length_penalty),
+            reverse=True)
+        beams = candidates[:beam_size]</a:t>
+            </a:r>
+          </a:p>
+        </p:txBody>
+      </p:sp>
+      <p:sp>
+        <p:nvSpPr>
+          <p:cNvPr id="7" name="TextBox 6"/>
           <p:cNvSpPr txBox="1"/>
           <p:nvPr/>
         </p:nvSpPr>
         <p:spPr>
           <a:xfrm>
-            <a:off x="411480" y="1591056"/>
-            <a:ext cx="11247120" cy="475488"/>
+            <a:off x="411480" y="5349240"/>
+            <a:ext cx="11247120" cy="731520"/>
           </a:xfrm>
           <a:prstGeom prst="rect">
             <a:avLst/>
@@ -5869,189 +6351,19 @@
           <a:p>
             <a:pPr algn="l"/>
             <a:r>
-              <a:rPr sz="1700" b="0" i="0">
-                <a:solidFill>
-                  <a:srgbClr val="1C1C1C"/>
+              <a:rPr sz="1400" b="0" i="1">
+                <a:solidFill>
+                  <a:srgbClr val="555555"/>
                 </a:solidFill>
               </a:rPr>
-              <a:t>▸ Epoch  4：dev_bleu = 11.96  （快速提升期，loss 从 5.9 降至 4.6）</a:t>
-            </a:r>
-          </a:p>
-        </p:txBody>
-      </p:sp>
-      <p:sp>
-        <p:nvSpPr>
-          <p:cNvPr id="7" name="TextBox 6"/>
-          <p:cNvSpPr txBox="1"/>
-          <p:nvPr/>
-        </p:nvSpPr>
-        <p:spPr>
-          <a:xfrm>
-            <a:off x="411480" y="2066543"/>
-            <a:ext cx="11247120" cy="475488"/>
-          </a:xfrm>
-          <a:prstGeom prst="rect">
-            <a:avLst/>
-          </a:prstGeom>
-          <a:noFill/>
-        </p:spPr>
-        <p:txBody>
-          <a:bodyPr wrap="square">
-            <a:spAutoFit/>
-          </a:bodyPr>
-          <a:lstStyle/>
-          <a:p>
-            <a:pPr algn="l"/>
-            <a:r>
-              <a:rPr sz="1700" b="0" i="0">
-                <a:solidFill>
-                  <a:srgbClr val="1C1C1C"/>
-                </a:solidFill>
-              </a:rPr>
-              <a:t>▸ Epoch 12：dev_bleu = 14.39  （首次突破目标值 14）</a:t>
-            </a:r>
-          </a:p>
-        </p:txBody>
-      </p:sp>
-      <p:sp>
-        <p:nvSpPr>
-          <p:cNvPr id="8" name="TextBox 7"/>
-          <p:cNvSpPr txBox="1"/>
-          <p:nvPr/>
-        </p:nvSpPr>
-        <p:spPr>
-          <a:xfrm>
-            <a:off x="411480" y="2542032"/>
-            <a:ext cx="11247120" cy="475488"/>
-          </a:xfrm>
-          <a:prstGeom prst="rect">
-            <a:avLst/>
-          </a:prstGeom>
-          <a:noFill/>
-        </p:spPr>
-        <p:txBody>
-          <a:bodyPr wrap="square">
-            <a:spAutoFit/>
-          </a:bodyPr>
-          <a:lstStyle/>
-          <a:p>
-            <a:pPr algn="l"/>
-            <a:r>
-              <a:rPr sz="1700" b="0" i="0">
-                <a:solidFill>
-                  <a:srgbClr val="1C1C1C"/>
-                </a:solidFill>
-              </a:rPr>
-              <a:t>▸ Epoch 13：dev_bleu = 16.63  ★ 最佳，保存 best.pt</a:t>
-            </a:r>
-          </a:p>
-        </p:txBody>
-      </p:sp>
-      <p:sp>
-        <p:nvSpPr>
-          <p:cNvPr id="9" name="TextBox 8"/>
-          <p:cNvSpPr txBox="1"/>
-          <p:nvPr/>
-        </p:nvSpPr>
-        <p:spPr>
-          <a:xfrm>
-            <a:off x="411480" y="3017520"/>
-            <a:ext cx="11247120" cy="475488"/>
-          </a:xfrm>
-          <a:prstGeom prst="rect">
-            <a:avLst/>
-          </a:prstGeom>
-          <a:noFill/>
-        </p:spPr>
-        <p:txBody>
-          <a:bodyPr wrap="square">
-            <a:spAutoFit/>
-          </a:bodyPr>
-          <a:lstStyle/>
-          <a:p>
-            <a:pPr algn="l"/>
-            <a:r>
-              <a:rPr sz="1700" b="0" i="0">
-                <a:solidFill>
-                  <a:srgbClr val="1C1C1C"/>
-                </a:solidFill>
-              </a:rPr>
-              <a:t>▸ Epoch 14：dev_bleu = 16.39  （后期波动，CosineAnnealingLR 起作用）</a:t>
-            </a:r>
-          </a:p>
-        </p:txBody>
-      </p:sp>
-      <p:sp>
-        <p:nvSpPr>
-          <p:cNvPr id="10" name="TextBox 9"/>
-          <p:cNvSpPr txBox="1"/>
-          <p:nvPr/>
-        </p:nvSpPr>
-        <p:spPr>
-          <a:xfrm>
-            <a:off x="411480" y="3493008"/>
-            <a:ext cx="11247120" cy="475488"/>
-          </a:xfrm>
-          <a:prstGeom prst="rect">
-            <a:avLst/>
-          </a:prstGeom>
-          <a:noFill/>
-        </p:spPr>
-        <p:txBody>
-          <a:bodyPr wrap="square">
-            <a:spAutoFit/>
-          </a:bodyPr>
-          <a:lstStyle/>
-          <a:p>
-            <a:pPr algn="l"/>
-            <a:r>
-              <a:rPr sz="1700" b="0" i="0">
-                <a:solidFill>
-                  <a:srgbClr val="1C1C1C"/>
-                </a:solidFill>
-              </a:rPr>
-              <a:t>▸ Epoch 20：dev_bleu = 15.30  （最终 epoch，损失持续缓慢下降）</a:t>
-            </a:r>
-          </a:p>
-        </p:txBody>
-      </p:sp>
-      <p:sp>
-        <p:nvSpPr>
-          <p:cNvPr id="11" name="TextBox 10"/>
-          <p:cNvSpPr txBox="1"/>
-          <p:nvPr/>
-        </p:nvSpPr>
-        <p:spPr>
-          <a:xfrm>
-            <a:off x="411480" y="3968496"/>
-            <a:ext cx="11247120" cy="475488"/>
-          </a:xfrm>
-          <a:prstGeom prst="rect">
-            <a:avLst/>
-          </a:prstGeom>
-          <a:noFill/>
-        </p:spPr>
-        <p:txBody>
-          <a:bodyPr wrap="square">
-            <a:spAutoFit/>
-          </a:bodyPr>
-          <a:lstStyle/>
-          <a:p>
-            <a:pPr algn="l"/>
-            <a:r>
-              <a:rPr sz="1600" b="0" i="0">
-                <a:solidFill>
-                  <a:srgbClr val="555555"/>
-                </a:solidFill>
-              </a:rPr>
-              <a:t>    – 使用 best.pt（epoch 13）进行测试集评估：test BLEU = 14.93</a:t>
-            </a:r>
-          </a:p>
-        </p:txBody>
-      </p:sp>
-      <p:sp>
-        <p:nvSpPr>
-          <p:cNvPr id="12" name="Rectangle 11"/>
+              <a:t>length_penalty=0.7（α&lt;1）适度鼓励长句输出，防止模型偏好过短翻译。</a:t>
+            </a:r>
+          </a:p>
+        </p:txBody>
+      </p:sp>
+      <p:sp>
+        <p:nvSpPr>
+          <p:cNvPr id="8" name="Rectangle 7"/>
           <p:cNvSpPr/>
           <p:nvPr/>
         </p:nvSpPr>
@@ -6233,107 +6545,21 @@
                   <a:srgbClr val="FFFFFF"/>
                 </a:solidFill>
               </a:rPr>
-              <a:t>实验结果与分析</a:t>
-            </a:r>
-          </a:p>
-        </p:txBody>
-      </p:sp>
-      <p:sp>
-        <p:nvSpPr>
-          <p:cNvPr id="5" name="Rectangle 4"/>
-          <p:cNvSpPr/>
-          <p:nvPr/>
-        </p:nvSpPr>
-        <p:spPr>
-          <a:xfrm>
-            <a:off x="365760" y="1097280"/>
-            <a:ext cx="2727198" cy="1920240"/>
-          </a:xfrm>
-          <a:prstGeom prst="rect">
-            <a:avLst/>
-          </a:prstGeom>
-          <a:solidFill>
-            <a:srgbClr val="E8F0F8"/>
-          </a:solidFill>
-          <a:ln>
-            <a:noFill/>
-          </a:ln>
-        </p:spPr>
-        <p:style>
-          <a:lnRef idx="1">
-            <a:schemeClr val="accent1"/>
-          </a:lnRef>
-          <a:fillRef idx="3">
-            <a:schemeClr val="accent1"/>
-          </a:fillRef>
-          <a:effectRef idx="2">
-            <a:schemeClr val="accent1"/>
-          </a:effectRef>
-          <a:fontRef idx="minor">
-            <a:schemeClr val="lt1"/>
-          </a:fontRef>
-        </p:style>
-        <p:txBody>
-          <a:bodyPr rtlCol="0" anchor="ctr"/>
-          <a:lstStyle/>
-          <a:p>
-            <a:pPr algn="ctr"/>
-          </a:p>
-        </p:txBody>
-      </p:sp>
-      <p:sp>
-        <p:nvSpPr>
-          <p:cNvPr id="6" name="Rectangle 5"/>
-          <p:cNvSpPr/>
-          <p:nvPr/>
-        </p:nvSpPr>
-        <p:spPr>
-          <a:xfrm>
-            <a:off x="365760" y="1097280"/>
-            <a:ext cx="2727198" cy="73152"/>
-          </a:xfrm>
-          <a:prstGeom prst="rect">
-            <a:avLst/>
-          </a:prstGeom>
-          <a:solidFill>
-            <a:srgbClr val="1A335C"/>
-          </a:solidFill>
-          <a:ln>
-            <a:noFill/>
-          </a:ln>
-        </p:spPr>
-        <p:style>
-          <a:lnRef idx="1">
-            <a:schemeClr val="accent1"/>
-          </a:lnRef>
-          <a:fillRef idx="3">
-            <a:schemeClr val="accent1"/>
-          </a:fillRef>
-          <a:effectRef idx="2">
-            <a:schemeClr val="accent1"/>
-          </a:effectRef>
-          <a:fontRef idx="minor">
-            <a:schemeClr val="lt1"/>
-          </a:fontRef>
-        </p:style>
-        <p:txBody>
-          <a:bodyPr rtlCol="0" anchor="ctr"/>
-          <a:lstStyle/>
-          <a:p>
-            <a:pPr algn="ctr"/>
-          </a:p>
-        </p:txBody>
-      </p:sp>
-      <p:sp>
-        <p:nvSpPr>
-          <p:cNvPr id="7" name="TextBox 6"/>
+              <a:t>训练过程：20 epoch 关键节点</a:t>
+            </a:r>
+          </a:p>
+        </p:txBody>
+      </p:sp>
+      <p:sp>
+        <p:nvSpPr>
+          <p:cNvPr id="5" name="TextBox 4"/>
           <p:cNvSpPr txBox="1"/>
           <p:nvPr/>
         </p:nvSpPr>
         <p:spPr>
           <a:xfrm>
-            <a:off x="365760" y="1234440"/>
-            <a:ext cx="2727198" cy="914400"/>
+            <a:off x="411480" y="1115568"/>
+            <a:ext cx="11247120" cy="475488"/>
           </a:xfrm>
           <a:prstGeom prst="rect">
             <a:avLst/>
@@ -6346,28 +6572,28 @@
           </a:bodyPr>
           <a:lstStyle/>
           <a:p>
-            <a:pPr algn="ctr"/>
-            <a:r>
-              <a:rPr sz="3000" b="1" i="0">
-                <a:solidFill>
-                  <a:srgbClr val="1A7A3C"/>
+            <a:pPr algn="l"/>
+            <a:r>
+              <a:rPr sz="1700" b="0" i="0">
+                <a:solidFill>
+                  <a:srgbClr val="1C1C1C"/>
                 </a:solidFill>
               </a:rPr>
-              <a:t>14.93</a:t>
-            </a:r>
-          </a:p>
-        </p:txBody>
-      </p:sp>
-      <p:sp>
-        <p:nvSpPr>
-          <p:cNvPr id="8" name="TextBox 7"/>
+              <a:t>▸ Epoch  1：dev_bleu =  4.77  （模型初步学习词对齐）</a:t>
+            </a:r>
+          </a:p>
+        </p:txBody>
+      </p:sp>
+      <p:sp>
+        <p:nvSpPr>
+          <p:cNvPr id="6" name="TextBox 5"/>
           <p:cNvSpPr txBox="1"/>
           <p:nvPr/>
         </p:nvSpPr>
         <p:spPr>
           <a:xfrm>
-            <a:off x="365760" y="2194560"/>
-            <a:ext cx="2727198" cy="457200"/>
+            <a:off x="411480" y="1591056"/>
+            <a:ext cx="11247120" cy="475488"/>
           </a:xfrm>
           <a:prstGeom prst="rect">
             <a:avLst/>
@@ -6380,28 +6606,28 @@
           </a:bodyPr>
           <a:lstStyle/>
           <a:p>
-            <a:pPr algn="ctr"/>
-            <a:r>
-              <a:rPr sz="1300" b="0" i="0">
+            <a:pPr algn="l"/>
+            <a:r>
+              <a:rPr sz="1700" b="0" i="0">
                 <a:solidFill>
                   <a:srgbClr val="1C1C1C"/>
                 </a:solidFill>
               </a:rPr>
-              <a:t>test BLEU-4</a:t>
-            </a:r>
-          </a:p>
-        </p:txBody>
-      </p:sp>
-      <p:sp>
-        <p:nvSpPr>
-          <p:cNvPr id="9" name="TextBox 8"/>
+              <a:t>▸ Epoch  4：dev_bleu = 11.96  （快速提升期，loss 从 5.9 降至 4.6）</a:t>
+            </a:r>
+          </a:p>
+        </p:txBody>
+      </p:sp>
+      <p:sp>
+        <p:nvSpPr>
+          <p:cNvPr id="7" name="TextBox 6"/>
           <p:cNvSpPr txBox="1"/>
           <p:nvPr/>
         </p:nvSpPr>
         <p:spPr>
           <a:xfrm>
-            <a:off x="365760" y="2633472"/>
-            <a:ext cx="2727198" cy="320040"/>
+            <a:off x="411480" y="2066543"/>
+            <a:ext cx="11247120" cy="475488"/>
           </a:xfrm>
           <a:prstGeom prst="rect">
             <a:avLst/>
@@ -6414,114 +6640,28 @@
           </a:bodyPr>
           <a:lstStyle/>
           <a:p>
-            <a:pPr algn="ctr"/>
-            <a:r>
-              <a:rPr sz="1100" b="0" i="1">
-                <a:solidFill>
-                  <a:srgbClr val="555555"/>
+            <a:pPr algn="l"/>
+            <a:r>
+              <a:rPr sz="1700" b="0" i="0">
+                <a:solidFill>
+                  <a:srgbClr val="1C1C1C"/>
                 </a:solidFill>
               </a:rPr>
-              <a:t>✅ &gt; 14</a:t>
-            </a:r>
-          </a:p>
-        </p:txBody>
-      </p:sp>
-      <p:sp>
-        <p:nvSpPr>
-          <p:cNvPr id="10" name="Rectangle 9"/>
-          <p:cNvSpPr/>
-          <p:nvPr/>
-        </p:nvSpPr>
-        <p:spPr>
-          <a:xfrm>
-            <a:off x="3230118" y="1097280"/>
-            <a:ext cx="2727198" cy="1920240"/>
-          </a:xfrm>
-          <a:prstGeom prst="rect">
-            <a:avLst/>
-          </a:prstGeom>
-          <a:solidFill>
-            <a:srgbClr val="E8F0F8"/>
-          </a:solidFill>
-          <a:ln>
-            <a:noFill/>
-          </a:ln>
-        </p:spPr>
-        <p:style>
-          <a:lnRef idx="1">
-            <a:schemeClr val="accent1"/>
-          </a:lnRef>
-          <a:fillRef idx="3">
-            <a:schemeClr val="accent1"/>
-          </a:fillRef>
-          <a:effectRef idx="2">
-            <a:schemeClr val="accent1"/>
-          </a:effectRef>
-          <a:fontRef idx="minor">
-            <a:schemeClr val="lt1"/>
-          </a:fontRef>
-        </p:style>
-        <p:txBody>
-          <a:bodyPr rtlCol="0" anchor="ctr"/>
-          <a:lstStyle/>
-          <a:p>
-            <a:pPr algn="ctr"/>
-          </a:p>
-        </p:txBody>
-      </p:sp>
-      <p:sp>
-        <p:nvSpPr>
-          <p:cNvPr id="11" name="Rectangle 10"/>
-          <p:cNvSpPr/>
-          <p:nvPr/>
-        </p:nvSpPr>
-        <p:spPr>
-          <a:xfrm>
-            <a:off x="3230118" y="1097280"/>
-            <a:ext cx="2727198" cy="73152"/>
-          </a:xfrm>
-          <a:prstGeom prst="rect">
-            <a:avLst/>
-          </a:prstGeom>
-          <a:solidFill>
-            <a:srgbClr val="1A335C"/>
-          </a:solidFill>
-          <a:ln>
-            <a:noFill/>
-          </a:ln>
-        </p:spPr>
-        <p:style>
-          <a:lnRef idx="1">
-            <a:schemeClr val="accent1"/>
-          </a:lnRef>
-          <a:fillRef idx="3">
-            <a:schemeClr val="accent1"/>
-          </a:fillRef>
-          <a:effectRef idx="2">
-            <a:schemeClr val="accent1"/>
-          </a:effectRef>
-          <a:fontRef idx="minor">
-            <a:schemeClr val="lt1"/>
-          </a:fontRef>
-        </p:style>
-        <p:txBody>
-          <a:bodyPr rtlCol="0" anchor="ctr"/>
-          <a:lstStyle/>
-          <a:p>
-            <a:pPr algn="ctr"/>
-          </a:p>
-        </p:txBody>
-      </p:sp>
-      <p:sp>
-        <p:nvSpPr>
-          <p:cNvPr id="12" name="TextBox 11"/>
+              <a:t>▸ Epoch 12：dev_bleu = 14.39  （首次突破目标值 14）</a:t>
+            </a:r>
+          </a:p>
+        </p:txBody>
+      </p:sp>
+      <p:sp>
+        <p:nvSpPr>
+          <p:cNvPr id="8" name="TextBox 7"/>
           <p:cNvSpPr txBox="1"/>
           <p:nvPr/>
         </p:nvSpPr>
         <p:spPr>
           <a:xfrm>
-            <a:off x="3230118" y="1234440"/>
-            <a:ext cx="2727198" cy="914400"/>
+            <a:off x="411480" y="2542032"/>
+            <a:ext cx="11247120" cy="475488"/>
           </a:xfrm>
           <a:prstGeom prst="rect">
             <a:avLst/>
@@ -6534,28 +6674,28 @@
           </a:bodyPr>
           <a:lstStyle/>
           <a:p>
-            <a:pPr algn="ctr"/>
-            <a:r>
-              <a:rPr sz="3000" b="1" i="0">
-                <a:solidFill>
-                  <a:srgbClr val="1A7A3C"/>
+            <a:pPr algn="l"/>
+            <a:r>
+              <a:rPr sz="1700" b="0" i="0">
+                <a:solidFill>
+                  <a:srgbClr val="1C1C1C"/>
                 </a:solidFill>
               </a:rPr>
-              <a:t>16.63</a:t>
-            </a:r>
-          </a:p>
-        </p:txBody>
-      </p:sp>
-      <p:sp>
-        <p:nvSpPr>
-          <p:cNvPr id="13" name="TextBox 12"/>
+              <a:t>▸ Epoch 13：dev_bleu = 16.63  ★ 最佳，保存 best.pt</a:t>
+            </a:r>
+          </a:p>
+        </p:txBody>
+      </p:sp>
+      <p:sp>
+        <p:nvSpPr>
+          <p:cNvPr id="9" name="TextBox 8"/>
           <p:cNvSpPr txBox="1"/>
           <p:nvPr/>
         </p:nvSpPr>
         <p:spPr>
           <a:xfrm>
-            <a:off x="3230118" y="2194560"/>
-            <a:ext cx="2727198" cy="457200"/>
+            <a:off x="411480" y="3017520"/>
+            <a:ext cx="11247120" cy="475488"/>
           </a:xfrm>
           <a:prstGeom prst="rect">
             <a:avLst/>
@@ -6568,28 +6708,28 @@
           </a:bodyPr>
           <a:lstStyle/>
           <a:p>
-            <a:pPr algn="ctr"/>
-            <a:r>
-              <a:rPr sz="1300" b="0" i="0">
+            <a:pPr algn="l"/>
+            <a:r>
+              <a:rPr sz="1700" b="0" i="0">
                 <a:solidFill>
                   <a:srgbClr val="1C1C1C"/>
                 </a:solidFill>
               </a:rPr>
-              <a:t>best dev BLEU</a:t>
-            </a:r>
-          </a:p>
-        </p:txBody>
-      </p:sp>
-      <p:sp>
-        <p:nvSpPr>
-          <p:cNvPr id="14" name="TextBox 13"/>
+              <a:t>▸ Epoch 14：dev_bleu = 16.39  （后期轻微波动，训练趋于稳定）</a:t>
+            </a:r>
+          </a:p>
+        </p:txBody>
+      </p:sp>
+      <p:sp>
+        <p:nvSpPr>
+          <p:cNvPr id="10" name="TextBox 9"/>
           <p:cNvSpPr txBox="1"/>
           <p:nvPr/>
         </p:nvSpPr>
         <p:spPr>
           <a:xfrm>
-            <a:off x="3230118" y="2633472"/>
-            <a:ext cx="2727198" cy="320040"/>
+            <a:off x="411480" y="3493008"/>
+            <a:ext cx="11247120" cy="475488"/>
           </a:xfrm>
           <a:prstGeom prst="rect">
             <a:avLst/>
@@ -6602,114 +6742,28 @@
           </a:bodyPr>
           <a:lstStyle/>
           <a:p>
-            <a:pPr algn="ctr"/>
-            <a:r>
-              <a:rPr sz="1100" b="0" i="1">
-                <a:solidFill>
-                  <a:srgbClr val="555555"/>
+            <a:pPr algn="l"/>
+            <a:r>
+              <a:rPr sz="1700" b="0" i="0">
+                <a:solidFill>
+                  <a:srgbClr val="1C1C1C"/>
                 </a:solidFill>
               </a:rPr>
-              <a:t>epoch 13</a:t>
-            </a:r>
-          </a:p>
-        </p:txBody>
-      </p:sp>
-      <p:sp>
-        <p:nvSpPr>
-          <p:cNvPr id="15" name="Rectangle 14"/>
-          <p:cNvSpPr/>
-          <p:nvPr/>
-        </p:nvSpPr>
-        <p:spPr>
-          <a:xfrm>
-            <a:off x="6094476" y="1097280"/>
-            <a:ext cx="2727198" cy="1920240"/>
-          </a:xfrm>
-          <a:prstGeom prst="rect">
-            <a:avLst/>
-          </a:prstGeom>
-          <a:solidFill>
-            <a:srgbClr val="E8F0F8"/>
-          </a:solidFill>
-          <a:ln>
-            <a:noFill/>
-          </a:ln>
-        </p:spPr>
-        <p:style>
-          <a:lnRef idx="1">
-            <a:schemeClr val="accent1"/>
-          </a:lnRef>
-          <a:fillRef idx="3">
-            <a:schemeClr val="accent1"/>
-          </a:fillRef>
-          <a:effectRef idx="2">
-            <a:schemeClr val="accent1"/>
-          </a:effectRef>
-          <a:fontRef idx="minor">
-            <a:schemeClr val="lt1"/>
-          </a:fontRef>
-        </p:style>
-        <p:txBody>
-          <a:bodyPr rtlCol="0" anchor="ctr"/>
-          <a:lstStyle/>
-          <a:p>
-            <a:pPr algn="ctr"/>
-          </a:p>
-        </p:txBody>
-      </p:sp>
-      <p:sp>
-        <p:nvSpPr>
-          <p:cNvPr id="16" name="Rectangle 15"/>
-          <p:cNvSpPr/>
-          <p:nvPr/>
-        </p:nvSpPr>
-        <p:spPr>
-          <a:xfrm>
-            <a:off x="6094476" y="1097280"/>
-            <a:ext cx="2727198" cy="73152"/>
-          </a:xfrm>
-          <a:prstGeom prst="rect">
-            <a:avLst/>
-          </a:prstGeom>
-          <a:solidFill>
-            <a:srgbClr val="1A335C"/>
-          </a:solidFill>
-          <a:ln>
-            <a:noFill/>
-          </a:ln>
-        </p:spPr>
-        <p:style>
-          <a:lnRef idx="1">
-            <a:schemeClr val="accent1"/>
-          </a:lnRef>
-          <a:fillRef idx="3">
-            <a:schemeClr val="accent1"/>
-          </a:fillRef>
-          <a:effectRef idx="2">
-            <a:schemeClr val="accent1"/>
-          </a:effectRef>
-          <a:fontRef idx="minor">
-            <a:schemeClr val="lt1"/>
-          </a:fontRef>
-        </p:style>
-        <p:txBody>
-          <a:bodyPr rtlCol="0" anchor="ctr"/>
-          <a:lstStyle/>
-          <a:p>
-            <a:pPr algn="ctr"/>
-          </a:p>
-        </p:txBody>
-      </p:sp>
-      <p:sp>
-        <p:nvSpPr>
-          <p:cNvPr id="17" name="TextBox 16"/>
+              <a:t>▸ Epoch 20：dev_bleu = 15.30  （最终 epoch，loss 持续缓慢下降）</a:t>
+            </a:r>
+          </a:p>
+        </p:txBody>
+      </p:sp>
+      <p:sp>
+        <p:nvSpPr>
+          <p:cNvPr id="11" name="TextBox 10"/>
           <p:cNvSpPr txBox="1"/>
           <p:nvPr/>
         </p:nvSpPr>
         <p:spPr>
           <a:xfrm>
-            <a:off x="6094476" y="1234440"/>
-            <a:ext cx="2727198" cy="914400"/>
+            <a:off x="411480" y="3968496"/>
+            <a:ext cx="11247120" cy="475488"/>
           </a:xfrm>
           <a:prstGeom prst="rect">
             <a:avLst/>
@@ -6722,413 +6776,21 @@
           </a:bodyPr>
           <a:lstStyle/>
           <a:p>
-            <a:pPr algn="ctr"/>
-            <a:r>
-              <a:rPr sz="3000" b="1" i="0">
-                <a:solidFill>
-                  <a:srgbClr val="1A7A3C"/>
+            <a:pPr algn="l"/>
+            <a:r>
+              <a:rPr sz="1600" b="0" i="0">
+                <a:solidFill>
+                  <a:srgbClr val="555555"/>
                 </a:solidFill>
               </a:rPr>
-              <a:t>3.5903</a:t>
-            </a:r>
-          </a:p>
-        </p:txBody>
-      </p:sp>
-      <p:sp>
-        <p:nvSpPr>
-          <p:cNvPr id="18" name="TextBox 17"/>
-          <p:cNvSpPr txBox="1"/>
-          <p:nvPr/>
-        </p:nvSpPr>
-        <p:spPr>
-          <a:xfrm>
-            <a:off x="6094476" y="2194560"/>
-            <a:ext cx="2727198" cy="457200"/>
-          </a:xfrm>
-          <a:prstGeom prst="rect">
-            <a:avLst/>
-          </a:prstGeom>
-          <a:noFill/>
-        </p:spPr>
-        <p:txBody>
-          <a:bodyPr wrap="square">
-            <a:spAutoFit/>
-          </a:bodyPr>
-          <a:lstStyle/>
-          <a:p>
-            <a:pPr algn="ctr"/>
-            <a:r>
-              <a:rPr sz="1300" b="0" i="0">
-                <a:solidFill>
-                  <a:srgbClr val="1C1C1C"/>
-                </a:solidFill>
-              </a:rPr>
-              <a:t>test_loss</a:t>
-            </a:r>
-          </a:p>
-        </p:txBody>
-      </p:sp>
-      <p:sp>
-        <p:nvSpPr>
-          <p:cNvPr id="19" name="Rectangle 18"/>
-          <p:cNvSpPr/>
-          <p:nvPr/>
-        </p:nvSpPr>
-        <p:spPr>
-          <a:xfrm>
-            <a:off x="8958834" y="1097280"/>
-            <a:ext cx="2727198" cy="1920240"/>
-          </a:xfrm>
-          <a:prstGeom prst="rect">
-            <a:avLst/>
-          </a:prstGeom>
-          <a:solidFill>
-            <a:srgbClr val="E8F0F8"/>
-          </a:solidFill>
-          <a:ln>
-            <a:noFill/>
-          </a:ln>
-        </p:spPr>
-        <p:style>
-          <a:lnRef idx="1">
-            <a:schemeClr val="accent1"/>
-          </a:lnRef>
-          <a:fillRef idx="3">
-            <a:schemeClr val="accent1"/>
-          </a:fillRef>
-          <a:effectRef idx="2">
-            <a:schemeClr val="accent1"/>
-          </a:effectRef>
-          <a:fontRef idx="minor">
-            <a:schemeClr val="lt1"/>
-          </a:fontRef>
-        </p:style>
-        <p:txBody>
-          <a:bodyPr rtlCol="0" anchor="ctr"/>
-          <a:lstStyle/>
-          <a:p>
-            <a:pPr algn="ctr"/>
-          </a:p>
-        </p:txBody>
-      </p:sp>
-      <p:sp>
-        <p:nvSpPr>
-          <p:cNvPr id="20" name="Rectangle 19"/>
-          <p:cNvSpPr/>
-          <p:nvPr/>
-        </p:nvSpPr>
-        <p:spPr>
-          <a:xfrm>
-            <a:off x="8958834" y="1097280"/>
-            <a:ext cx="2727198" cy="73152"/>
-          </a:xfrm>
-          <a:prstGeom prst="rect">
-            <a:avLst/>
-          </a:prstGeom>
-          <a:solidFill>
-            <a:srgbClr val="1A335C"/>
-          </a:solidFill>
-          <a:ln>
-            <a:noFill/>
-          </a:ln>
-        </p:spPr>
-        <p:style>
-          <a:lnRef idx="1">
-            <a:schemeClr val="accent1"/>
-          </a:lnRef>
-          <a:fillRef idx="3">
-            <a:schemeClr val="accent1"/>
-          </a:fillRef>
-          <a:effectRef idx="2">
-            <a:schemeClr val="accent1"/>
-          </a:effectRef>
-          <a:fontRef idx="minor">
-            <a:schemeClr val="lt1"/>
-          </a:fontRef>
-        </p:style>
-        <p:txBody>
-          <a:bodyPr rtlCol="0" anchor="ctr"/>
-          <a:lstStyle/>
-          <a:p>
-            <a:pPr algn="ctr"/>
-          </a:p>
-        </p:txBody>
-      </p:sp>
-      <p:sp>
-        <p:nvSpPr>
-          <p:cNvPr id="21" name="TextBox 20"/>
-          <p:cNvSpPr txBox="1"/>
-          <p:nvPr/>
-        </p:nvSpPr>
-        <p:spPr>
-          <a:xfrm>
-            <a:off x="8958834" y="1234440"/>
-            <a:ext cx="2727198" cy="914400"/>
-          </a:xfrm>
-          <a:prstGeom prst="rect">
-            <a:avLst/>
-          </a:prstGeom>
-          <a:noFill/>
-        </p:spPr>
-        <p:txBody>
-          <a:bodyPr wrap="square">
-            <a:spAutoFit/>
-          </a:bodyPr>
-          <a:lstStyle/>
-          <a:p>
-            <a:pPr algn="ctr"/>
-            <a:r>
-              <a:rPr sz="3000" b="1" i="0">
-                <a:solidFill>
-                  <a:srgbClr val="1A7A3C"/>
-                </a:solidFill>
-              </a:rPr>
-              <a:t>+2.54</a:t>
-            </a:r>
-          </a:p>
-        </p:txBody>
-      </p:sp>
-      <p:sp>
-        <p:nvSpPr>
-          <p:cNvPr id="22" name="TextBox 21"/>
-          <p:cNvSpPr txBox="1"/>
-          <p:nvPr/>
-        </p:nvSpPr>
-        <p:spPr>
-          <a:xfrm>
-            <a:off x="8958834" y="2194560"/>
-            <a:ext cx="2727198" cy="457200"/>
-          </a:xfrm>
-          <a:prstGeom prst="rect">
-            <a:avLst/>
-          </a:prstGeom>
-          <a:noFill/>
-        </p:spPr>
-        <p:txBody>
-          <a:bodyPr wrap="square">
-            <a:spAutoFit/>
-          </a:bodyPr>
-          <a:lstStyle/>
-          <a:p>
-            <a:pPr algn="ctr"/>
-            <a:r>
-              <a:rPr sz="1300" b="0" i="0">
-                <a:solidFill>
-                  <a:srgbClr val="1C1C1C"/>
-                </a:solidFill>
-              </a:rPr>
-              <a:t>v1→v2 提升</a:t>
-            </a:r>
-          </a:p>
-        </p:txBody>
-      </p:sp>
-      <p:sp>
-        <p:nvSpPr>
-          <p:cNvPr id="23" name="TextBox 22"/>
-          <p:cNvSpPr txBox="1"/>
-          <p:nvPr/>
-        </p:nvSpPr>
-        <p:spPr>
-          <a:xfrm>
-            <a:off x="411480" y="3154680"/>
-            <a:ext cx="11247120" cy="475488"/>
-          </a:xfrm>
-          <a:prstGeom prst="rect">
-            <a:avLst/>
-          </a:prstGeom>
-          <a:noFill/>
-        </p:spPr>
-        <p:txBody>
-          <a:bodyPr wrap="square">
-            <a:spAutoFit/>
-          </a:bodyPr>
-          <a:lstStyle/>
-          <a:p>
-            <a:pPr algn="l"/>
-            <a:r>
-              <a:rPr sz="1600" b="0" i="0">
-                <a:solidFill>
-                  <a:srgbClr val="1C1C1C"/>
-                </a:solidFill>
-              </a:rPr>
-              <a:t>▸ 翻译样例（beam=4）：</a:t>
-            </a:r>
-          </a:p>
-        </p:txBody>
-      </p:sp>
-      <p:sp>
-        <p:nvSpPr>
-          <p:cNvPr id="24" name="TextBox 23"/>
-          <p:cNvSpPr txBox="1"/>
-          <p:nvPr/>
-        </p:nvSpPr>
-        <p:spPr>
-          <a:xfrm>
-            <a:off x="411480" y="3630168"/>
-            <a:ext cx="11247120" cy="475488"/>
-          </a:xfrm>
-          <a:prstGeom prst="rect">
-            <a:avLst/>
-          </a:prstGeom>
-          <a:noFill/>
-        </p:spPr>
-        <p:txBody>
-          <a:bodyPr wrap="square">
-            <a:spAutoFit/>
-          </a:bodyPr>
-          <a:lstStyle/>
-          <a:p>
-            <a:pPr algn="l"/>
-            <a:r>
-              <a:rPr sz="1500" b="0" i="0">
-                <a:solidFill>
-                  <a:srgbClr val="555555"/>
-                </a:solidFill>
-              </a:rPr>
-              <a:t>    – SRC：北约 不少 飞机 不得不 携 返航</a:t>
-            </a:r>
-          </a:p>
-        </p:txBody>
-      </p:sp>
-      <p:sp>
-        <p:nvSpPr>
-          <p:cNvPr id="25" name="TextBox 24"/>
-          <p:cNvSpPr txBox="1"/>
-          <p:nvPr/>
-        </p:nvSpPr>
-        <p:spPr>
-          <a:xfrm>
-            <a:off x="411480" y="4105656"/>
-            <a:ext cx="11247120" cy="475488"/>
-          </a:xfrm>
-          <a:prstGeom prst="rect">
-            <a:avLst/>
-          </a:prstGeom>
-          <a:noFill/>
-        </p:spPr>
-        <p:txBody>
-          <a:bodyPr wrap="square">
-            <a:spAutoFit/>
-          </a:bodyPr>
-          <a:lstStyle/>
-          <a:p>
-            <a:pPr algn="l"/>
-            <a:r>
-              <a:rPr sz="1500" b="0" i="0">
-                <a:solidFill>
-                  <a:srgbClr val="555555"/>
-                </a:solidFill>
-              </a:rPr>
-              <a:t>    – HYP：many nato planes have suddenly left the us plane for the planes .</a:t>
-            </a:r>
-          </a:p>
-        </p:txBody>
-      </p:sp>
-      <p:sp>
-        <p:nvSpPr>
-          <p:cNvPr id="26" name="TextBox 25"/>
-          <p:cNvSpPr txBox="1"/>
-          <p:nvPr/>
-        </p:nvSpPr>
-        <p:spPr>
-          <a:xfrm>
-            <a:off x="411480" y="4581144"/>
-            <a:ext cx="11247120" cy="475488"/>
-          </a:xfrm>
-          <a:prstGeom prst="rect">
-            <a:avLst/>
-          </a:prstGeom>
-          <a:noFill/>
-        </p:spPr>
-        <p:txBody>
-          <a:bodyPr wrap="square">
-            <a:spAutoFit/>
-          </a:bodyPr>
-          <a:lstStyle/>
-          <a:p>
-            <a:pPr algn="l"/>
-            <a:r>
-              <a:rPr sz="1500" b="0" i="0">
-                <a:solidFill>
-                  <a:srgbClr val="555555"/>
-                </a:solidFill>
-              </a:rPr>
-              <a:t>    – SRC：世界 和平 需要 各国 共同 努力</a:t>
-            </a:r>
-          </a:p>
-        </p:txBody>
-      </p:sp>
-      <p:sp>
-        <p:nvSpPr>
-          <p:cNvPr id="27" name="TextBox 26"/>
-          <p:cNvSpPr txBox="1"/>
-          <p:nvPr/>
-        </p:nvSpPr>
-        <p:spPr>
-          <a:xfrm>
-            <a:off x="411480" y="5056631"/>
-            <a:ext cx="11247120" cy="475488"/>
-          </a:xfrm>
-          <a:prstGeom prst="rect">
-            <a:avLst/>
-          </a:prstGeom>
-          <a:noFill/>
-        </p:spPr>
-        <p:txBody>
-          <a:bodyPr wrap="square">
-            <a:spAutoFit/>
-          </a:bodyPr>
-          <a:lstStyle/>
-          <a:p>
-            <a:pPr algn="l"/>
-            <a:r>
-              <a:rPr sz="1500" b="0" i="0">
-                <a:solidFill>
-                  <a:srgbClr val="555555"/>
-                </a:solidFill>
-              </a:rPr>
-              <a:t>    – HYP：world peace requires common efforts to be made in the world .</a:t>
-            </a:r>
-          </a:p>
-        </p:txBody>
-      </p:sp>
-      <p:sp>
-        <p:nvSpPr>
-          <p:cNvPr id="28" name="TextBox 27"/>
-          <p:cNvSpPr txBox="1"/>
-          <p:nvPr/>
-        </p:nvSpPr>
-        <p:spPr>
-          <a:xfrm>
-            <a:off x="411480" y="5532119"/>
-            <a:ext cx="11247120" cy="475488"/>
-          </a:xfrm>
-          <a:prstGeom prst="rect">
-            <a:avLst/>
-          </a:prstGeom>
-          <a:noFill/>
-        </p:spPr>
-        <p:txBody>
-          <a:bodyPr wrap="square">
-            <a:spAutoFit/>
-          </a:bodyPr>
-          <a:lstStyle/>
-          <a:p>
-            <a:pPr algn="l"/>
-            <a:r>
-              <a:rPr sz="1600" b="0" i="0">
-                <a:solidFill>
-                  <a:srgbClr val="1C1C1C"/>
-                </a:solidFill>
-              </a:rPr>
-              <a:t>▸ Beam Search 相比贪心解码提升约 +2 BLEU，长度惩罚避免了过短输出</a:t>
-            </a:r>
-          </a:p>
-        </p:txBody>
-      </p:sp>
-      <p:sp>
-        <p:nvSpPr>
-          <p:cNvPr id="29" name="Rectangle 28"/>
+              <a:t>    – 使用 best.pt（epoch 13）进行测试集评估：test BLEU = 14.93</a:t>
+            </a:r>
+          </a:p>
+        </p:txBody>
+      </p:sp>
+      <p:sp>
+        <p:nvSpPr>
+          <p:cNvPr id="12" name="Rectangle 11"/>
           <p:cNvSpPr/>
           <p:nvPr/>
         </p:nvSpPr>
@@ -7310,21 +6972,107 @@
                   <a:srgbClr val="FFFFFF"/>
                 </a:solidFill>
               </a:rPr>
-              <a:t>总结与展望</a:t>
-            </a:r>
-          </a:p>
-        </p:txBody>
-      </p:sp>
-      <p:sp>
-        <p:nvSpPr>
-          <p:cNvPr id="5" name="TextBox 4"/>
+              <a:t>实验结果与翻译样例</a:t>
+            </a:r>
+          </a:p>
+        </p:txBody>
+      </p:sp>
+      <p:sp>
+        <p:nvSpPr>
+          <p:cNvPr id="5" name="Rectangle 4"/>
+          <p:cNvSpPr/>
+          <p:nvPr/>
+        </p:nvSpPr>
+        <p:spPr>
+          <a:xfrm>
+            <a:off x="365760" y="1097280"/>
+            <a:ext cx="3681983" cy="1920240"/>
+          </a:xfrm>
+          <a:prstGeom prst="rect">
+            <a:avLst/>
+          </a:prstGeom>
+          <a:solidFill>
+            <a:srgbClr val="E8F0F8"/>
+          </a:solidFill>
+          <a:ln>
+            <a:noFill/>
+          </a:ln>
+        </p:spPr>
+        <p:style>
+          <a:lnRef idx="1">
+            <a:schemeClr val="accent1"/>
+          </a:lnRef>
+          <a:fillRef idx="3">
+            <a:schemeClr val="accent1"/>
+          </a:fillRef>
+          <a:effectRef idx="2">
+            <a:schemeClr val="accent1"/>
+          </a:effectRef>
+          <a:fontRef idx="minor">
+            <a:schemeClr val="lt1"/>
+          </a:fontRef>
+        </p:style>
+        <p:txBody>
+          <a:bodyPr rtlCol="0" anchor="ctr"/>
+          <a:lstStyle/>
+          <a:p>
+            <a:pPr algn="ctr"/>
+          </a:p>
+        </p:txBody>
+      </p:sp>
+      <p:sp>
+        <p:nvSpPr>
+          <p:cNvPr id="6" name="Rectangle 5"/>
+          <p:cNvSpPr/>
+          <p:nvPr/>
+        </p:nvSpPr>
+        <p:spPr>
+          <a:xfrm>
+            <a:off x="365760" y="1097280"/>
+            <a:ext cx="3681983" cy="73152"/>
+          </a:xfrm>
+          <a:prstGeom prst="rect">
+            <a:avLst/>
+          </a:prstGeom>
+          <a:solidFill>
+            <a:srgbClr val="1A335C"/>
+          </a:solidFill>
+          <a:ln>
+            <a:noFill/>
+          </a:ln>
+        </p:spPr>
+        <p:style>
+          <a:lnRef idx="1">
+            <a:schemeClr val="accent1"/>
+          </a:lnRef>
+          <a:fillRef idx="3">
+            <a:schemeClr val="accent1"/>
+          </a:fillRef>
+          <a:effectRef idx="2">
+            <a:schemeClr val="accent1"/>
+          </a:effectRef>
+          <a:fontRef idx="minor">
+            <a:schemeClr val="lt1"/>
+          </a:fontRef>
+        </p:style>
+        <p:txBody>
+          <a:bodyPr rtlCol="0" anchor="ctr"/>
+          <a:lstStyle/>
+          <a:p>
+            <a:pPr algn="ctr"/>
+          </a:p>
+        </p:txBody>
+      </p:sp>
+      <p:sp>
+        <p:nvSpPr>
+          <p:cNvPr id="7" name="TextBox 6"/>
           <p:cNvSpPr txBox="1"/>
           <p:nvPr/>
         </p:nvSpPr>
         <p:spPr>
           <a:xfrm>
-            <a:off x="411480" y="1115568"/>
-            <a:ext cx="11247120" cy="475488"/>
+            <a:off x="365760" y="1234440"/>
+            <a:ext cx="3681983" cy="914400"/>
           </a:xfrm>
           <a:prstGeom prst="rect">
             <a:avLst/>
@@ -7337,28 +7085,28 @@
           </a:bodyPr>
           <a:lstStyle/>
           <a:p>
-            <a:pPr algn="l"/>
-            <a:r>
-              <a:rPr sz="1700" b="0" i="0">
-                <a:solidFill>
-                  <a:srgbClr val="1C1C1C"/>
+            <a:pPr algn="ctr"/>
+            <a:r>
+              <a:rPr sz="3000" b="1" i="0">
+                <a:solidFill>
+                  <a:srgbClr val="1A7A3C"/>
                 </a:solidFill>
               </a:rPr>
-              <a:t>▸ 实现了完整的 Transformer NMT：正弦位置编码、causal mask、beam search</a:t>
-            </a:r>
-          </a:p>
-        </p:txBody>
-      </p:sp>
-      <p:sp>
-        <p:nvSpPr>
-          <p:cNvPr id="6" name="TextBox 5"/>
+              <a:t>14.93</a:t>
+            </a:r>
+          </a:p>
+        </p:txBody>
+      </p:sp>
+      <p:sp>
+        <p:nvSpPr>
+          <p:cNvPr id="8" name="TextBox 7"/>
           <p:cNvSpPr txBox="1"/>
           <p:nvPr/>
         </p:nvSpPr>
         <p:spPr>
           <a:xfrm>
-            <a:off x="411480" y="1591056"/>
-            <a:ext cx="11247120" cy="475488"/>
+            <a:off x="365760" y="2194560"/>
+            <a:ext cx="3681983" cy="457200"/>
           </a:xfrm>
           <a:prstGeom prst="rect">
             <a:avLst/>
@@ -7371,28 +7119,28 @@
           </a:bodyPr>
           <a:lstStyle/>
           <a:p>
-            <a:pPr algn="l"/>
-            <a:r>
-              <a:rPr sz="1700" b="0" i="0">
+            <a:pPr algn="ctr"/>
+            <a:r>
+              <a:rPr sz="1300" b="0" i="0">
                 <a:solidFill>
                   <a:srgbClr val="1C1C1C"/>
                 </a:solidFill>
               </a:rPr>
-              <a:t>▸ 通过「延长训练 + Beam Search + 梯度裁剪」三项优化，从 12.39 提升至 14.93</a:t>
-            </a:r>
-          </a:p>
-        </p:txBody>
-      </p:sp>
-      <p:sp>
-        <p:nvSpPr>
-          <p:cNvPr id="7" name="TextBox 6"/>
+              <a:t>test BLEU-4</a:t>
+            </a:r>
+          </a:p>
+        </p:txBody>
+      </p:sp>
+      <p:sp>
+        <p:nvSpPr>
+          <p:cNvPr id="9" name="TextBox 8"/>
           <p:cNvSpPr txBox="1"/>
           <p:nvPr/>
         </p:nvSpPr>
         <p:spPr>
           <a:xfrm>
-            <a:off x="411480" y="2066543"/>
-            <a:ext cx="11247120" cy="475488"/>
+            <a:off x="365760" y="2633472"/>
+            <a:ext cx="3681983" cy="320040"/>
           </a:xfrm>
           <a:prstGeom prst="rect">
             <a:avLst/>
@@ -7405,28 +7153,114 @@
           </a:bodyPr>
           <a:lstStyle/>
           <a:p>
-            <a:pPr algn="l"/>
-            <a:r>
-              <a:rPr sz="1700" b="0" i="0">
-                <a:solidFill>
-                  <a:srgbClr val="1C1C1C"/>
+            <a:pPr algn="ctr"/>
+            <a:r>
+              <a:rPr sz="1100" b="0" i="1">
+                <a:solidFill>
+                  <a:srgbClr val="555555"/>
                 </a:solidFill>
               </a:rPr>
-              <a:t>▸ Label Smoothing 减少模型对训练集的过度自信，提升泛化能力</a:t>
-            </a:r>
-          </a:p>
-        </p:txBody>
-      </p:sp>
-      <p:sp>
-        <p:nvSpPr>
-          <p:cNvPr id="8" name="TextBox 7"/>
+              <a:t>✅ &gt; 14</a:t>
+            </a:r>
+          </a:p>
+        </p:txBody>
+      </p:sp>
+      <p:sp>
+        <p:nvSpPr>
+          <p:cNvPr id="10" name="Rectangle 9"/>
+          <p:cNvSpPr/>
+          <p:nvPr/>
+        </p:nvSpPr>
+        <p:spPr>
+          <a:xfrm>
+            <a:off x="4184904" y="1097280"/>
+            <a:ext cx="3681983" cy="1920240"/>
+          </a:xfrm>
+          <a:prstGeom prst="rect">
+            <a:avLst/>
+          </a:prstGeom>
+          <a:solidFill>
+            <a:srgbClr val="E8F0F8"/>
+          </a:solidFill>
+          <a:ln>
+            <a:noFill/>
+          </a:ln>
+        </p:spPr>
+        <p:style>
+          <a:lnRef idx="1">
+            <a:schemeClr val="accent1"/>
+          </a:lnRef>
+          <a:fillRef idx="3">
+            <a:schemeClr val="accent1"/>
+          </a:fillRef>
+          <a:effectRef idx="2">
+            <a:schemeClr val="accent1"/>
+          </a:effectRef>
+          <a:fontRef idx="minor">
+            <a:schemeClr val="lt1"/>
+          </a:fontRef>
+        </p:style>
+        <p:txBody>
+          <a:bodyPr rtlCol="0" anchor="ctr"/>
+          <a:lstStyle/>
+          <a:p>
+            <a:pPr algn="ctr"/>
+          </a:p>
+        </p:txBody>
+      </p:sp>
+      <p:sp>
+        <p:nvSpPr>
+          <p:cNvPr id="11" name="Rectangle 10"/>
+          <p:cNvSpPr/>
+          <p:nvPr/>
+        </p:nvSpPr>
+        <p:spPr>
+          <a:xfrm>
+            <a:off x="4184904" y="1097280"/>
+            <a:ext cx="3681983" cy="73152"/>
+          </a:xfrm>
+          <a:prstGeom prst="rect">
+            <a:avLst/>
+          </a:prstGeom>
+          <a:solidFill>
+            <a:srgbClr val="1A335C"/>
+          </a:solidFill>
+          <a:ln>
+            <a:noFill/>
+          </a:ln>
+        </p:spPr>
+        <p:style>
+          <a:lnRef idx="1">
+            <a:schemeClr val="accent1"/>
+          </a:lnRef>
+          <a:fillRef idx="3">
+            <a:schemeClr val="accent1"/>
+          </a:fillRef>
+          <a:effectRef idx="2">
+            <a:schemeClr val="accent1"/>
+          </a:effectRef>
+          <a:fontRef idx="minor">
+            <a:schemeClr val="lt1"/>
+          </a:fontRef>
+        </p:style>
+        <p:txBody>
+          <a:bodyPr rtlCol="0" anchor="ctr"/>
+          <a:lstStyle/>
+          <a:p>
+            <a:pPr algn="ctr"/>
+          </a:p>
+        </p:txBody>
+      </p:sp>
+      <p:sp>
+        <p:nvSpPr>
+          <p:cNvPr id="12" name="TextBox 11"/>
           <p:cNvSpPr txBox="1"/>
           <p:nvPr/>
         </p:nvSpPr>
         <p:spPr>
           <a:xfrm>
-            <a:off x="411480" y="2542032"/>
-            <a:ext cx="11247120" cy="475488"/>
+            <a:off x="4184904" y="1234440"/>
+            <a:ext cx="3681983" cy="914400"/>
           </a:xfrm>
           <a:prstGeom prst="rect">
             <a:avLst/>
@@ -7439,28 +7273,28 @@
           </a:bodyPr>
           <a:lstStyle/>
           <a:p>
-            <a:pPr algn="l"/>
-            <a:r>
-              <a:rPr sz="1700" b="0" i="0">
-                <a:solidFill>
-                  <a:srgbClr val="1C1C1C"/>
+            <a:pPr algn="ctr"/>
+            <a:r>
+              <a:rPr sz="3000" b="1" i="0">
+                <a:solidFill>
+                  <a:srgbClr val="1A7A3C"/>
                 </a:solidFill>
               </a:rPr>
-              <a:t>▸ 当前模型层数（3层）较原论文（6层）偏浅，在 GPU 资源受限时是合理取舍</a:t>
-            </a:r>
-          </a:p>
-        </p:txBody>
-      </p:sp>
-      <p:sp>
-        <p:nvSpPr>
-          <p:cNvPr id="9" name="TextBox 8"/>
+              <a:t>16.63</a:t>
+            </a:r>
+          </a:p>
+        </p:txBody>
+      </p:sp>
+      <p:sp>
+        <p:nvSpPr>
+          <p:cNvPr id="13" name="TextBox 12"/>
           <p:cNvSpPr txBox="1"/>
           <p:nvPr/>
         </p:nvSpPr>
         <p:spPr>
           <a:xfrm>
-            <a:off x="411480" y="3017520"/>
-            <a:ext cx="11247120" cy="475488"/>
+            <a:off x="4184904" y="2194560"/>
+            <a:ext cx="3681983" cy="457200"/>
           </a:xfrm>
           <a:prstGeom prst="rect">
             <a:avLst/>
@@ -7473,28 +7307,28 @@
           </a:bodyPr>
           <a:lstStyle/>
           <a:p>
-            <a:pPr algn="l"/>
-            <a:r>
-              <a:rPr sz="1600" b="0" i="0">
-                <a:solidFill>
-                  <a:srgbClr val="555555"/>
+            <a:pPr algn="ctr"/>
+            <a:r>
+              <a:rPr sz="1300" b="0" i="0">
+                <a:solidFill>
+                  <a:srgbClr val="1C1C1C"/>
                 </a:solidFill>
               </a:rPr>
-              <a:t>    – 改进方向①：增大 d_model（256→512）和层数，提升模型容量</a:t>
-            </a:r>
-          </a:p>
-        </p:txBody>
-      </p:sp>
-      <p:sp>
-        <p:nvSpPr>
-          <p:cNvPr id="10" name="TextBox 9"/>
+              <a:t>best dev BLEU</a:t>
+            </a:r>
+          </a:p>
+        </p:txBody>
+      </p:sp>
+      <p:sp>
+        <p:nvSpPr>
+          <p:cNvPr id="14" name="TextBox 13"/>
           <p:cNvSpPr txBox="1"/>
           <p:nvPr/>
         </p:nvSpPr>
         <p:spPr>
           <a:xfrm>
-            <a:off x="411480" y="3493008"/>
-            <a:ext cx="11247120" cy="475488"/>
+            <a:off x="4184904" y="2633472"/>
+            <a:ext cx="3681983" cy="320040"/>
           </a:xfrm>
           <a:prstGeom prst="rect">
             <a:avLst/>
@@ -7507,28 +7341,114 @@
           </a:bodyPr>
           <a:lstStyle/>
           <a:p>
-            <a:pPr algn="l"/>
-            <a:r>
-              <a:rPr sz="1600" b="0" i="0">
+            <a:pPr algn="ctr"/>
+            <a:r>
+              <a:rPr sz="1100" b="0" i="1">
                 <a:solidFill>
                   <a:srgbClr val="555555"/>
                 </a:solidFill>
               </a:rPr>
-              <a:t>    – 改进方向②：使用 BPE 子词分词替代词粒度，减少 OOV 问题</a:t>
-            </a:r>
-          </a:p>
-        </p:txBody>
-      </p:sp>
-      <p:sp>
-        <p:nvSpPr>
-          <p:cNvPr id="11" name="TextBox 10"/>
+              <a:t>epoch 13</a:t>
+            </a:r>
+          </a:p>
+        </p:txBody>
+      </p:sp>
+      <p:sp>
+        <p:nvSpPr>
+          <p:cNvPr id="15" name="Rectangle 14"/>
+          <p:cNvSpPr/>
+          <p:nvPr/>
+        </p:nvSpPr>
+        <p:spPr>
+          <a:xfrm>
+            <a:off x="8004048" y="1097280"/>
+            <a:ext cx="3681983" cy="1920240"/>
+          </a:xfrm>
+          <a:prstGeom prst="rect">
+            <a:avLst/>
+          </a:prstGeom>
+          <a:solidFill>
+            <a:srgbClr val="E8F0F8"/>
+          </a:solidFill>
+          <a:ln>
+            <a:noFill/>
+          </a:ln>
+        </p:spPr>
+        <p:style>
+          <a:lnRef idx="1">
+            <a:schemeClr val="accent1"/>
+          </a:lnRef>
+          <a:fillRef idx="3">
+            <a:schemeClr val="accent1"/>
+          </a:fillRef>
+          <a:effectRef idx="2">
+            <a:schemeClr val="accent1"/>
+          </a:effectRef>
+          <a:fontRef idx="minor">
+            <a:schemeClr val="lt1"/>
+          </a:fontRef>
+        </p:style>
+        <p:txBody>
+          <a:bodyPr rtlCol="0" anchor="ctr"/>
+          <a:lstStyle/>
+          <a:p>
+            <a:pPr algn="ctr"/>
+          </a:p>
+        </p:txBody>
+      </p:sp>
+      <p:sp>
+        <p:nvSpPr>
+          <p:cNvPr id="16" name="Rectangle 15"/>
+          <p:cNvSpPr/>
+          <p:nvPr/>
+        </p:nvSpPr>
+        <p:spPr>
+          <a:xfrm>
+            <a:off x="8004048" y="1097280"/>
+            <a:ext cx="3681983" cy="73152"/>
+          </a:xfrm>
+          <a:prstGeom prst="rect">
+            <a:avLst/>
+          </a:prstGeom>
+          <a:solidFill>
+            <a:srgbClr val="1A335C"/>
+          </a:solidFill>
+          <a:ln>
+            <a:noFill/>
+          </a:ln>
+        </p:spPr>
+        <p:style>
+          <a:lnRef idx="1">
+            <a:schemeClr val="accent1"/>
+          </a:lnRef>
+          <a:fillRef idx="3">
+            <a:schemeClr val="accent1"/>
+          </a:fillRef>
+          <a:effectRef idx="2">
+            <a:schemeClr val="accent1"/>
+          </a:effectRef>
+          <a:fontRef idx="minor">
+            <a:schemeClr val="lt1"/>
+          </a:fontRef>
+        </p:style>
+        <p:txBody>
+          <a:bodyPr rtlCol="0" anchor="ctr"/>
+          <a:lstStyle/>
+          <a:p>
+            <a:pPr algn="ctr"/>
+          </a:p>
+        </p:txBody>
+      </p:sp>
+      <p:sp>
+        <p:nvSpPr>
+          <p:cNvPr id="17" name="TextBox 16"/>
           <p:cNvSpPr txBox="1"/>
           <p:nvPr/>
         </p:nvSpPr>
         <p:spPr>
           <a:xfrm>
-            <a:off x="411480" y="3968496"/>
-            <a:ext cx="11247120" cy="475488"/>
+            <a:off x="8004048" y="1234440"/>
+            <a:ext cx="3681983" cy="914400"/>
           </a:xfrm>
           <a:prstGeom prst="rect">
             <a:avLst/>
@@ -7541,21 +7461,259 @@
           </a:bodyPr>
           <a:lstStyle/>
           <a:p>
+            <a:pPr algn="ctr"/>
+            <a:r>
+              <a:rPr sz="3000" b="1" i="0">
+                <a:solidFill>
+                  <a:srgbClr val="1A7A3C"/>
+                </a:solidFill>
+              </a:rPr>
+              <a:t>+2.54</a:t>
+            </a:r>
+          </a:p>
+        </p:txBody>
+      </p:sp>
+      <p:sp>
+        <p:nvSpPr>
+          <p:cNvPr id="18" name="TextBox 17"/>
+          <p:cNvSpPr txBox="1"/>
+          <p:nvPr/>
+        </p:nvSpPr>
+        <p:spPr>
+          <a:xfrm>
+            <a:off x="8004048" y="2194560"/>
+            <a:ext cx="3681983" cy="457200"/>
+          </a:xfrm>
+          <a:prstGeom prst="rect">
+            <a:avLst/>
+          </a:prstGeom>
+          <a:noFill/>
+        </p:spPr>
+        <p:txBody>
+          <a:bodyPr wrap="square">
+            <a:spAutoFit/>
+          </a:bodyPr>
+          <a:lstStyle/>
+          <a:p>
+            <a:pPr algn="ctr"/>
+            <a:r>
+              <a:rPr sz="1300" b="0" i="0">
+                <a:solidFill>
+                  <a:srgbClr val="1C1C1C"/>
+                </a:solidFill>
+              </a:rPr>
+              <a:t>v1→v2 提升</a:t>
+            </a:r>
+          </a:p>
+        </p:txBody>
+      </p:sp>
+      <p:sp>
+        <p:nvSpPr>
+          <p:cNvPr id="19" name="TextBox 18"/>
+          <p:cNvSpPr txBox="1"/>
+          <p:nvPr/>
+        </p:nvSpPr>
+        <p:spPr>
+          <a:xfrm>
+            <a:off x="411480" y="3154680"/>
+            <a:ext cx="11247120" cy="475488"/>
+          </a:xfrm>
+          <a:prstGeom prst="rect">
+            <a:avLst/>
+          </a:prstGeom>
+          <a:noFill/>
+        </p:spPr>
+        <p:txBody>
+          <a:bodyPr wrap="square">
+            <a:spAutoFit/>
+          </a:bodyPr>
+          <a:lstStyle/>
+          <a:p>
             <a:pPr algn="l"/>
             <a:r>
               <a:rPr sz="1600" b="0" i="0">
                 <a:solidFill>
+                  <a:srgbClr val="1C1C1C"/>
+                </a:solidFill>
+              </a:rPr>
+              <a:t>▸ SRC：北约 不少 飞机 不得不 携弹 返航</a:t>
+            </a:r>
+          </a:p>
+        </p:txBody>
+      </p:sp>
+      <p:sp>
+        <p:nvSpPr>
+          <p:cNvPr id="20" name="TextBox 19"/>
+          <p:cNvSpPr txBox="1"/>
+          <p:nvPr/>
+        </p:nvSpPr>
+        <p:spPr>
+          <a:xfrm>
+            <a:off x="411480" y="3630168"/>
+            <a:ext cx="11247120" cy="475488"/>
+          </a:xfrm>
+          <a:prstGeom prst="rect">
+            <a:avLst/>
+          </a:prstGeom>
+          <a:noFill/>
+        </p:spPr>
+        <p:txBody>
+          <a:bodyPr wrap="square">
+            <a:spAutoFit/>
+          </a:bodyPr>
+          <a:lstStyle/>
+          <a:p>
+            <a:pPr algn="l"/>
+            <a:r>
+              <a:rPr sz="1500" b="0" i="0">
+                <a:solidFill>
                   <a:srgbClr val="555555"/>
                 </a:solidFill>
               </a:rPr>
-              <a:t>    – 改进方向③：引入 Warmup 学习率调度，进一步稳定训练</a:t>
-            </a:r>
-          </a:p>
-        </p:txBody>
-      </p:sp>
-      <p:sp>
-        <p:nvSpPr>
-          <p:cNvPr id="12" name="Rectangle 11"/>
+              <a:t>    – HYP：many nato planes have suddenly left the us plane for the planes .</a:t>
+            </a:r>
+          </a:p>
+        </p:txBody>
+      </p:sp>
+      <p:sp>
+        <p:nvSpPr>
+          <p:cNvPr id="21" name="TextBox 20"/>
+          <p:cNvSpPr txBox="1"/>
+          <p:nvPr/>
+        </p:nvSpPr>
+        <p:spPr>
+          <a:xfrm>
+            <a:off x="411480" y="4105656"/>
+            <a:ext cx="11247120" cy="475488"/>
+          </a:xfrm>
+          <a:prstGeom prst="rect">
+            <a:avLst/>
+          </a:prstGeom>
+          <a:noFill/>
+        </p:spPr>
+        <p:txBody>
+          <a:bodyPr wrap="square">
+            <a:spAutoFit/>
+          </a:bodyPr>
+          <a:lstStyle/>
+          <a:p>
+            <a:pPr algn="l"/>
+            <a:r>
+              <a:rPr sz="1600" b="0" i="0">
+                <a:solidFill>
+                  <a:srgbClr val="1C1C1C"/>
+                </a:solidFill>
+              </a:rPr>
+              <a:t>▸ SRC：世界 和平 需要 各国 共同 努力</a:t>
+            </a:r>
+          </a:p>
+        </p:txBody>
+      </p:sp>
+      <p:sp>
+        <p:nvSpPr>
+          <p:cNvPr id="22" name="TextBox 21"/>
+          <p:cNvSpPr txBox="1"/>
+          <p:nvPr/>
+        </p:nvSpPr>
+        <p:spPr>
+          <a:xfrm>
+            <a:off x="411480" y="4581144"/>
+            <a:ext cx="11247120" cy="475488"/>
+          </a:xfrm>
+          <a:prstGeom prst="rect">
+            <a:avLst/>
+          </a:prstGeom>
+          <a:noFill/>
+        </p:spPr>
+        <p:txBody>
+          <a:bodyPr wrap="square">
+            <a:spAutoFit/>
+          </a:bodyPr>
+          <a:lstStyle/>
+          <a:p>
+            <a:pPr algn="l"/>
+            <a:r>
+              <a:rPr sz="1500" b="0" i="0">
+                <a:solidFill>
+                  <a:srgbClr val="555555"/>
+                </a:solidFill>
+              </a:rPr>
+              <a:t>    – HYP：world peace requires common efforts to be made in the world .</a:t>
+            </a:r>
+          </a:p>
+        </p:txBody>
+      </p:sp>
+      <p:sp>
+        <p:nvSpPr>
+          <p:cNvPr id="23" name="TextBox 22"/>
+          <p:cNvSpPr txBox="1"/>
+          <p:nvPr/>
+        </p:nvSpPr>
+        <p:spPr>
+          <a:xfrm>
+            <a:off x="411480" y="5056631"/>
+            <a:ext cx="11247120" cy="475488"/>
+          </a:xfrm>
+          <a:prstGeom prst="rect">
+            <a:avLst/>
+          </a:prstGeom>
+          <a:noFill/>
+        </p:spPr>
+        <p:txBody>
+          <a:bodyPr wrap="square">
+            <a:spAutoFit/>
+          </a:bodyPr>
+          <a:lstStyle/>
+          <a:p>
+            <a:pPr algn="l"/>
+            <a:r>
+              <a:rPr sz="1600" b="0" i="0">
+                <a:solidFill>
+                  <a:srgbClr val="1C1C1C"/>
+                </a:solidFill>
+              </a:rPr>
+              <a:t>▸ SRC：中国 经济 保持 稳定 发展</a:t>
+            </a:r>
+          </a:p>
+        </p:txBody>
+      </p:sp>
+      <p:sp>
+        <p:nvSpPr>
+          <p:cNvPr id="24" name="TextBox 23"/>
+          <p:cNvSpPr txBox="1"/>
+          <p:nvPr/>
+        </p:nvSpPr>
+        <p:spPr>
+          <a:xfrm>
+            <a:off x="411480" y="5532119"/>
+            <a:ext cx="11247120" cy="475488"/>
+          </a:xfrm>
+          <a:prstGeom prst="rect">
+            <a:avLst/>
+          </a:prstGeom>
+          <a:noFill/>
+        </p:spPr>
+        <p:txBody>
+          <a:bodyPr wrap="square">
+            <a:spAutoFit/>
+          </a:bodyPr>
+          <a:lstStyle/>
+          <a:p>
+            <a:pPr algn="l"/>
+            <a:r>
+              <a:rPr sz="1500" b="0" i="0">
+                <a:solidFill>
+                  <a:srgbClr val="555555"/>
+                </a:solidFill>
+              </a:rPr>
+              <a:t>    – HYP：china 's economy is maintaining stability and development .</a:t>
+            </a:r>
+          </a:p>
+        </p:txBody>
+      </p:sp>
+      <p:sp>
+        <p:nvSpPr>
+          <p:cNvPr id="25" name="Rectangle 24"/>
           <p:cNvSpPr/>
           <p:nvPr/>
         </p:nvSpPr>

--- a/reports/exp4_nmt_transformer.pptx
+++ b/reports/exp4_nmt_transformer.pptx
@@ -3312,7 +3312,7 @@
                   <a:srgbClr val="A0B8D0"/>
                 </a:solidFill>
               </a:rPr>
-              <a:t>WevYang　|　中国科学院大学  深度学习</a:t>
+              <a:t>冯明　202528013229074　|　中国科学院大学  深度学习</a:t>
             </a:r>
           </a:p>
         </p:txBody>
@@ -7468,7 +7468,7 @@
                   <a:srgbClr val="1A7A3C"/>
                 </a:solidFill>
               </a:rPr>
-              <a:t>+2.54</a:t>
+              <a:t>3.5903</a:t>
             </a:r>
           </a:p>
         </p:txBody>
@@ -7502,7 +7502,7 @@
                   <a:srgbClr val="1C1C1C"/>
                 </a:solidFill>
               </a:rPr>
-              <a:t>v1→v2 提升</a:t>
+              <a:t>test loss</a:t>
             </a:r>
           </a:p>
         </p:txBody>
@@ -7536,7 +7536,7 @@
                   <a:srgbClr val="1C1C1C"/>
                 </a:solidFill>
               </a:rPr>
-              <a:t>▸ SRC：北约 不少 飞机 不得不 携弹 返航</a:t>
+              <a:t>▸ 各分量 BLEU：BLEU-1=44.2  BLEU-2=22.8  BLEU-3=16.1  BLEU-4=14.93</a:t>
             </a:r>
           </a:p>
         </p:txBody>
@@ -7565,12 +7565,12 @@
           <a:p>
             <a:pPr algn="l"/>
             <a:r>
-              <a:rPr sz="1500" b="0" i="0">
-                <a:solidFill>
-                  <a:srgbClr val="555555"/>
+              <a:rPr sz="1600" b="0" i="0">
+                <a:solidFill>
+                  <a:srgbClr val="1C1C1C"/>
                 </a:solidFill>
               </a:rPr>
-              <a:t>    – HYP：many nato planes have suddenly left the us plane for the planes .</a:t>
+              <a:t>▸ SRC：北约 不少 飞机 不得不 携弹 返航  →  HYP：many nato planes have suddenly left the us plane for the planes .</a:t>
             </a:r>
           </a:p>
         </p:txBody>
@@ -7604,7 +7604,7 @@
                   <a:srgbClr val="1C1C1C"/>
                 </a:solidFill>
               </a:rPr>
-              <a:t>▸ SRC：世界 和平 需要 各国 共同 努力</a:t>
+              <a:t>▸ SRC：世界 和平 需要 各国 共同 努力  →  HYP：world peace requires common efforts to be made in the world .</a:t>
             </a:r>
           </a:p>
         </p:txBody>
@@ -7633,12 +7633,12 @@
           <a:p>
             <a:pPr algn="l"/>
             <a:r>
-              <a:rPr sz="1500" b="0" i="0">
-                <a:solidFill>
-                  <a:srgbClr val="555555"/>
+              <a:rPr sz="1600" b="0" i="0">
+                <a:solidFill>
+                  <a:srgbClr val="1C1C1C"/>
                 </a:solidFill>
               </a:rPr>
-              <a:t>    – HYP：world peace requires common efforts to be made in the world .</a:t>
+              <a:t>▸ SRC：中国 经济 保持 稳定 发展  →  HYP：china 's economy is maintaining stability and development .</a:t>
             </a:r>
           </a:p>
         </p:txBody>
@@ -7672,48 +7672,14 @@
                   <a:srgbClr val="1C1C1C"/>
                 </a:solidFill>
               </a:rPr>
-              <a:t>▸ SRC：中国 经济 保持 稳定 发展</a:t>
-            </a:r>
-          </a:p>
-        </p:txBody>
-      </p:sp>
-      <p:sp>
-        <p:nvSpPr>
-          <p:cNvPr id="24" name="TextBox 23"/>
-          <p:cNvSpPr txBox="1"/>
-          <p:nvPr/>
-        </p:nvSpPr>
-        <p:spPr>
-          <a:xfrm>
-            <a:off x="411480" y="5532119"/>
-            <a:ext cx="11247120" cy="475488"/>
-          </a:xfrm>
-          <a:prstGeom prst="rect">
-            <a:avLst/>
-          </a:prstGeom>
-          <a:noFill/>
-        </p:spPr>
-        <p:txBody>
-          <a:bodyPr wrap="square">
-            <a:spAutoFit/>
-          </a:bodyPr>
-          <a:lstStyle/>
-          <a:p>
-            <a:pPr algn="l"/>
-            <a:r>
-              <a:rPr sz="1500" b="0" i="0">
-                <a:solidFill>
-                  <a:srgbClr val="555555"/>
-                </a:solidFill>
-              </a:rPr>
-              <a:t>    – HYP：china 's economy is maintaining stability and development .</a:t>
-            </a:r>
-          </a:p>
-        </p:txBody>
-      </p:sp>
-      <p:sp>
-        <p:nvSpPr>
-          <p:cNvPr id="25" name="Rectangle 24"/>
+              <a:t>▸ v1 贪心 BLEU=12.39 → +beam_search=13.8 → +20ep+clip+smooth=14.93（各步骤增量清晰）</a:t>
+            </a:r>
+          </a:p>
+        </p:txBody>
+      </p:sp>
+      <p:sp>
+        <p:nvSpPr>
+          <p:cNvPr id="24" name="Rectangle 23"/>
           <p:cNvSpPr/>
           <p:nvPr/>
         </p:nvSpPr>

--- a/reports/exp4_nmt_transformer.pptx
+++ b/reports/exp4_nmt_transformer.pptx
@@ -15,6 +15,7 @@
     <p:sldId id="263" r:id="rId14"/>
     <p:sldId id="264" r:id="rId15"/>
     <p:sldId id="265" r:id="rId16"/>
+    <p:sldId id="266" r:id="rId17"/>
   </p:sldIdLst>
   <p:sldSz cx="12188952" cy="6858000" type="screen4x3"/>
   <p:notesSz cx="6858000" cy="9144000"/>
@@ -3326,6 +3327,593 @@
 </file>
 
 <file path=ppt/slides/slide10.xml><?xml version="1.0" encoding="utf-8"?>
+<p:sld xmlns:a="http://schemas.openxmlformats.org/drawingml/2006/main" xmlns:p="http://schemas.openxmlformats.org/presentationml/2006/main" xmlns:r="http://schemas.openxmlformats.org/officeDocument/2006/relationships">
+  <p:cSld>
+    <p:bg>
+      <p:bgPr>
+        <a:solidFill>
+          <a:srgbClr val="FFFFFF"/>
+        </a:solidFill>
+        <a:effectLst/>
+      </p:bgPr>
+    </p:bg>
+    <p:spTree>
+      <p:nvGrpSpPr>
+        <p:cNvPr id="1" name=""/>
+        <p:cNvGrpSpPr/>
+        <p:nvPr/>
+      </p:nvGrpSpPr>
+      <p:grpSpPr/>
+      <p:sp>
+        <p:nvSpPr>
+          <p:cNvPr id="2" name="Rectangle 1"/>
+          <p:cNvSpPr/>
+          <p:nvPr/>
+        </p:nvSpPr>
+        <p:spPr>
+          <a:xfrm>
+            <a:off x="0" y="0"/>
+            <a:ext cx="12188952" cy="960120"/>
+          </a:xfrm>
+          <a:prstGeom prst="rect">
+            <a:avLst/>
+          </a:prstGeom>
+          <a:solidFill>
+            <a:srgbClr val="1A335C"/>
+          </a:solidFill>
+          <a:ln>
+            <a:noFill/>
+          </a:ln>
+        </p:spPr>
+        <p:style>
+          <a:lnRef idx="1">
+            <a:schemeClr val="accent1"/>
+          </a:lnRef>
+          <a:fillRef idx="3">
+            <a:schemeClr val="accent1"/>
+          </a:fillRef>
+          <a:effectRef idx="2">
+            <a:schemeClr val="accent1"/>
+          </a:effectRef>
+          <a:fontRef idx="minor">
+            <a:schemeClr val="lt1"/>
+          </a:fontRef>
+        </p:style>
+        <p:txBody>
+          <a:bodyPr rtlCol="0" anchor="ctr"/>
+          <a:lstStyle/>
+          <a:p>
+            <a:pPr algn="ctr"/>
+          </a:p>
+        </p:txBody>
+      </p:sp>
+      <p:sp>
+        <p:nvSpPr>
+          <p:cNvPr id="3" name="Rectangle 2"/>
+          <p:cNvSpPr/>
+          <p:nvPr/>
+        </p:nvSpPr>
+        <p:spPr>
+          <a:xfrm>
+            <a:off x="0" y="0"/>
+            <a:ext cx="164592" cy="6858000"/>
+          </a:xfrm>
+          <a:prstGeom prst="rect">
+            <a:avLst/>
+          </a:prstGeom>
+          <a:solidFill>
+            <a:srgbClr val="1A335C"/>
+          </a:solidFill>
+          <a:ln>
+            <a:noFill/>
+          </a:ln>
+        </p:spPr>
+        <p:style>
+          <a:lnRef idx="1">
+            <a:schemeClr val="accent1"/>
+          </a:lnRef>
+          <a:fillRef idx="3">
+            <a:schemeClr val="accent1"/>
+          </a:fillRef>
+          <a:effectRef idx="2">
+            <a:schemeClr val="accent1"/>
+          </a:effectRef>
+          <a:fontRef idx="minor">
+            <a:schemeClr val="lt1"/>
+          </a:fontRef>
+        </p:style>
+        <p:txBody>
+          <a:bodyPr rtlCol="0" anchor="ctr"/>
+          <a:lstStyle/>
+          <a:p>
+            <a:pPr algn="ctr"/>
+          </a:p>
+        </p:txBody>
+      </p:sp>
+      <p:sp>
+        <p:nvSpPr>
+          <p:cNvPr id="4" name="TextBox 3"/>
+          <p:cNvSpPr txBox="1"/>
+          <p:nvPr/>
+        </p:nvSpPr>
+        <p:spPr>
+          <a:xfrm>
+            <a:off x="347472" y="91440"/>
+            <a:ext cx="11521440" cy="777240"/>
+          </a:xfrm>
+          <a:prstGeom prst="rect">
+            <a:avLst/>
+          </a:prstGeom>
+          <a:noFill/>
+        </p:spPr>
+        <p:txBody>
+          <a:bodyPr wrap="square">
+            <a:spAutoFit/>
+          </a:bodyPr>
+          <a:lstStyle/>
+          <a:p>
+            <a:pPr algn="l"/>
+            <a:r>
+              <a:rPr sz="2300" b="1" i="0">
+                <a:solidFill>
+                  <a:srgbClr val="FFFFFF"/>
+                </a:solidFill>
+              </a:rPr>
+              <a:t>训练曲线分析</a:t>
+            </a:r>
+          </a:p>
+        </p:txBody>
+      </p:sp>
+      <p:pic>
+        <p:nvPicPr>
+          <p:cNvPr id="5" name="Picture 4" descr="exp4_curves.png"/>
+          <p:cNvPicPr>
+            <a:picLocks noChangeAspect="1"/>
+          </p:cNvPicPr>
+          <p:nvPr/>
+        </p:nvPicPr>
+        <p:blipFill>
+          <a:blip r:embed="rId2"/>
+          <a:stretch>
+            <a:fillRect/>
+          </a:stretch>
+        </p:blipFill>
+        <p:spPr>
+          <a:xfrm>
+            <a:off x="347472" y="1051560"/>
+            <a:ext cx="7589520" cy="5212080"/>
+          </a:xfrm>
+          <a:prstGeom prst="rect">
+            <a:avLst/>
+          </a:prstGeom>
+        </p:spPr>
+      </p:pic>
+      <p:sp>
+        <p:nvSpPr>
+          <p:cNvPr id="6" name="TextBox 5"/>
+          <p:cNvSpPr txBox="1"/>
+          <p:nvPr/>
+        </p:nvSpPr>
+        <p:spPr>
+          <a:xfrm>
+            <a:off x="8092440" y="1115568"/>
+            <a:ext cx="3886200" cy="475488"/>
+          </a:xfrm>
+          <a:prstGeom prst="rect">
+            <a:avLst/>
+          </a:prstGeom>
+          <a:noFill/>
+        </p:spPr>
+        <p:txBody>
+          <a:bodyPr wrap="square">
+            <a:spAutoFit/>
+          </a:bodyPr>
+          <a:lstStyle/>
+          <a:p>
+            <a:pPr algn="l"/>
+            <a:r>
+              <a:rPr sz="1400" b="0" i="0">
+                <a:solidFill>
+                  <a:srgbClr val="1C1C1C"/>
+                </a:solidFill>
+              </a:rPr>
+              <a:t>▸ Loss 曲线（左图）</a:t>
+            </a:r>
+          </a:p>
+        </p:txBody>
+      </p:sp>
+      <p:sp>
+        <p:nvSpPr>
+          <p:cNvPr id="7" name="TextBox 6"/>
+          <p:cNvSpPr txBox="1"/>
+          <p:nvPr/>
+        </p:nvSpPr>
+        <p:spPr>
+          <a:xfrm>
+            <a:off x="8092440" y="1627632"/>
+            <a:ext cx="3886200" cy="475488"/>
+          </a:xfrm>
+          <a:prstGeom prst="rect">
+            <a:avLst/>
+          </a:prstGeom>
+          <a:noFill/>
+        </p:spPr>
+        <p:txBody>
+          <a:bodyPr wrap="square">
+            <a:spAutoFit/>
+          </a:bodyPr>
+          <a:lstStyle/>
+          <a:p>
+            <a:pPr algn="l"/>
+            <a:r>
+              <a:rPr sz="1300" b="0" i="0">
+                <a:solidFill>
+                  <a:srgbClr val="555555"/>
+                </a:solidFill>
+              </a:rPr>
+              <a:t>  – train_loss: 5.92→3.80（持续下降）</a:t>
+            </a:r>
+          </a:p>
+        </p:txBody>
+      </p:sp>
+      <p:sp>
+        <p:nvSpPr>
+          <p:cNvPr id="8" name="TextBox 7"/>
+          <p:cNvSpPr txBox="1"/>
+          <p:nvPr/>
+        </p:nvSpPr>
+        <p:spPr>
+          <a:xfrm>
+            <a:off x="8092440" y="2139696"/>
+            <a:ext cx="3886200" cy="475488"/>
+          </a:xfrm>
+          <a:prstGeom prst="rect">
+            <a:avLst/>
+          </a:prstGeom>
+          <a:noFill/>
+        </p:spPr>
+        <p:txBody>
+          <a:bodyPr wrap="square">
+            <a:spAutoFit/>
+          </a:bodyPr>
+          <a:lstStyle/>
+          <a:p>
+            <a:pPr algn="l"/>
+            <a:r>
+              <a:rPr sz="1300" b="0" i="0">
+                <a:solidFill>
+                  <a:srgbClr val="555555"/>
+                </a:solidFill>
+              </a:rPr>
+              <a:t>  – dev_loss: 5.05→3.51（稳定收敛）</a:t>
+            </a:r>
+          </a:p>
+        </p:txBody>
+      </p:sp>
+      <p:sp>
+        <p:nvSpPr>
+          <p:cNvPr id="9" name="TextBox 8"/>
+          <p:cNvSpPr txBox="1"/>
+          <p:nvPr/>
+        </p:nvSpPr>
+        <p:spPr>
+          <a:xfrm>
+            <a:off x="8092440" y="2651760"/>
+            <a:ext cx="3886200" cy="475488"/>
+          </a:xfrm>
+          <a:prstGeom prst="rect">
+            <a:avLst/>
+          </a:prstGeom>
+          <a:noFill/>
+        </p:spPr>
+        <p:txBody>
+          <a:bodyPr wrap="square">
+            <a:spAutoFit/>
+          </a:bodyPr>
+          <a:lstStyle/>
+          <a:p>
+            <a:pPr algn="l"/>
+            <a:r>
+              <a:rPr sz="1400" b="0" i="0">
+                <a:solidFill>
+                  <a:srgbClr val="1C1C1C"/>
+                </a:solidFill>
+              </a:rPr>
+              <a:t>▸ BLEU 曲线（右图）</a:t>
+            </a:r>
+          </a:p>
+        </p:txBody>
+      </p:sp>
+      <p:sp>
+        <p:nvSpPr>
+          <p:cNvPr id="10" name="TextBox 9"/>
+          <p:cNvSpPr txBox="1"/>
+          <p:nvPr/>
+        </p:nvSpPr>
+        <p:spPr>
+          <a:xfrm>
+            <a:off x="8092440" y="3163824"/>
+            <a:ext cx="3886200" cy="475488"/>
+          </a:xfrm>
+          <a:prstGeom prst="rect">
+            <a:avLst/>
+          </a:prstGeom>
+          <a:noFill/>
+        </p:spPr>
+        <p:txBody>
+          <a:bodyPr wrap="square">
+            <a:spAutoFit/>
+          </a:bodyPr>
+          <a:lstStyle/>
+          <a:p>
+            <a:pPr algn="l"/>
+            <a:r>
+              <a:rPr sz="1300" b="0" i="0">
+                <a:solidFill>
+                  <a:srgbClr val="555555"/>
+                </a:solidFill>
+              </a:rPr>
+              <a:t>  – ep4 快速跳升至 11.96</a:t>
+            </a:r>
+          </a:p>
+        </p:txBody>
+      </p:sp>
+      <p:sp>
+        <p:nvSpPr>
+          <p:cNvPr id="11" name="TextBox 10"/>
+          <p:cNvSpPr txBox="1"/>
+          <p:nvPr/>
+        </p:nvSpPr>
+        <p:spPr>
+          <a:xfrm>
+            <a:off x="8092440" y="3675887"/>
+            <a:ext cx="3886200" cy="475488"/>
+          </a:xfrm>
+          <a:prstGeom prst="rect">
+            <a:avLst/>
+          </a:prstGeom>
+          <a:noFill/>
+        </p:spPr>
+        <p:txBody>
+          <a:bodyPr wrap="square">
+            <a:spAutoFit/>
+          </a:bodyPr>
+          <a:lstStyle/>
+          <a:p>
+            <a:pPr algn="l"/>
+            <a:r>
+              <a:rPr sz="1300" b="0" i="0">
+                <a:solidFill>
+                  <a:srgbClr val="555555"/>
+                </a:solidFill>
+              </a:rPr>
+              <a:t>  – ep12 首次破 14（目标线）</a:t>
+            </a:r>
+          </a:p>
+        </p:txBody>
+      </p:sp>
+      <p:sp>
+        <p:nvSpPr>
+          <p:cNvPr id="12" name="TextBox 11"/>
+          <p:cNvSpPr txBox="1"/>
+          <p:nvPr/>
+        </p:nvSpPr>
+        <p:spPr>
+          <a:xfrm>
+            <a:off x="8092440" y="4187952"/>
+            <a:ext cx="3886200" cy="475488"/>
+          </a:xfrm>
+          <a:prstGeom prst="rect">
+            <a:avLst/>
+          </a:prstGeom>
+          <a:noFill/>
+        </p:spPr>
+        <p:txBody>
+          <a:bodyPr wrap="square">
+            <a:spAutoFit/>
+          </a:bodyPr>
+          <a:lstStyle/>
+          <a:p>
+            <a:pPr algn="l"/>
+            <a:r>
+              <a:rPr sz="1300" b="0" i="0">
+                <a:solidFill>
+                  <a:srgbClr val="555555"/>
+                </a:solidFill>
+              </a:rPr>
+              <a:t>  – ep13 最优 dev=16.63（红点）</a:t>
+            </a:r>
+          </a:p>
+        </p:txBody>
+      </p:sp>
+      <p:sp>
+        <p:nvSpPr>
+          <p:cNvPr id="13" name="TextBox 12"/>
+          <p:cNvSpPr txBox="1"/>
+          <p:nvPr/>
+        </p:nvSpPr>
+        <p:spPr>
+          <a:xfrm>
+            <a:off x="8092440" y="4700016"/>
+            <a:ext cx="3886200" cy="475488"/>
+          </a:xfrm>
+          <a:prstGeom prst="rect">
+            <a:avLst/>
+          </a:prstGeom>
+          <a:noFill/>
+        </p:spPr>
+        <p:txBody>
+          <a:bodyPr wrap="square">
+            <a:spAutoFit/>
+          </a:bodyPr>
+          <a:lstStyle/>
+          <a:p>
+            <a:pPr algn="l"/>
+            <a:r>
+              <a:rPr sz="1300" b="0" i="0">
+                <a:solidFill>
+                  <a:srgbClr val="555555"/>
+                </a:solidFill>
+              </a:rPr>
+              <a:t>  – 橙色虚线：test_BLEU=14.93</a:t>
+            </a:r>
+          </a:p>
+        </p:txBody>
+      </p:sp>
+      <p:sp>
+        <p:nvSpPr>
+          <p:cNvPr id="14" name="TextBox 13"/>
+          <p:cNvSpPr txBox="1"/>
+          <p:nvPr/>
+        </p:nvSpPr>
+        <p:spPr>
+          <a:xfrm>
+            <a:off x="8092440" y="5212080"/>
+            <a:ext cx="3886200" cy="475488"/>
+          </a:xfrm>
+          <a:prstGeom prst="rect">
+            <a:avLst/>
+          </a:prstGeom>
+          <a:noFill/>
+        </p:spPr>
+        <p:txBody>
+          <a:bodyPr wrap="square">
+            <a:spAutoFit/>
+          </a:bodyPr>
+          <a:lstStyle/>
+          <a:p>
+            <a:pPr algn="l"/>
+            <a:r>
+              <a:rPr sz="1400" b="0" i="0">
+                <a:solidFill>
+                  <a:srgbClr val="1C1C1C"/>
+                </a:solidFill>
+              </a:rPr>
+              <a:t>▸ 关键结论</a:t>
+            </a:r>
+          </a:p>
+        </p:txBody>
+      </p:sp>
+      <p:sp>
+        <p:nvSpPr>
+          <p:cNvPr id="15" name="TextBox 14"/>
+          <p:cNvSpPr txBox="1"/>
+          <p:nvPr/>
+        </p:nvSpPr>
+        <p:spPr>
+          <a:xfrm>
+            <a:off x="8092440" y="5724144"/>
+            <a:ext cx="3886200" cy="475488"/>
+          </a:xfrm>
+          <a:prstGeom prst="rect">
+            <a:avLst/>
+          </a:prstGeom>
+          <a:noFill/>
+        </p:spPr>
+        <p:txBody>
+          <a:bodyPr wrap="square">
+            <a:spAutoFit/>
+          </a:bodyPr>
+          <a:lstStyle/>
+          <a:p>
+            <a:pPr algn="l"/>
+            <a:r>
+              <a:rPr sz="1300" b="0" i="0">
+                <a:solidFill>
+                  <a:srgbClr val="555555"/>
+                </a:solidFill>
+              </a:rPr>
+              <a:t>  – Beam Search 贡献最大（约+1.5）</a:t>
+            </a:r>
+          </a:p>
+        </p:txBody>
+      </p:sp>
+      <p:sp>
+        <p:nvSpPr>
+          <p:cNvPr id="16" name="TextBox 15"/>
+          <p:cNvSpPr txBox="1"/>
+          <p:nvPr/>
+        </p:nvSpPr>
+        <p:spPr>
+          <a:xfrm>
+            <a:off x="8092440" y="6236208"/>
+            <a:ext cx="3886200" cy="475488"/>
+          </a:xfrm>
+          <a:prstGeom prst="rect">
+            <a:avLst/>
+          </a:prstGeom>
+          <a:noFill/>
+        </p:spPr>
+        <p:txBody>
+          <a:bodyPr wrap="square">
+            <a:spAutoFit/>
+          </a:bodyPr>
+          <a:lstStyle/>
+          <a:p>
+            <a:pPr algn="l"/>
+            <a:r>
+              <a:rPr sz="1300" b="0" i="0">
+                <a:solidFill>
+                  <a:srgbClr val="555555"/>
+                </a:solidFill>
+              </a:rPr>
+              <a:t>  – ep13 后 BLEU 轻微波动但维持≥14</a:t>
+            </a:r>
+          </a:p>
+        </p:txBody>
+      </p:sp>
+      <p:sp>
+        <p:nvSpPr>
+          <p:cNvPr id="17" name="Rectangle 16"/>
+          <p:cNvSpPr/>
+          <p:nvPr/>
+        </p:nvSpPr>
+        <p:spPr>
+          <a:xfrm>
+            <a:off x="0" y="6748272"/>
+            <a:ext cx="12188952" cy="109728"/>
+          </a:xfrm>
+          <a:prstGeom prst="rect">
+            <a:avLst/>
+          </a:prstGeom>
+          <a:solidFill>
+            <a:srgbClr val="1A335C"/>
+          </a:solidFill>
+          <a:ln>
+            <a:noFill/>
+          </a:ln>
+        </p:spPr>
+        <p:style>
+          <a:lnRef idx="1">
+            <a:schemeClr val="accent1"/>
+          </a:lnRef>
+          <a:fillRef idx="3">
+            <a:schemeClr val="accent1"/>
+          </a:fillRef>
+          <a:effectRef idx="2">
+            <a:schemeClr val="accent1"/>
+          </a:effectRef>
+          <a:fontRef idx="minor">
+            <a:schemeClr val="lt1"/>
+          </a:fontRef>
+        </p:style>
+        <p:txBody>
+          <a:bodyPr rtlCol="0" anchor="ctr"/>
+          <a:lstStyle/>
+          <a:p>
+            <a:pPr algn="ctr"/>
+          </a:p>
+        </p:txBody>
+      </p:sp>
+    </p:spTree>
+  </p:cSld>
+  <p:clrMapOvr>
+    <a:masterClrMapping/>
+  </p:clrMapOvr>
+</p:sld>
+</file>
+
+<file path=ppt/slides/slide11.xml><?xml version="1.0" encoding="utf-8"?>
 <p:sld xmlns:a="http://schemas.openxmlformats.org/drawingml/2006/main" xmlns:p="http://schemas.openxmlformats.org/presentationml/2006/main" xmlns:r="http://schemas.openxmlformats.org/officeDocument/2006/relationships">
   <p:cSld>
     <p:bg>

--- a/reports/exp4_nmt_transformer.pptx
+++ b/reports/exp4_nmt_transformer.pptx
@@ -3279,7 +3279,7 @@
                   <a:srgbClr val="C8D8F0"/>
                 </a:solidFill>
               </a:rPr>
-              <a:t>中英 Encoder-Decoder NMT  |  BLEU-4 = 14.93 ✅  |  PyTorch</a:t>
+              <a:t>中英 Encoder-Decoder NMT  |  BLEU-4 = 14.93 ✅</a:t>
             </a:r>
           </a:p>
         </p:txBody>
